--- a/specs/Demand_Forecasting_SaaS_Overview.pptx
+++ b/specs/Demand_Forecasting_SaaS_Overview.pptx
@@ -68,79 +68,201 @@
             <a:noAutofit/>
           </a:bodyPr>
           <a:p>
-            <a:r>
-              <a:rPr b="0" lang="en-US" sz="1800" strike="noStrike" u="none">
-                <a:solidFill>
-                  <a:schemeClr val="dk1"/>
-                </a:solidFill>
-                <a:effectLst/>
-                <a:uFillTx/>
-                <a:latin typeface="Calibri"/>
-              </a:rPr>
-              <a:t>Click </a:t>
-            </a:r>
-            <a:r>
-              <a:rPr b="0" lang="en-US" sz="1800" strike="noStrike" u="none">
-                <a:solidFill>
-                  <a:schemeClr val="dk1"/>
-                </a:solidFill>
-                <a:effectLst/>
-                <a:uFillTx/>
-                <a:latin typeface="Calibri"/>
-              </a:rPr>
-              <a:t>to </a:t>
-            </a:r>
-            <a:r>
-              <a:rPr b="0" lang="en-US" sz="1800" strike="noStrike" u="none">
-                <a:solidFill>
-                  <a:schemeClr val="dk1"/>
-                </a:solidFill>
-                <a:effectLst/>
-                <a:uFillTx/>
-                <a:latin typeface="Calibri"/>
-              </a:rPr>
-              <a:t>mov</a:t>
-            </a:r>
-            <a:r>
-              <a:rPr b="0" lang="en-US" sz="1800" strike="noStrike" u="none">
-                <a:solidFill>
-                  <a:schemeClr val="dk1"/>
-                </a:solidFill>
-                <a:effectLst/>
-                <a:uFillTx/>
-                <a:latin typeface="Calibri"/>
+            <a:pPr algn="ctr"/>
+            <a:r>
+              <a:rPr b="0" lang="en-US" sz="4400" strike="noStrike" u="none">
+                <a:solidFill>
+                  <a:srgbClr val="000000"/>
+                </a:solidFill>
+                <a:effectLst/>
+                <a:uFillTx/>
+                <a:latin typeface="Arial"/>
+              </a:rPr>
+              <a:t>C</a:t>
+            </a:r>
+            <a:r>
+              <a:rPr b="0" lang="en-US" sz="4400" strike="noStrike" u="none">
+                <a:solidFill>
+                  <a:srgbClr val="000000"/>
+                </a:solidFill>
+                <a:effectLst/>
+                <a:uFillTx/>
+                <a:latin typeface="Arial"/>
+              </a:rPr>
+              <a:t>li</a:t>
+            </a:r>
+            <a:r>
+              <a:rPr b="0" lang="en-US" sz="4400" strike="noStrike" u="none">
+                <a:solidFill>
+                  <a:srgbClr val="000000"/>
+                </a:solidFill>
+                <a:effectLst/>
+                <a:uFillTx/>
+                <a:latin typeface="Arial"/>
+              </a:rPr>
+              <a:t>c</a:t>
+            </a:r>
+            <a:r>
+              <a:rPr b="0" lang="en-US" sz="4400" strike="noStrike" u="none">
+                <a:solidFill>
+                  <a:srgbClr val="000000"/>
+                </a:solidFill>
+                <a:effectLst/>
+                <a:uFillTx/>
+                <a:latin typeface="Arial"/>
+              </a:rPr>
+              <a:t>k </a:t>
+            </a:r>
+            <a:r>
+              <a:rPr b="0" lang="en-US" sz="4400" strike="noStrike" u="none">
+                <a:solidFill>
+                  <a:srgbClr val="000000"/>
+                </a:solidFill>
+                <a:effectLst/>
+                <a:uFillTx/>
+                <a:latin typeface="Arial"/>
+              </a:rPr>
+              <a:t>t</a:t>
+            </a:r>
+            <a:r>
+              <a:rPr b="0" lang="en-US" sz="4400" strike="noStrike" u="none">
+                <a:solidFill>
+                  <a:srgbClr val="000000"/>
+                </a:solidFill>
+                <a:effectLst/>
+                <a:uFillTx/>
+                <a:latin typeface="Arial"/>
+              </a:rPr>
+              <a:t>o </a:t>
+            </a:r>
+            <a:r>
+              <a:rPr b="0" lang="en-US" sz="4400" strike="noStrike" u="none">
+                <a:solidFill>
+                  <a:srgbClr val="000000"/>
+                </a:solidFill>
+                <a:effectLst/>
+                <a:uFillTx/>
+                <a:latin typeface="Arial"/>
+              </a:rPr>
+              <a:t>m</a:t>
+            </a:r>
+            <a:r>
+              <a:rPr b="0" lang="en-US" sz="4400" strike="noStrike" u="none">
+                <a:solidFill>
+                  <a:srgbClr val="000000"/>
+                </a:solidFill>
+                <a:effectLst/>
+                <a:uFillTx/>
+                <a:latin typeface="Arial"/>
+              </a:rPr>
+              <a:t>o</a:t>
+            </a:r>
+            <a:r>
+              <a:rPr b="0" lang="en-US" sz="4400" strike="noStrike" u="none">
+                <a:solidFill>
+                  <a:srgbClr val="000000"/>
+                </a:solidFill>
+                <a:effectLst/>
+                <a:uFillTx/>
+                <a:latin typeface="Arial"/>
+              </a:rPr>
+              <a:t>v</a:t>
+            </a:r>
+            <a:r>
+              <a:rPr b="0" lang="en-US" sz="4400" strike="noStrike" u="none">
+                <a:solidFill>
+                  <a:srgbClr val="000000"/>
+                </a:solidFill>
+                <a:effectLst/>
+                <a:uFillTx/>
+                <a:latin typeface="Arial"/>
               </a:rPr>
               <a:t>e </a:t>
             </a:r>
             <a:r>
-              <a:rPr b="0" lang="en-US" sz="1800" strike="noStrike" u="none">
-                <a:solidFill>
-                  <a:schemeClr val="dk1"/>
-                </a:solidFill>
-                <a:effectLst/>
-                <a:uFillTx/>
-                <a:latin typeface="Calibri"/>
-              </a:rPr>
-              <a:t>the </a:t>
-            </a:r>
-            <a:r>
-              <a:rPr b="0" lang="en-US" sz="1800" strike="noStrike" u="none">
-                <a:solidFill>
-                  <a:schemeClr val="dk1"/>
-                </a:solidFill>
-                <a:effectLst/>
-                <a:uFillTx/>
-                <a:latin typeface="Calibri"/>
-              </a:rPr>
-              <a:t>slide</a:t>
-            </a:r>
-            <a:endParaRPr b="0" lang="en-US" sz="1800" strike="noStrike" u="none">
-              <a:solidFill>
-                <a:schemeClr val="dk1"/>
-              </a:solidFill>
-              <a:effectLst/>
-              <a:uFillTx/>
-              <a:latin typeface="Calibri"/>
+              <a:rPr b="0" lang="en-US" sz="4400" strike="noStrike" u="none">
+                <a:solidFill>
+                  <a:srgbClr val="000000"/>
+                </a:solidFill>
+                <a:effectLst/>
+                <a:uFillTx/>
+                <a:latin typeface="Arial"/>
+              </a:rPr>
+              <a:t>t</a:t>
+            </a:r>
+            <a:r>
+              <a:rPr b="0" lang="en-US" sz="4400" strike="noStrike" u="none">
+                <a:solidFill>
+                  <a:srgbClr val="000000"/>
+                </a:solidFill>
+                <a:effectLst/>
+                <a:uFillTx/>
+                <a:latin typeface="Arial"/>
+              </a:rPr>
+              <a:t>h</a:t>
+            </a:r>
+            <a:r>
+              <a:rPr b="0" lang="en-US" sz="4400" strike="noStrike" u="none">
+                <a:solidFill>
+                  <a:srgbClr val="000000"/>
+                </a:solidFill>
+                <a:effectLst/>
+                <a:uFillTx/>
+                <a:latin typeface="Arial"/>
+              </a:rPr>
+              <a:t>e </a:t>
+            </a:r>
+            <a:r>
+              <a:rPr b="0" lang="en-US" sz="4400" strike="noStrike" u="none">
+                <a:solidFill>
+                  <a:srgbClr val="000000"/>
+                </a:solidFill>
+                <a:effectLst/>
+                <a:uFillTx/>
+                <a:latin typeface="Arial"/>
+              </a:rPr>
+              <a:t>s</a:t>
+            </a:r>
+            <a:r>
+              <a:rPr b="0" lang="en-US" sz="4400" strike="noStrike" u="none">
+                <a:solidFill>
+                  <a:srgbClr val="000000"/>
+                </a:solidFill>
+                <a:effectLst/>
+                <a:uFillTx/>
+                <a:latin typeface="Arial"/>
+              </a:rPr>
+              <a:t>li</a:t>
+            </a:r>
+            <a:r>
+              <a:rPr b="0" lang="en-US" sz="4400" strike="noStrike" u="none">
+                <a:solidFill>
+                  <a:srgbClr val="000000"/>
+                </a:solidFill>
+                <a:effectLst/>
+                <a:uFillTx/>
+                <a:latin typeface="Arial"/>
+              </a:rPr>
+              <a:t>d</a:t>
+            </a:r>
+            <a:r>
+              <a:rPr b="0" lang="en-US" sz="4400" strike="noStrike" u="none">
+                <a:solidFill>
+                  <a:srgbClr val="000000"/>
+                </a:solidFill>
+                <a:effectLst/>
+                <a:uFillTx/>
+                <a:latin typeface="Arial"/>
+              </a:rPr>
+              <a:t>e</a:t>
+            </a:r>
+            <a:endParaRPr b="0" lang="en-US" sz="4400" strike="noStrike" u="none">
+              <a:solidFill>
+                <a:srgbClr val="000000"/>
+              </a:solidFill>
+              <a:effectLst/>
+              <a:uFillTx/>
+              <a:latin typeface="Arial"/>
             </a:endParaRPr>
           </a:p>
         </p:txBody>
@@ -185,29 +307,7 @@
                 <a:uFillTx/>
                 <a:latin typeface="Arial"/>
               </a:rPr>
-              <a:t>Click to edit </a:t>
-            </a:r>
-            <a:r>
-              <a:rPr b="0" lang="en-US" sz="2000" strike="noStrike" u="none">
-                <a:solidFill>
-                  <a:srgbClr val="000000"/>
-                </a:solidFill>
-                <a:effectLst/>
-                <a:uFillTx/>
-                <a:latin typeface="Arial"/>
-              </a:rPr>
-              <a:t>the notes </a:t>
-            </a:r>
-            <a:r>
-              <a:rPr b="0" lang="en-US" sz="2000" strike="noStrike" u="none">
-                <a:solidFill>
-                  <a:srgbClr val="000000"/>
-                </a:solidFill>
-                <a:effectLst/>
-                <a:uFillTx/>
-                <a:latin typeface="Arial"/>
-              </a:rPr>
-              <a:t>format</a:t>
+              <a:t>Click to edit the notes format</a:t>
             </a:r>
             <a:endParaRPr b="0" lang="en-US" sz="2000" strike="noStrike" u="none">
               <a:solidFill>
@@ -449,7 +549,7 @@
             <a:pPr indent="0" algn="r">
               <a:buNone/>
             </a:pPr>
-            <a:fld id="{E51BA410-FB78-4099-94BE-F2007A0F9329}" type="slidenum">
+            <a:fld id="{42F499FB-9CAD-49BA-B701-01E7C087A1D2}" type="slidenum">
               <a:rPr b="0" lang="en-US" sz="1400" strike="noStrike" u="none">
                 <a:solidFill>
                   <a:srgbClr val="000000"/>
@@ -496,7 +596,7 @@
       </p:grpSpPr>
       <p:sp>
         <p:nvSpPr>
-          <p:cNvPr id="287" name="PlaceHolder 1"/>
+          <p:cNvPr id="300" name="PlaceHolder 1"/>
           <p:cNvSpPr>
             <a:spLocks noGrp="1"/>
           </p:cNvSpPr>
@@ -507,19 +607,19 @@
         <p:spPr>
           <a:xfrm>
             <a:off x="685800" y="1143000"/>
-            <a:ext cx="5486040" cy="3085920"/>
-          </a:xfrm>
-          <a:prstGeom prst="rect">
-            <a:avLst/>
-          </a:prstGeom>
-          <a:ln w="0">
-            <a:noFill/>
-          </a:ln>
-        </p:spPr>
-      </p:sp>
-      <p:sp>
-        <p:nvSpPr>
-          <p:cNvPr id="288" name="PlaceHolder 2"/>
+            <a:ext cx="5484960" cy="3084840"/>
+          </a:xfrm>
+          <a:prstGeom prst="rect">
+            <a:avLst/>
+          </a:prstGeom>
+          <a:ln w="0">
+            <a:noFill/>
+          </a:ln>
+        </p:spPr>
+      </p:sp>
+      <p:sp>
+        <p:nvSpPr>
+          <p:cNvPr id="301" name="PlaceHolder 2"/>
           <p:cNvSpPr>
             <a:spLocks noGrp="1"/>
           </p:cNvSpPr>
@@ -530,7 +630,7 @@
         <p:spPr>
           <a:xfrm>
             <a:off x="685800" y="4400640"/>
-            <a:ext cx="5486040" cy="3600000"/>
+            <a:ext cx="5484960" cy="3598920"/>
           </a:xfrm>
           <a:prstGeom prst="rect">
             <a:avLst/>
@@ -561,7 +661,7 @@
       </p:sp>
       <p:sp>
         <p:nvSpPr>
-          <p:cNvPr id="289" name="PlaceHolder 3"/>
+          <p:cNvPr id="302" name="PlaceHolder 3"/>
           <p:cNvSpPr>
             <a:spLocks noGrp="1"/>
           </p:cNvSpPr>
@@ -572,7 +672,7 @@
         <p:spPr>
           <a:xfrm>
             <a:off x="3884760" y="8685360"/>
-            <a:ext cx="2971440" cy="458280"/>
+            <a:ext cx="2970360" cy="457200"/>
           </a:xfrm>
           <a:prstGeom prst="rect">
             <a:avLst/>
@@ -592,6 +692,9 @@
                 <a:spcPct val="100000"/>
               </a:lnSpc>
               <a:buNone/>
+              <a:tabLst>
+                <a:tab algn="l" pos="0"/>
+              </a:tabLst>
               <a:defRPr b="0" lang="en-US" sz="1200" strike="noStrike" u="none">
                 <a:solidFill>
                   <a:schemeClr val="dk1"/>
@@ -609,8 +712,11 @@
                 <a:spcPct val="100000"/>
               </a:lnSpc>
               <a:buNone/>
-            </a:pPr>
-            <a:fld id="{DAC93960-70C2-47CC-8CE4-4B3B085520CA}" type="slidenum">
+              <a:tabLst>
+                <a:tab algn="l" pos="0"/>
+              </a:tabLst>
+            </a:pPr>
+            <a:fld id="{64D2CA1E-E4E9-4022-A439-E6A282A0CE36}" type="slidenum">
               <a:rPr b="0" lang="en-US" sz="1200" strike="noStrike" u="none">
                 <a:solidFill>
                   <a:schemeClr val="dk1"/>
@@ -657,7 +763,7 @@
       </p:grpSpPr>
       <p:sp>
         <p:nvSpPr>
-          <p:cNvPr id="290" name="PlaceHolder 1"/>
+          <p:cNvPr id="303" name="PlaceHolder 1"/>
           <p:cNvSpPr>
             <a:spLocks noGrp="1"/>
           </p:cNvSpPr>
@@ -668,19 +774,19 @@
         <p:spPr>
           <a:xfrm>
             <a:off x="685800" y="1143000"/>
-            <a:ext cx="5486040" cy="3085920"/>
-          </a:xfrm>
-          <a:prstGeom prst="rect">
-            <a:avLst/>
-          </a:prstGeom>
-          <a:ln w="0">
-            <a:noFill/>
-          </a:ln>
-        </p:spPr>
-      </p:sp>
-      <p:sp>
-        <p:nvSpPr>
-          <p:cNvPr id="291" name="PlaceHolder 2"/>
+            <a:ext cx="5484960" cy="3084840"/>
+          </a:xfrm>
+          <a:prstGeom prst="rect">
+            <a:avLst/>
+          </a:prstGeom>
+          <a:ln w="0">
+            <a:noFill/>
+          </a:ln>
+        </p:spPr>
+      </p:sp>
+      <p:sp>
+        <p:nvSpPr>
+          <p:cNvPr id="304" name="PlaceHolder 2"/>
           <p:cNvSpPr>
             <a:spLocks noGrp="1"/>
           </p:cNvSpPr>
@@ -691,7 +797,7 @@
         <p:spPr>
           <a:xfrm>
             <a:off x="685800" y="4400640"/>
-            <a:ext cx="5486040" cy="3600000"/>
+            <a:ext cx="5484960" cy="3598920"/>
           </a:xfrm>
           <a:prstGeom prst="rect">
             <a:avLst/>
@@ -722,7 +828,7 @@
       </p:sp>
       <p:sp>
         <p:nvSpPr>
-          <p:cNvPr id="292" name="PlaceHolder 3"/>
+          <p:cNvPr id="305" name="PlaceHolder 3"/>
           <p:cNvSpPr>
             <a:spLocks noGrp="1"/>
           </p:cNvSpPr>
@@ -733,7 +839,7 @@
         <p:spPr>
           <a:xfrm>
             <a:off x="3884760" y="8685360"/>
-            <a:ext cx="2971440" cy="458280"/>
+            <a:ext cx="2970360" cy="457200"/>
           </a:xfrm>
           <a:prstGeom prst="rect">
             <a:avLst/>
@@ -753,6 +859,9 @@
                 <a:spcPct val="100000"/>
               </a:lnSpc>
               <a:buNone/>
+              <a:tabLst>
+                <a:tab algn="l" pos="0"/>
+              </a:tabLst>
               <a:defRPr b="0" lang="en-US" sz="1200" strike="noStrike" u="none">
                 <a:solidFill>
                   <a:schemeClr val="dk1"/>
@@ -770,8 +879,11 @@
                 <a:spcPct val="100000"/>
               </a:lnSpc>
               <a:buNone/>
-            </a:pPr>
-            <a:fld id="{4B86CB5F-7E23-4177-A080-170A92B6A857}" type="slidenum">
+              <a:tabLst>
+                <a:tab algn="l" pos="0"/>
+              </a:tabLst>
+            </a:pPr>
+            <a:fld id="{7AB60BB7-73A5-4F76-BC57-728C403CB977}" type="slidenum">
               <a:rPr b="0" lang="en-US" sz="1200" strike="noStrike" u="none">
                 <a:solidFill>
                   <a:schemeClr val="dk1"/>
@@ -818,7 +930,7 @@
       </p:grpSpPr>
       <p:sp>
         <p:nvSpPr>
-          <p:cNvPr id="293" name="PlaceHolder 1"/>
+          <p:cNvPr id="306" name="PlaceHolder 1"/>
           <p:cNvSpPr>
             <a:spLocks noGrp="1"/>
           </p:cNvSpPr>
@@ -829,19 +941,19 @@
         <p:spPr>
           <a:xfrm>
             <a:off x="685800" y="1143000"/>
-            <a:ext cx="5486040" cy="3085920"/>
-          </a:xfrm>
-          <a:prstGeom prst="rect">
-            <a:avLst/>
-          </a:prstGeom>
-          <a:ln w="0">
-            <a:noFill/>
-          </a:ln>
-        </p:spPr>
-      </p:sp>
-      <p:sp>
-        <p:nvSpPr>
-          <p:cNvPr id="294" name="PlaceHolder 2"/>
+            <a:ext cx="5484960" cy="3084840"/>
+          </a:xfrm>
+          <a:prstGeom prst="rect">
+            <a:avLst/>
+          </a:prstGeom>
+          <a:ln w="0">
+            <a:noFill/>
+          </a:ln>
+        </p:spPr>
+      </p:sp>
+      <p:sp>
+        <p:nvSpPr>
+          <p:cNvPr id="307" name="PlaceHolder 2"/>
           <p:cNvSpPr>
             <a:spLocks noGrp="1"/>
           </p:cNvSpPr>
@@ -852,7 +964,7 @@
         <p:spPr>
           <a:xfrm>
             <a:off x="685800" y="4400640"/>
-            <a:ext cx="5486040" cy="3600000"/>
+            <a:ext cx="5484960" cy="3598920"/>
           </a:xfrm>
           <a:prstGeom prst="rect">
             <a:avLst/>
@@ -883,7 +995,7 @@
       </p:sp>
       <p:sp>
         <p:nvSpPr>
-          <p:cNvPr id="295" name="PlaceHolder 3"/>
+          <p:cNvPr id="308" name="PlaceHolder 3"/>
           <p:cNvSpPr>
             <a:spLocks noGrp="1"/>
           </p:cNvSpPr>
@@ -894,7 +1006,7 @@
         <p:spPr>
           <a:xfrm>
             <a:off x="3884760" y="8685360"/>
-            <a:ext cx="2971440" cy="458280"/>
+            <a:ext cx="2970360" cy="457200"/>
           </a:xfrm>
           <a:prstGeom prst="rect">
             <a:avLst/>
@@ -914,6 +1026,9 @@
                 <a:spcPct val="100000"/>
               </a:lnSpc>
               <a:buNone/>
+              <a:tabLst>
+                <a:tab algn="l" pos="0"/>
+              </a:tabLst>
               <a:defRPr b="0" lang="en-US" sz="1200" strike="noStrike" u="none">
                 <a:solidFill>
                   <a:schemeClr val="dk1"/>
@@ -931,8 +1046,11 @@
                 <a:spcPct val="100000"/>
               </a:lnSpc>
               <a:buNone/>
-            </a:pPr>
-            <a:fld id="{872C068E-9ABD-4F39-A058-D428F58B796F}" type="slidenum">
+              <a:tabLst>
+                <a:tab algn="l" pos="0"/>
+              </a:tabLst>
+            </a:pPr>
+            <a:fld id="{10085578-67B3-4FF7-ABB6-7B0028F45EA4}" type="slidenum">
               <a:rPr b="0" lang="en-US" sz="1200" strike="noStrike" u="none">
                 <a:solidFill>
                   <a:schemeClr val="dk1"/>
@@ -942,7 +1060,7 @@
                 <a:latin typeface="+mn-lt"/>
                 <a:ea typeface="+mn-ea"/>
               </a:rPr>
-              <a:t>1</a:t>
+              <a:t>&lt;number&gt;</a:t>
             </a:fld>
             <a:endParaRPr b="0" lang="en-US" sz="1200" strike="noStrike" u="none">
               <a:solidFill>
@@ -979,7 +1097,7 @@
       </p:grpSpPr>
       <p:sp>
         <p:nvSpPr>
-          <p:cNvPr id="296" name="PlaceHolder 1"/>
+          <p:cNvPr id="309" name="PlaceHolder 1"/>
           <p:cNvSpPr>
             <a:spLocks noGrp="1"/>
           </p:cNvSpPr>
@@ -990,19 +1108,19 @@
         <p:spPr>
           <a:xfrm>
             <a:off x="685800" y="1143000"/>
-            <a:ext cx="5486040" cy="3085920"/>
-          </a:xfrm>
-          <a:prstGeom prst="rect">
-            <a:avLst/>
-          </a:prstGeom>
-          <a:ln w="0">
-            <a:noFill/>
-          </a:ln>
-        </p:spPr>
-      </p:sp>
-      <p:sp>
-        <p:nvSpPr>
-          <p:cNvPr id="297" name="PlaceHolder 2"/>
+            <a:ext cx="5484960" cy="3084840"/>
+          </a:xfrm>
+          <a:prstGeom prst="rect">
+            <a:avLst/>
+          </a:prstGeom>
+          <a:ln w="0">
+            <a:noFill/>
+          </a:ln>
+        </p:spPr>
+      </p:sp>
+      <p:sp>
+        <p:nvSpPr>
+          <p:cNvPr id="310" name="PlaceHolder 2"/>
           <p:cNvSpPr>
             <a:spLocks noGrp="1"/>
           </p:cNvSpPr>
@@ -1013,7 +1131,7 @@
         <p:spPr>
           <a:xfrm>
             <a:off x="685800" y="4400640"/>
-            <a:ext cx="5486040" cy="3600000"/>
+            <a:ext cx="5484960" cy="3598920"/>
           </a:xfrm>
           <a:prstGeom prst="rect">
             <a:avLst/>
@@ -1044,7 +1162,7 @@
       </p:sp>
       <p:sp>
         <p:nvSpPr>
-          <p:cNvPr id="298" name="PlaceHolder 3"/>
+          <p:cNvPr id="311" name="PlaceHolder 3"/>
           <p:cNvSpPr>
             <a:spLocks noGrp="1"/>
           </p:cNvSpPr>
@@ -1055,7 +1173,7 @@
         <p:spPr>
           <a:xfrm>
             <a:off x="3884760" y="8685360"/>
-            <a:ext cx="2971440" cy="458280"/>
+            <a:ext cx="2970360" cy="457200"/>
           </a:xfrm>
           <a:prstGeom prst="rect">
             <a:avLst/>
@@ -1075,6 +1193,9 @@
                 <a:spcPct val="100000"/>
               </a:lnSpc>
               <a:buNone/>
+              <a:tabLst>
+                <a:tab algn="l" pos="0"/>
+              </a:tabLst>
               <a:defRPr b="0" lang="en-US" sz="1200" strike="noStrike" u="none">
                 <a:solidFill>
                   <a:schemeClr val="dk1"/>
@@ -1092,8 +1213,11 @@
                 <a:spcPct val="100000"/>
               </a:lnSpc>
               <a:buNone/>
-            </a:pPr>
-            <a:fld id="{56D4F3C0-FBB1-40EB-8B78-15929F582963}" type="slidenum">
+              <a:tabLst>
+                <a:tab algn="l" pos="0"/>
+              </a:tabLst>
+            </a:pPr>
+            <a:fld id="{A5668CE3-B869-4F74-9EF6-1A3D4C397E22}" type="slidenum">
               <a:rPr b="0" lang="en-US" sz="1200" strike="noStrike" u="none">
                 <a:solidFill>
                   <a:schemeClr val="dk1"/>
@@ -1103,7 +1227,7 @@
                 <a:latin typeface="+mn-lt"/>
                 <a:ea typeface="+mn-ea"/>
               </a:rPr>
-              <a:t>1</a:t>
+              <a:t>&lt;number&gt;</a:t>
             </a:fld>
             <a:endParaRPr b="0" lang="en-US" sz="1200" strike="noStrike" u="none">
               <a:solidFill>
@@ -1140,7 +1264,7 @@
       </p:grpSpPr>
       <p:sp>
         <p:nvSpPr>
-          <p:cNvPr id="299" name="PlaceHolder 1"/>
+          <p:cNvPr id="312" name="PlaceHolder 1"/>
           <p:cNvSpPr>
             <a:spLocks noGrp="1"/>
           </p:cNvSpPr>
@@ -1151,19 +1275,19 @@
         <p:spPr>
           <a:xfrm>
             <a:off x="685800" y="1143000"/>
-            <a:ext cx="5486040" cy="3085920"/>
-          </a:xfrm>
-          <a:prstGeom prst="rect">
-            <a:avLst/>
-          </a:prstGeom>
-          <a:ln w="0">
-            <a:noFill/>
-          </a:ln>
-        </p:spPr>
-      </p:sp>
-      <p:sp>
-        <p:nvSpPr>
-          <p:cNvPr id="300" name="PlaceHolder 2"/>
+            <a:ext cx="5484960" cy="3084840"/>
+          </a:xfrm>
+          <a:prstGeom prst="rect">
+            <a:avLst/>
+          </a:prstGeom>
+          <a:ln w="0">
+            <a:noFill/>
+          </a:ln>
+        </p:spPr>
+      </p:sp>
+      <p:sp>
+        <p:nvSpPr>
+          <p:cNvPr id="313" name="PlaceHolder 2"/>
           <p:cNvSpPr>
             <a:spLocks noGrp="1"/>
           </p:cNvSpPr>
@@ -1174,7 +1298,7 @@
         <p:spPr>
           <a:xfrm>
             <a:off x="685800" y="4400640"/>
-            <a:ext cx="5486040" cy="3600000"/>
+            <a:ext cx="5484960" cy="3598920"/>
           </a:xfrm>
           <a:prstGeom prst="rect">
             <a:avLst/>
@@ -1205,7 +1329,7 @@
       </p:sp>
       <p:sp>
         <p:nvSpPr>
-          <p:cNvPr id="301" name="PlaceHolder 3"/>
+          <p:cNvPr id="314" name="PlaceHolder 3"/>
           <p:cNvSpPr>
             <a:spLocks noGrp="1"/>
           </p:cNvSpPr>
@@ -1216,7 +1340,7 @@
         <p:spPr>
           <a:xfrm>
             <a:off x="3884760" y="8685360"/>
-            <a:ext cx="2971440" cy="458280"/>
+            <a:ext cx="2970360" cy="457200"/>
           </a:xfrm>
           <a:prstGeom prst="rect">
             <a:avLst/>
@@ -1236,6 +1360,9 @@
                 <a:spcPct val="100000"/>
               </a:lnSpc>
               <a:buNone/>
+              <a:tabLst>
+                <a:tab algn="l" pos="0"/>
+              </a:tabLst>
               <a:defRPr b="0" lang="en-US" sz="1200" strike="noStrike" u="none">
                 <a:solidFill>
                   <a:schemeClr val="dk1"/>
@@ -1253,8 +1380,11 @@
                 <a:spcPct val="100000"/>
               </a:lnSpc>
               <a:buNone/>
-            </a:pPr>
-            <a:fld id="{1D5E326B-3FE2-4087-A51D-12E0647A07F2}" type="slidenum">
+              <a:tabLst>
+                <a:tab algn="l" pos="0"/>
+              </a:tabLst>
+            </a:pPr>
+            <a:fld id="{1D9E6664-FA31-4C11-AF00-BC05E281A794}" type="slidenum">
               <a:rPr b="0" lang="en-US" sz="1200" strike="noStrike" u="none">
                 <a:solidFill>
                   <a:schemeClr val="dk1"/>
@@ -1264,7 +1394,7 @@
                 <a:latin typeface="+mn-lt"/>
                 <a:ea typeface="+mn-ea"/>
               </a:rPr>
-              <a:t>1</a:t>
+              <a:t>&lt;number&gt;</a:t>
             </a:fld>
             <a:endParaRPr b="0" lang="en-US" sz="1200" strike="noStrike" u="none">
               <a:solidFill>
@@ -1301,7 +1431,7 @@
       </p:grpSpPr>
       <p:sp>
         <p:nvSpPr>
-          <p:cNvPr id="302" name="PlaceHolder 1"/>
+          <p:cNvPr id="315" name="PlaceHolder 1"/>
           <p:cNvSpPr>
             <a:spLocks noGrp="1"/>
           </p:cNvSpPr>
@@ -1312,19 +1442,19 @@
         <p:spPr>
           <a:xfrm>
             <a:off x="685800" y="1143000"/>
-            <a:ext cx="5486040" cy="3085920"/>
-          </a:xfrm>
-          <a:prstGeom prst="rect">
-            <a:avLst/>
-          </a:prstGeom>
-          <a:ln w="0">
-            <a:noFill/>
-          </a:ln>
-        </p:spPr>
-      </p:sp>
-      <p:sp>
-        <p:nvSpPr>
-          <p:cNvPr id="303" name="PlaceHolder 2"/>
+            <a:ext cx="5484960" cy="3084840"/>
+          </a:xfrm>
+          <a:prstGeom prst="rect">
+            <a:avLst/>
+          </a:prstGeom>
+          <a:ln w="0">
+            <a:noFill/>
+          </a:ln>
+        </p:spPr>
+      </p:sp>
+      <p:sp>
+        <p:nvSpPr>
+          <p:cNvPr id="316" name="PlaceHolder 2"/>
           <p:cNvSpPr>
             <a:spLocks noGrp="1"/>
           </p:cNvSpPr>
@@ -1335,7 +1465,7 @@
         <p:spPr>
           <a:xfrm>
             <a:off x="685800" y="4400640"/>
-            <a:ext cx="5486040" cy="3600000"/>
+            <a:ext cx="5484960" cy="3598920"/>
           </a:xfrm>
           <a:prstGeom prst="rect">
             <a:avLst/>
@@ -1366,7 +1496,7 @@
       </p:sp>
       <p:sp>
         <p:nvSpPr>
-          <p:cNvPr id="304" name="PlaceHolder 3"/>
+          <p:cNvPr id="317" name="PlaceHolder 3"/>
           <p:cNvSpPr>
             <a:spLocks noGrp="1"/>
           </p:cNvSpPr>
@@ -1377,7 +1507,7 @@
         <p:spPr>
           <a:xfrm>
             <a:off x="3884760" y="8685360"/>
-            <a:ext cx="2971440" cy="458280"/>
+            <a:ext cx="2970360" cy="457200"/>
           </a:xfrm>
           <a:prstGeom prst="rect">
             <a:avLst/>
@@ -1397,6 +1527,9 @@
                 <a:spcPct val="100000"/>
               </a:lnSpc>
               <a:buNone/>
+              <a:tabLst>
+                <a:tab algn="l" pos="0"/>
+              </a:tabLst>
               <a:defRPr b="0" lang="en-US" sz="1200" strike="noStrike" u="none">
                 <a:solidFill>
                   <a:schemeClr val="dk1"/>
@@ -1414,8 +1547,11 @@
                 <a:spcPct val="100000"/>
               </a:lnSpc>
               <a:buNone/>
-            </a:pPr>
-            <a:fld id="{3DCA2CC4-D855-431F-89F0-C77FA0A29097}" type="slidenum">
+              <a:tabLst>
+                <a:tab algn="l" pos="0"/>
+              </a:tabLst>
+            </a:pPr>
+            <a:fld id="{1DE10F82-204E-482C-9A4C-124290CD86F5}" type="slidenum">
               <a:rPr b="0" lang="en-US" sz="1200" strike="noStrike" u="none">
                 <a:solidFill>
                   <a:schemeClr val="dk1"/>
@@ -1425,7 +1561,7 @@
                 <a:latin typeface="+mn-lt"/>
                 <a:ea typeface="+mn-ea"/>
               </a:rPr>
-              <a:t>1</a:t>
+              <a:t>&lt;number&gt;</a:t>
             </a:fld>
             <a:endParaRPr b="0" lang="en-US" sz="1200" strike="noStrike" u="none">
               <a:solidFill>
@@ -1462,7 +1598,7 @@
       </p:grpSpPr>
       <p:sp>
         <p:nvSpPr>
-          <p:cNvPr id="305" name="PlaceHolder 1"/>
+          <p:cNvPr id="318" name="PlaceHolder 1"/>
           <p:cNvSpPr>
             <a:spLocks noGrp="1"/>
           </p:cNvSpPr>
@@ -1473,19 +1609,19 @@
         <p:spPr>
           <a:xfrm>
             <a:off x="685800" y="1143000"/>
-            <a:ext cx="5486040" cy="3085920"/>
-          </a:xfrm>
-          <a:prstGeom prst="rect">
-            <a:avLst/>
-          </a:prstGeom>
-          <a:ln w="0">
-            <a:noFill/>
-          </a:ln>
-        </p:spPr>
-      </p:sp>
-      <p:sp>
-        <p:nvSpPr>
-          <p:cNvPr id="306" name="PlaceHolder 2"/>
+            <a:ext cx="5484960" cy="3084840"/>
+          </a:xfrm>
+          <a:prstGeom prst="rect">
+            <a:avLst/>
+          </a:prstGeom>
+          <a:ln w="0">
+            <a:noFill/>
+          </a:ln>
+        </p:spPr>
+      </p:sp>
+      <p:sp>
+        <p:nvSpPr>
+          <p:cNvPr id="319" name="PlaceHolder 2"/>
           <p:cNvSpPr>
             <a:spLocks noGrp="1"/>
           </p:cNvSpPr>
@@ -1496,7 +1632,7 @@
         <p:spPr>
           <a:xfrm>
             <a:off x="685800" y="4400640"/>
-            <a:ext cx="5486040" cy="3600000"/>
+            <a:ext cx="5484960" cy="3598920"/>
           </a:xfrm>
           <a:prstGeom prst="rect">
             <a:avLst/>
@@ -1527,7 +1663,7 @@
       </p:sp>
       <p:sp>
         <p:nvSpPr>
-          <p:cNvPr id="307" name="PlaceHolder 3"/>
+          <p:cNvPr id="320" name="PlaceHolder 3"/>
           <p:cNvSpPr>
             <a:spLocks noGrp="1"/>
           </p:cNvSpPr>
@@ -1538,7 +1674,7 @@
         <p:spPr>
           <a:xfrm>
             <a:off x="3884760" y="8685360"/>
-            <a:ext cx="2971440" cy="458280"/>
+            <a:ext cx="2970360" cy="457200"/>
           </a:xfrm>
           <a:prstGeom prst="rect">
             <a:avLst/>
@@ -1558,6 +1694,9 @@
                 <a:spcPct val="100000"/>
               </a:lnSpc>
               <a:buNone/>
+              <a:tabLst>
+                <a:tab algn="l" pos="0"/>
+              </a:tabLst>
               <a:defRPr b="0" lang="en-US" sz="1200" strike="noStrike" u="none">
                 <a:solidFill>
                   <a:schemeClr val="dk1"/>
@@ -1575,8 +1714,11 @@
                 <a:spcPct val="100000"/>
               </a:lnSpc>
               <a:buNone/>
-            </a:pPr>
-            <a:fld id="{B7C86C24-C40D-499B-BED3-090DF2D15E55}" type="slidenum">
+              <a:tabLst>
+                <a:tab algn="l" pos="0"/>
+              </a:tabLst>
+            </a:pPr>
+            <a:fld id="{C4A8DB37-B660-4576-91E8-16B132646AF9}" type="slidenum">
               <a:rPr b="0" lang="en-US" sz="1200" strike="noStrike" u="none">
                 <a:solidFill>
                   <a:schemeClr val="dk1"/>
@@ -1623,7 +1765,7 @@
       </p:grpSpPr>
       <p:sp>
         <p:nvSpPr>
-          <p:cNvPr id="308" name="PlaceHolder 1"/>
+          <p:cNvPr id="321" name="PlaceHolder 1"/>
           <p:cNvSpPr>
             <a:spLocks noGrp="1"/>
           </p:cNvSpPr>
@@ -1634,19 +1776,19 @@
         <p:spPr>
           <a:xfrm>
             <a:off x="685800" y="1143000"/>
-            <a:ext cx="5486040" cy="3085920"/>
-          </a:xfrm>
-          <a:prstGeom prst="rect">
-            <a:avLst/>
-          </a:prstGeom>
-          <a:ln w="0">
-            <a:noFill/>
-          </a:ln>
-        </p:spPr>
-      </p:sp>
-      <p:sp>
-        <p:nvSpPr>
-          <p:cNvPr id="309" name="PlaceHolder 2"/>
+            <a:ext cx="5484960" cy="3084840"/>
+          </a:xfrm>
+          <a:prstGeom prst="rect">
+            <a:avLst/>
+          </a:prstGeom>
+          <a:ln w="0">
+            <a:noFill/>
+          </a:ln>
+        </p:spPr>
+      </p:sp>
+      <p:sp>
+        <p:nvSpPr>
+          <p:cNvPr id="322" name="PlaceHolder 2"/>
           <p:cNvSpPr>
             <a:spLocks noGrp="1"/>
           </p:cNvSpPr>
@@ -1657,7 +1799,7 @@
         <p:spPr>
           <a:xfrm>
             <a:off x="685800" y="4400640"/>
-            <a:ext cx="5486040" cy="3600000"/>
+            <a:ext cx="5484960" cy="3598920"/>
           </a:xfrm>
           <a:prstGeom prst="rect">
             <a:avLst/>
@@ -1688,7 +1830,7 @@
       </p:sp>
       <p:sp>
         <p:nvSpPr>
-          <p:cNvPr id="310" name="PlaceHolder 3"/>
+          <p:cNvPr id="323" name="PlaceHolder 3"/>
           <p:cNvSpPr>
             <a:spLocks noGrp="1"/>
           </p:cNvSpPr>
@@ -1699,7 +1841,7 @@
         <p:spPr>
           <a:xfrm>
             <a:off x="3884760" y="8685360"/>
-            <a:ext cx="2971440" cy="458280"/>
+            <a:ext cx="2970360" cy="457200"/>
           </a:xfrm>
           <a:prstGeom prst="rect">
             <a:avLst/>
@@ -1719,6 +1861,9 @@
                 <a:spcPct val="100000"/>
               </a:lnSpc>
               <a:buNone/>
+              <a:tabLst>
+                <a:tab algn="l" pos="0"/>
+              </a:tabLst>
               <a:defRPr b="0" lang="en-US" sz="1200" strike="noStrike" u="none">
                 <a:solidFill>
                   <a:schemeClr val="dk1"/>
@@ -1736,8 +1881,11 @@
                 <a:spcPct val="100000"/>
               </a:lnSpc>
               <a:buNone/>
-            </a:pPr>
-            <a:fld id="{438DB863-191A-40E6-855F-061A1CAFF814}" type="slidenum">
+              <a:tabLst>
+                <a:tab algn="l" pos="0"/>
+              </a:tabLst>
+            </a:pPr>
+            <a:fld id="{FAA62204-B375-4B54-98D7-D74043BE87FF}" type="slidenum">
               <a:rPr b="0" lang="en-US" sz="1200" strike="noStrike" u="none">
                 <a:solidFill>
                   <a:schemeClr val="dk1"/>
@@ -1784,7 +1932,7 @@
       </p:grpSpPr>
       <p:sp>
         <p:nvSpPr>
-          <p:cNvPr id="311" name="PlaceHolder 1"/>
+          <p:cNvPr id="324" name="PlaceHolder 1"/>
           <p:cNvSpPr>
             <a:spLocks noGrp="1"/>
           </p:cNvSpPr>
@@ -1795,19 +1943,19 @@
         <p:spPr>
           <a:xfrm>
             <a:off x="685800" y="1143000"/>
-            <a:ext cx="5486040" cy="3085920"/>
-          </a:xfrm>
-          <a:prstGeom prst="rect">
-            <a:avLst/>
-          </a:prstGeom>
-          <a:ln w="0">
-            <a:noFill/>
-          </a:ln>
-        </p:spPr>
-      </p:sp>
-      <p:sp>
-        <p:nvSpPr>
-          <p:cNvPr id="312" name="PlaceHolder 2"/>
+            <a:ext cx="5484960" cy="3084840"/>
+          </a:xfrm>
+          <a:prstGeom prst="rect">
+            <a:avLst/>
+          </a:prstGeom>
+          <a:ln w="0">
+            <a:noFill/>
+          </a:ln>
+        </p:spPr>
+      </p:sp>
+      <p:sp>
+        <p:nvSpPr>
+          <p:cNvPr id="325" name="PlaceHolder 2"/>
           <p:cNvSpPr>
             <a:spLocks noGrp="1"/>
           </p:cNvSpPr>
@@ -1818,7 +1966,7 @@
         <p:spPr>
           <a:xfrm>
             <a:off x="685800" y="4400640"/>
-            <a:ext cx="5486040" cy="3600000"/>
+            <a:ext cx="5484960" cy="3598920"/>
           </a:xfrm>
           <a:prstGeom prst="rect">
             <a:avLst/>
@@ -1849,7 +1997,7 @@
       </p:sp>
       <p:sp>
         <p:nvSpPr>
-          <p:cNvPr id="313" name="PlaceHolder 3"/>
+          <p:cNvPr id="326" name="PlaceHolder 3"/>
           <p:cNvSpPr>
             <a:spLocks noGrp="1"/>
           </p:cNvSpPr>
@@ -1860,7 +2008,7 @@
         <p:spPr>
           <a:xfrm>
             <a:off x="3884760" y="8685360"/>
-            <a:ext cx="2971440" cy="458280"/>
+            <a:ext cx="2970360" cy="457200"/>
           </a:xfrm>
           <a:prstGeom prst="rect">
             <a:avLst/>
@@ -1880,6 +2028,9 @@
                 <a:spcPct val="100000"/>
               </a:lnSpc>
               <a:buNone/>
+              <a:tabLst>
+                <a:tab algn="l" pos="0"/>
+              </a:tabLst>
               <a:defRPr b="0" lang="en-US" sz="1200" strike="noStrike" u="none">
                 <a:solidFill>
                   <a:schemeClr val="dk1"/>
@@ -1897,8 +2048,11 @@
                 <a:spcPct val="100000"/>
               </a:lnSpc>
               <a:buNone/>
-            </a:pPr>
-            <a:fld id="{7D368E41-459A-4E1B-9030-25901509C804}" type="slidenum">
+              <a:tabLst>
+                <a:tab algn="l" pos="0"/>
+              </a:tabLst>
+            </a:pPr>
+            <a:fld id="{B92B7EB9-294D-4C60-96D0-3A6B02476E2C}" type="slidenum">
               <a:rPr b="0" lang="en-US" sz="1200" strike="noStrike" u="none">
                 <a:solidFill>
                   <a:schemeClr val="dk1"/>
@@ -2000,27 +2154,38 @@
             <a:noAutofit/>
           </a:bodyPr>
           <a:p>
-            <a:pPr indent="0">
+            <a:pPr indent="0" algn="ctr">
               <a:buNone/>
             </a:pPr>
             <a:r>
-              <a:rPr b="0" lang="en-US" sz="1800" strike="noStrike" u="none">
-                <a:solidFill>
-                  <a:schemeClr val="dk1"/>
-                </a:solidFill>
-                <a:effectLst/>
-                <a:uFillTx/>
-                <a:latin typeface="Calibri"/>
-              </a:rPr>
-              <a:t>Click to edit the title text format</a:t>
-            </a:r>
-            <a:endParaRPr b="0" lang="en-US" sz="1800" strike="noStrike" u="none">
-              <a:solidFill>
-                <a:schemeClr val="dk1"/>
-              </a:solidFill>
-              <a:effectLst/>
-              <a:uFillTx/>
-              <a:latin typeface="Calibri"/>
+              <a:rPr b="0" lang="en-US" sz="4400" strike="noStrike" u="none">
+                <a:solidFill>
+                  <a:srgbClr val="000000"/>
+                </a:solidFill>
+                <a:effectLst/>
+                <a:uFillTx/>
+                <a:latin typeface="Arial"/>
+              </a:rPr>
+              <a:t>Click to edit the title </a:t>
+            </a:r>
+            <a:r>
+              <a:rPr b="0" lang="en-US" sz="4400" strike="noStrike" u="none">
+                <a:solidFill>
+                  <a:srgbClr val="000000"/>
+                </a:solidFill>
+                <a:effectLst/>
+                <a:uFillTx/>
+                <a:latin typeface="Arial"/>
+              </a:rPr>
+              <a:t>text format</a:t>
+            </a:r>
+            <a:endParaRPr b="0" lang="en-US" sz="4400" strike="noStrike" u="none">
+              <a:solidFill>
+                <a:srgbClr val="000000"/>
+              </a:solidFill>
+              <a:effectLst/>
+              <a:uFillTx/>
+              <a:latin typeface="Arial"/>
             </a:endParaRPr>
           </a:p>
         </p:txBody>
@@ -2067,21 +2232,21 @@
             <a:r>
               <a:rPr b="0" lang="en-US" sz="3200" strike="noStrike" u="none">
                 <a:solidFill>
-                  <a:schemeClr val="dk1"/>
-                </a:solidFill>
-                <a:effectLst/>
-                <a:uFillTx/>
-                <a:latin typeface="Calibri"/>
+                  <a:srgbClr val="000000"/>
+                </a:solidFill>
+                <a:effectLst/>
+                <a:uFillTx/>
+                <a:latin typeface="Arial"/>
               </a:rPr>
               <a:t>Click to edit the outline text format</a:t>
             </a:r>
             <a:endParaRPr b="0" lang="en-US" sz="3200" strike="noStrike" u="none">
               <a:solidFill>
-                <a:schemeClr val="dk1"/>
-              </a:solidFill>
-              <a:effectLst/>
-              <a:uFillTx/>
-              <a:latin typeface="Calibri"/>
+                <a:srgbClr val="000000"/>
+              </a:solidFill>
+              <a:effectLst/>
+              <a:uFillTx/>
+              <a:latin typeface="Arial"/>
             </a:endParaRPr>
           </a:p>
           <a:p>
@@ -2097,23 +2262,23 @@
               <a:buChar char=""/>
             </a:pPr>
             <a:r>
-              <a:rPr b="0" lang="en-US" sz="2400" strike="noStrike" u="none">
-                <a:solidFill>
-                  <a:schemeClr val="dk1"/>
-                </a:solidFill>
-                <a:effectLst/>
-                <a:uFillTx/>
-                <a:latin typeface="Calibri"/>
+              <a:rPr b="0" lang="en-US" sz="2800" strike="noStrike" u="none">
+                <a:solidFill>
+                  <a:srgbClr val="000000"/>
+                </a:solidFill>
+                <a:effectLst/>
+                <a:uFillTx/>
+                <a:latin typeface="Arial"/>
               </a:rPr>
               <a:t>Second Outline Level</a:t>
             </a:r>
-            <a:endParaRPr b="0" lang="en-US" sz="2400" strike="noStrike" u="none">
-              <a:solidFill>
-                <a:schemeClr val="dk1"/>
-              </a:solidFill>
-              <a:effectLst/>
-              <a:uFillTx/>
-              <a:latin typeface="Calibri"/>
+            <a:endParaRPr b="0" lang="en-US" sz="2800" strike="noStrike" u="none">
+              <a:solidFill>
+                <a:srgbClr val="000000"/>
+              </a:solidFill>
+              <a:effectLst/>
+              <a:uFillTx/>
+              <a:latin typeface="Arial"/>
             </a:endParaRPr>
           </a:p>
           <a:p>
@@ -2129,23 +2294,23 @@
               <a:buChar char=""/>
             </a:pPr>
             <a:r>
-              <a:rPr b="0" lang="en-US" sz="2000" strike="noStrike" u="none">
-                <a:solidFill>
-                  <a:schemeClr val="dk1"/>
-                </a:solidFill>
-                <a:effectLst/>
-                <a:uFillTx/>
-                <a:latin typeface="Calibri"/>
+              <a:rPr b="0" lang="en-US" sz="2400" strike="noStrike" u="none">
+                <a:solidFill>
+                  <a:srgbClr val="000000"/>
+                </a:solidFill>
+                <a:effectLst/>
+                <a:uFillTx/>
+                <a:latin typeface="Arial"/>
               </a:rPr>
               <a:t>Third Outline Level</a:t>
             </a:r>
-            <a:endParaRPr b="0" lang="en-US" sz="2000" strike="noStrike" u="none">
-              <a:solidFill>
-                <a:schemeClr val="dk1"/>
-              </a:solidFill>
-              <a:effectLst/>
-              <a:uFillTx/>
-              <a:latin typeface="Calibri"/>
+            <a:endParaRPr b="0" lang="en-US" sz="2400" strike="noStrike" u="none">
+              <a:solidFill>
+                <a:srgbClr val="000000"/>
+              </a:solidFill>
+              <a:effectLst/>
+              <a:uFillTx/>
+              <a:latin typeface="Arial"/>
             </a:endParaRPr>
           </a:p>
           <a:p>
@@ -2163,21 +2328,21 @@
             <a:r>
               <a:rPr b="0" lang="en-US" sz="2000" strike="noStrike" u="none">
                 <a:solidFill>
-                  <a:schemeClr val="dk1"/>
-                </a:solidFill>
-                <a:effectLst/>
-                <a:uFillTx/>
-                <a:latin typeface="Calibri"/>
+                  <a:srgbClr val="000000"/>
+                </a:solidFill>
+                <a:effectLst/>
+                <a:uFillTx/>
+                <a:latin typeface="Arial"/>
               </a:rPr>
               <a:t>Fourth Outline Level</a:t>
             </a:r>
             <a:endParaRPr b="0" lang="en-US" sz="2000" strike="noStrike" u="none">
               <a:solidFill>
-                <a:schemeClr val="dk1"/>
-              </a:solidFill>
-              <a:effectLst/>
-              <a:uFillTx/>
-              <a:latin typeface="Calibri"/>
+                <a:srgbClr val="000000"/>
+              </a:solidFill>
+              <a:effectLst/>
+              <a:uFillTx/>
+              <a:latin typeface="Arial"/>
             </a:endParaRPr>
           </a:p>
           <a:p>
@@ -2195,21 +2360,21 @@
             <a:r>
               <a:rPr b="0" lang="en-US" sz="2000" strike="noStrike" u="none">
                 <a:solidFill>
-                  <a:schemeClr val="dk1"/>
-                </a:solidFill>
-                <a:effectLst/>
-                <a:uFillTx/>
-                <a:latin typeface="Calibri"/>
+                  <a:srgbClr val="000000"/>
+                </a:solidFill>
+                <a:effectLst/>
+                <a:uFillTx/>
+                <a:latin typeface="Arial"/>
               </a:rPr>
               <a:t>Fifth Outline Level</a:t>
             </a:r>
             <a:endParaRPr b="0" lang="en-US" sz="2000" strike="noStrike" u="none">
               <a:solidFill>
-                <a:schemeClr val="dk1"/>
-              </a:solidFill>
-              <a:effectLst/>
-              <a:uFillTx/>
-              <a:latin typeface="Calibri"/>
+                <a:srgbClr val="000000"/>
+              </a:solidFill>
+              <a:effectLst/>
+              <a:uFillTx/>
+              <a:latin typeface="Arial"/>
             </a:endParaRPr>
           </a:p>
           <a:p>
@@ -2227,21 +2392,21 @@
             <a:r>
               <a:rPr b="0" lang="en-US" sz="2000" strike="noStrike" u="none">
                 <a:solidFill>
-                  <a:schemeClr val="dk1"/>
-                </a:solidFill>
-                <a:effectLst/>
-                <a:uFillTx/>
-                <a:latin typeface="Calibri"/>
+                  <a:srgbClr val="000000"/>
+                </a:solidFill>
+                <a:effectLst/>
+                <a:uFillTx/>
+                <a:latin typeface="Arial"/>
               </a:rPr>
               <a:t>Sixth Outline Level</a:t>
             </a:r>
             <a:endParaRPr b="0" lang="en-US" sz="2000" strike="noStrike" u="none">
               <a:solidFill>
-                <a:schemeClr val="dk1"/>
-              </a:solidFill>
-              <a:effectLst/>
-              <a:uFillTx/>
-              <a:latin typeface="Calibri"/>
+                <a:srgbClr val="000000"/>
+              </a:solidFill>
+              <a:effectLst/>
+              <a:uFillTx/>
+              <a:latin typeface="Arial"/>
             </a:endParaRPr>
           </a:p>
           <a:p>
@@ -2259,21 +2424,21 @@
             <a:r>
               <a:rPr b="0" lang="en-US" sz="2000" strike="noStrike" u="none">
                 <a:solidFill>
-                  <a:schemeClr val="dk1"/>
-                </a:solidFill>
-                <a:effectLst/>
-                <a:uFillTx/>
-                <a:latin typeface="Calibri"/>
+                  <a:srgbClr val="000000"/>
+                </a:solidFill>
+                <a:effectLst/>
+                <a:uFillTx/>
+                <a:latin typeface="Arial"/>
               </a:rPr>
               <a:t>Seventh Outline Level</a:t>
             </a:r>
             <a:endParaRPr b="0" lang="en-US" sz="2000" strike="noStrike" u="none">
               <a:solidFill>
-                <a:schemeClr val="dk1"/>
-              </a:solidFill>
-              <a:effectLst/>
-              <a:uFillTx/>
-              <a:latin typeface="Calibri"/>
+                <a:srgbClr val="000000"/>
+              </a:solidFill>
+              <a:effectLst/>
+              <a:uFillTx/>
+              <a:latin typeface="Arial"/>
             </a:endParaRPr>
           </a:p>
         </p:txBody>
@@ -2320,7 +2485,7 @@
         <p:spPr>
           <a:xfrm>
             <a:off x="640080" y="411480"/>
-            <a:ext cx="10881000" cy="365400"/>
+            <a:ext cx="10879920" cy="364320"/>
           </a:xfrm>
           <a:prstGeom prst="rect">
             <a:avLst/>
@@ -2381,7 +2546,7 @@
         <p:spPr>
           <a:xfrm>
             <a:off x="640080" y="731520"/>
-            <a:ext cx="10881000" cy="822600"/>
+            <a:ext cx="10879920" cy="821520"/>
           </a:xfrm>
           <a:prstGeom prst="rect">
             <a:avLst/>
@@ -2442,7 +2607,7 @@
         <p:spPr>
           <a:xfrm>
             <a:off x="640080" y="1417320"/>
-            <a:ext cx="10058040" cy="411120"/>
+            <a:ext cx="10056960" cy="410040"/>
           </a:xfrm>
           <a:prstGeom prst="rect">
             <a:avLst/>
@@ -2505,7 +2670,7 @@
         <p:spPr>
           <a:xfrm>
             <a:off x="640080" y="2057400"/>
-            <a:ext cx="5294160" cy="927720"/>
+            <a:ext cx="5293080" cy="926640"/>
           </a:xfrm>
           <a:prstGeom prst="roundRect">
             <a:avLst>
@@ -2533,6 +2698,11 @@
             <a:noAutofit/>
           </a:bodyPr>
           <a:p>
+            <a:pPr>
+              <a:lnSpc>
+                <a:spcPct val="100000"/>
+              </a:lnSpc>
+            </a:pPr>
             <a:endParaRPr b="0" lang="en-US" sz="1800" strike="noStrike" u="none">
               <a:solidFill>
                 <a:srgbClr val="ffffff"/>
@@ -2555,7 +2725,7 @@
         <p:spPr>
           <a:xfrm>
             <a:off x="841320" y="2320200"/>
-            <a:ext cx="402120" cy="402120"/>
+            <a:ext cx="401040" cy="401040"/>
           </a:xfrm>
           <a:prstGeom prst="ellipse">
             <a:avLst/>
@@ -2578,6 +2748,11 @@
             <a:noAutofit/>
           </a:bodyPr>
           <a:p>
+            <a:pPr>
+              <a:lnSpc>
+                <a:spcPct val="100000"/>
+              </a:lnSpc>
+            </a:pPr>
             <a:endParaRPr b="0" lang="en-US" sz="1800" strike="noStrike" u="none">
               <a:solidFill>
                 <a:srgbClr val="000000"/>
@@ -2598,7 +2773,7 @@
         <p:spPr>
           <a:xfrm>
             <a:off x="841320" y="2320200"/>
-            <a:ext cx="402120" cy="402120"/>
+            <a:ext cx="401040" cy="401040"/>
           </a:xfrm>
           <a:prstGeom prst="rect">
             <a:avLst/>
@@ -2630,7 +2805,7 @@
             <a:r>
               <a:rPr b="1" lang="en-US" sz="1600" strike="noStrike" u="sng">
                 <a:solidFill>
-                  <a:srgbClr val="141a46"/>
+                  <a:srgbClr val="f2f2f2"/>
                 </a:solidFill>
                 <a:effectLst/>
                 <a:uFillTx/>
@@ -2660,7 +2835,7 @@
         <p:spPr>
           <a:xfrm>
             <a:off x="1417320" y="2148840"/>
-            <a:ext cx="4334040" cy="744840"/>
+            <a:ext cx="4332960" cy="743760"/>
           </a:xfrm>
           <a:prstGeom prst="rect">
             <a:avLst/>
@@ -2692,7 +2867,7 @@
             <a:r>
               <a:rPr b="1" lang="en-US" sz="1400" strike="noStrike" u="sng">
                 <a:solidFill>
-                  <a:srgbClr val="ffffff"/>
+                  <a:srgbClr val="f2f2f2"/>
                 </a:solidFill>
                 <a:effectLst/>
                 <a:uFillTx/>
@@ -2724,7 +2899,7 @@
             <a:r>
               <a:rPr b="0" lang="en-US" sz="1050" strike="noStrike" u="sng">
                 <a:solidFill>
-                  <a:srgbClr val="cadcfc"/>
+                  <a:srgbClr val="f2f2f2"/>
                 </a:solidFill>
                 <a:effectLst/>
                 <a:uFillTx/>
@@ -2756,7 +2931,7 @@
         <p:spPr>
           <a:xfrm>
             <a:off x="6254640" y="2057400"/>
-            <a:ext cx="5294160" cy="927720"/>
+            <a:ext cx="5293080" cy="926640"/>
           </a:xfrm>
           <a:prstGeom prst="roundRect">
             <a:avLst>
@@ -2784,6 +2959,11 @@
             <a:noAutofit/>
           </a:bodyPr>
           <a:p>
+            <a:pPr>
+              <a:lnSpc>
+                <a:spcPct val="100000"/>
+              </a:lnSpc>
+            </a:pPr>
             <a:endParaRPr b="0" lang="en-US" sz="1800" strike="noStrike" u="none">
               <a:solidFill>
                 <a:srgbClr val="ffffff"/>
@@ -2806,7 +2986,7 @@
         <p:spPr>
           <a:xfrm>
             <a:off x="6455520" y="2320200"/>
-            <a:ext cx="402120" cy="402120"/>
+            <a:ext cx="401040" cy="401040"/>
           </a:xfrm>
           <a:prstGeom prst="ellipse">
             <a:avLst/>
@@ -2829,6 +3009,11 @@
             <a:noAutofit/>
           </a:bodyPr>
           <a:p>
+            <a:pPr>
+              <a:lnSpc>
+                <a:spcPct val="100000"/>
+              </a:lnSpc>
+            </a:pPr>
             <a:endParaRPr b="0" lang="en-US" sz="1800" strike="noStrike" u="none">
               <a:solidFill>
                 <a:srgbClr val="000000"/>
@@ -2849,7 +3034,7 @@
         <p:spPr>
           <a:xfrm>
             <a:off x="6455520" y="2320200"/>
-            <a:ext cx="402120" cy="402120"/>
+            <a:ext cx="401040" cy="401040"/>
           </a:xfrm>
           <a:prstGeom prst="rect">
             <a:avLst/>
@@ -2881,7 +3066,7 @@
             <a:r>
               <a:rPr b="1" lang="en-US" sz="1600" strike="noStrike" u="sng">
                 <a:solidFill>
-                  <a:srgbClr val="141a46"/>
+                  <a:srgbClr val="f2f2f2"/>
                 </a:solidFill>
                 <a:effectLst/>
                 <a:uFillTx/>
@@ -2911,7 +3096,7 @@
         <p:spPr>
           <a:xfrm>
             <a:off x="7031880" y="2148840"/>
-            <a:ext cx="4334040" cy="744840"/>
+            <a:ext cx="4332960" cy="743760"/>
           </a:xfrm>
           <a:prstGeom prst="rect">
             <a:avLst/>
@@ -2943,7 +3128,7 @@
             <a:r>
               <a:rPr b="1" lang="en-US" sz="1400" strike="noStrike" u="sng">
                 <a:solidFill>
-                  <a:srgbClr val="ffffff"/>
+                  <a:srgbClr val="f2f2f2"/>
                 </a:solidFill>
                 <a:effectLst/>
                 <a:uFillTx/>
@@ -2975,7 +3160,7 @@
             <a:r>
               <a:rPr b="0" lang="en-US" sz="1050" strike="noStrike" u="sng">
                 <a:solidFill>
-                  <a:srgbClr val="cadcfc"/>
+                  <a:srgbClr val="f2f2f2"/>
                 </a:solidFill>
                 <a:effectLst/>
                 <a:uFillTx/>
@@ -3007,7 +3192,7 @@
         <p:spPr>
           <a:xfrm>
             <a:off x="640080" y="3241440"/>
-            <a:ext cx="5294160" cy="927720"/>
+            <a:ext cx="5293080" cy="926640"/>
           </a:xfrm>
           <a:prstGeom prst="roundRect">
             <a:avLst>
@@ -3035,6 +3220,11 @@
             <a:noAutofit/>
           </a:bodyPr>
           <a:p>
+            <a:pPr>
+              <a:lnSpc>
+                <a:spcPct val="100000"/>
+              </a:lnSpc>
+            </a:pPr>
             <a:endParaRPr b="0" lang="en-US" sz="1800" strike="noStrike" u="none">
               <a:solidFill>
                 <a:srgbClr val="ffffff"/>
@@ -3057,7 +3247,7 @@
         <p:spPr>
           <a:xfrm>
             <a:off x="841320" y="3504600"/>
-            <a:ext cx="402120" cy="402120"/>
+            <a:ext cx="401040" cy="401040"/>
           </a:xfrm>
           <a:prstGeom prst="ellipse">
             <a:avLst/>
@@ -3080,6 +3270,11 @@
             <a:noAutofit/>
           </a:bodyPr>
           <a:p>
+            <a:pPr>
+              <a:lnSpc>
+                <a:spcPct val="100000"/>
+              </a:lnSpc>
+            </a:pPr>
             <a:endParaRPr b="0" lang="en-US" sz="1800" strike="noStrike" u="none">
               <a:solidFill>
                 <a:srgbClr val="000000"/>
@@ -3100,7 +3295,7 @@
         <p:spPr>
           <a:xfrm>
             <a:off x="841320" y="3504600"/>
-            <a:ext cx="402120" cy="402120"/>
+            <a:ext cx="401040" cy="401040"/>
           </a:xfrm>
           <a:prstGeom prst="rect">
             <a:avLst/>
@@ -3132,7 +3327,7 @@
             <a:r>
               <a:rPr b="1" lang="en-US" sz="1600" strike="noStrike" u="sng">
                 <a:solidFill>
-                  <a:srgbClr val="141a46"/>
+                  <a:srgbClr val="f2f2f2"/>
                 </a:solidFill>
                 <a:effectLst/>
                 <a:uFillTx/>
@@ -3162,7 +3357,7 @@
         <p:spPr>
           <a:xfrm>
             <a:off x="1417320" y="3332880"/>
-            <a:ext cx="4334040" cy="744840"/>
+            <a:ext cx="4332960" cy="743760"/>
           </a:xfrm>
           <a:prstGeom prst="rect">
             <a:avLst/>
@@ -3194,7 +3389,7 @@
             <a:r>
               <a:rPr b="1" lang="en-US" sz="1400" strike="noStrike" u="sng">
                 <a:solidFill>
-                  <a:srgbClr val="ffffff"/>
+                  <a:srgbClr val="f2f2f2"/>
                 </a:solidFill>
                 <a:effectLst/>
                 <a:uFillTx/>
@@ -3226,7 +3421,7 @@
             <a:r>
               <a:rPr b="0" lang="en-US" sz="1050" strike="noStrike" u="sng">
                 <a:solidFill>
-                  <a:srgbClr val="cadcfc"/>
+                  <a:srgbClr val="f2f2f2"/>
                 </a:solidFill>
                 <a:effectLst/>
                 <a:uFillTx/>
@@ -3258,7 +3453,7 @@
         <p:spPr>
           <a:xfrm>
             <a:off x="6254640" y="3241440"/>
-            <a:ext cx="5294160" cy="927720"/>
+            <a:ext cx="5293080" cy="926640"/>
           </a:xfrm>
           <a:prstGeom prst="roundRect">
             <a:avLst>
@@ -3286,6 +3481,11 @@
             <a:noAutofit/>
           </a:bodyPr>
           <a:p>
+            <a:pPr>
+              <a:lnSpc>
+                <a:spcPct val="100000"/>
+              </a:lnSpc>
+            </a:pPr>
             <a:endParaRPr b="0" lang="en-US" sz="1800" strike="noStrike" u="none">
               <a:solidFill>
                 <a:srgbClr val="ffffff"/>
@@ -3308,7 +3508,7 @@
         <p:spPr>
           <a:xfrm>
             <a:off x="6455520" y="3504600"/>
-            <a:ext cx="402120" cy="402120"/>
+            <a:ext cx="401040" cy="401040"/>
           </a:xfrm>
           <a:prstGeom prst="ellipse">
             <a:avLst/>
@@ -3331,6 +3531,11 @@
             <a:noAutofit/>
           </a:bodyPr>
           <a:p>
+            <a:pPr>
+              <a:lnSpc>
+                <a:spcPct val="100000"/>
+              </a:lnSpc>
+            </a:pPr>
             <a:endParaRPr b="0" lang="en-US" sz="1800" strike="noStrike" u="none">
               <a:solidFill>
                 <a:srgbClr val="000000"/>
@@ -3351,7 +3556,7 @@
         <p:spPr>
           <a:xfrm>
             <a:off x="6455520" y="3504600"/>
-            <a:ext cx="402120" cy="402120"/>
+            <a:ext cx="401040" cy="401040"/>
           </a:xfrm>
           <a:prstGeom prst="rect">
             <a:avLst/>
@@ -3383,7 +3588,7 @@
             <a:r>
               <a:rPr b="1" lang="en-US" sz="1600" strike="noStrike" u="sng">
                 <a:solidFill>
-                  <a:srgbClr val="141a46"/>
+                  <a:srgbClr val="f2f2f2"/>
                 </a:solidFill>
                 <a:effectLst/>
                 <a:uFillTx/>
@@ -3413,7 +3618,7 @@
         <p:spPr>
           <a:xfrm>
             <a:off x="7031880" y="3332880"/>
-            <a:ext cx="4334040" cy="744840"/>
+            <a:ext cx="4332960" cy="743760"/>
           </a:xfrm>
           <a:prstGeom prst="rect">
             <a:avLst/>
@@ -3445,7 +3650,7 @@
             <a:r>
               <a:rPr b="1" lang="en-US" sz="1400" strike="noStrike" u="sng">
                 <a:solidFill>
-                  <a:srgbClr val="ffffff"/>
+                  <a:srgbClr val="f2f2f2"/>
                 </a:solidFill>
                 <a:effectLst/>
                 <a:uFillTx/>
@@ -3477,7 +3682,7 @@
             <a:r>
               <a:rPr b="0" lang="en-US" sz="1050" strike="noStrike" u="sng">
                 <a:solidFill>
-                  <a:srgbClr val="cadcfc"/>
+                  <a:srgbClr val="f2f2f2"/>
                 </a:solidFill>
                 <a:effectLst/>
                 <a:uFillTx/>
@@ -3509,7 +3714,7 @@
         <p:spPr>
           <a:xfrm>
             <a:off x="640080" y="4425840"/>
-            <a:ext cx="5294160" cy="927720"/>
+            <a:ext cx="5293080" cy="926640"/>
           </a:xfrm>
           <a:prstGeom prst="roundRect">
             <a:avLst>
@@ -3537,6 +3742,11 @@
             <a:noAutofit/>
           </a:bodyPr>
           <a:p>
+            <a:pPr>
+              <a:lnSpc>
+                <a:spcPct val="100000"/>
+              </a:lnSpc>
+            </a:pPr>
             <a:endParaRPr b="0" lang="en-US" sz="1800" strike="noStrike" u="none">
               <a:solidFill>
                 <a:srgbClr val="ffffff"/>
@@ -3559,7 +3769,7 @@
         <p:spPr>
           <a:xfrm>
             <a:off x="841320" y="4688640"/>
-            <a:ext cx="402120" cy="402120"/>
+            <a:ext cx="401040" cy="401040"/>
           </a:xfrm>
           <a:prstGeom prst="ellipse">
             <a:avLst/>
@@ -3582,6 +3792,11 @@
             <a:noAutofit/>
           </a:bodyPr>
           <a:p>
+            <a:pPr>
+              <a:lnSpc>
+                <a:spcPct val="100000"/>
+              </a:lnSpc>
+            </a:pPr>
             <a:endParaRPr b="0" lang="en-US" sz="1800" strike="noStrike" u="none">
               <a:solidFill>
                 <a:srgbClr val="000000"/>
@@ -3602,7 +3817,7 @@
         <p:spPr>
           <a:xfrm>
             <a:off x="841320" y="4688640"/>
-            <a:ext cx="402120" cy="402120"/>
+            <a:ext cx="401040" cy="401040"/>
           </a:xfrm>
           <a:prstGeom prst="rect">
             <a:avLst/>
@@ -3634,7 +3849,7 @@
             <a:r>
               <a:rPr b="1" lang="en-US" sz="1600" strike="noStrike" u="sng">
                 <a:solidFill>
-                  <a:srgbClr val="141a46"/>
+                  <a:srgbClr val="f2f2f2"/>
                 </a:solidFill>
                 <a:effectLst/>
                 <a:uFillTx/>
@@ -3664,7 +3879,7 @@
         <p:spPr>
           <a:xfrm>
             <a:off x="1417320" y="4517280"/>
-            <a:ext cx="4334040" cy="744840"/>
+            <a:ext cx="4332960" cy="743760"/>
           </a:xfrm>
           <a:prstGeom prst="rect">
             <a:avLst/>
@@ -3696,7 +3911,7 @@
             <a:r>
               <a:rPr b="1" lang="en-US" sz="1400" strike="noStrike" u="sng">
                 <a:solidFill>
-                  <a:srgbClr val="ffffff"/>
+                  <a:srgbClr val="f2f2f2"/>
                 </a:solidFill>
                 <a:effectLst/>
                 <a:uFillTx/>
@@ -3728,7 +3943,7 @@
             <a:r>
               <a:rPr b="0" lang="en-US" sz="1050" strike="noStrike" u="sng">
                 <a:solidFill>
-                  <a:srgbClr val="cadcfc"/>
+                  <a:srgbClr val="f2f2f2"/>
                 </a:solidFill>
                 <a:effectLst/>
                 <a:uFillTx/>
@@ -3760,7 +3975,7 @@
         <p:spPr>
           <a:xfrm>
             <a:off x="6254640" y="4425840"/>
-            <a:ext cx="5294160" cy="927720"/>
+            <a:ext cx="5293080" cy="926640"/>
           </a:xfrm>
           <a:prstGeom prst="roundRect">
             <a:avLst>
@@ -3788,6 +4003,11 @@
             <a:noAutofit/>
           </a:bodyPr>
           <a:p>
+            <a:pPr>
+              <a:lnSpc>
+                <a:spcPct val="100000"/>
+              </a:lnSpc>
+            </a:pPr>
             <a:endParaRPr b="0" lang="en-US" sz="1800" strike="noStrike" u="none">
               <a:solidFill>
                 <a:srgbClr val="ffffff"/>
@@ -3810,7 +4030,7 @@
         <p:spPr>
           <a:xfrm>
             <a:off x="6455520" y="4688640"/>
-            <a:ext cx="402120" cy="402120"/>
+            <a:ext cx="401040" cy="401040"/>
           </a:xfrm>
           <a:prstGeom prst="ellipse">
             <a:avLst/>
@@ -3833,6 +4053,11 @@
             <a:noAutofit/>
           </a:bodyPr>
           <a:p>
+            <a:pPr>
+              <a:lnSpc>
+                <a:spcPct val="100000"/>
+              </a:lnSpc>
+            </a:pPr>
             <a:endParaRPr b="0" lang="en-US" sz="1800" strike="noStrike" u="none">
               <a:solidFill>
                 <a:srgbClr val="000000"/>
@@ -3853,7 +4078,7 @@
         <p:spPr>
           <a:xfrm>
             <a:off x="6455520" y="4688640"/>
-            <a:ext cx="402120" cy="402120"/>
+            <a:ext cx="401040" cy="401040"/>
           </a:xfrm>
           <a:prstGeom prst="rect">
             <a:avLst/>
@@ -3885,7 +4110,7 @@
             <a:r>
               <a:rPr b="1" lang="en-US" sz="1600" strike="noStrike" u="sng">
                 <a:solidFill>
-                  <a:srgbClr val="141a46"/>
+                  <a:srgbClr val="f2f2f2"/>
                 </a:solidFill>
                 <a:effectLst/>
                 <a:uFillTx/>
@@ -3915,7 +4140,7 @@
         <p:spPr>
           <a:xfrm>
             <a:off x="7031880" y="4517280"/>
-            <a:ext cx="4334040" cy="744840"/>
+            <a:ext cx="4332960" cy="743760"/>
           </a:xfrm>
           <a:prstGeom prst="rect">
             <a:avLst/>
@@ -3947,7 +4172,7 @@
             <a:r>
               <a:rPr b="1" lang="en-US" sz="1400" strike="noStrike" u="sng">
                 <a:solidFill>
-                  <a:srgbClr val="ffffff"/>
+                  <a:srgbClr val="f2f2f2"/>
                 </a:solidFill>
                 <a:effectLst/>
                 <a:uFillTx/>
@@ -3955,7 +4180,7 @@
                 <a:ea typeface="Calibri"/>
                 <a:hlinkClick r:id="rId29" action="ppaction://hlinksldjump"/>
               </a:rPr>
-              <a:t>Consensus Forecasting
+              <a:t>Iterative Forecastability Search
 </a:t>
             </a:r>
             <a:endParaRPr b="0" lang="en-US" sz="1400" strike="noStrike" u="none">
@@ -3979,7 +4204,7 @@
             <a:r>
               <a:rPr b="0" lang="en-US" sz="1050" strike="noStrike" u="sng">
                 <a:solidFill>
-                  <a:srgbClr val="cadcfc"/>
+                  <a:srgbClr val="f2f2f2"/>
                 </a:solidFill>
                 <a:effectLst/>
                 <a:uFillTx/>
@@ -3987,7 +4212,7 @@
                 <a:ea typeface="Calibri"/>
                 <a:hlinkClick r:id="rId30" action="ppaction://hlinksldjump"/>
               </a:rPr>
-              <a:t>Blending statistics with the sales hierarchy</a:t>
+              <a:t>Walking the grain hierarchy to a forecastable level</a:t>
             </a:r>
             <a:endParaRPr b="0" lang="en-US" sz="1050" strike="noStrike" u="none">
               <a:solidFill>
@@ -4011,7 +4236,7 @@
         <p:spPr>
           <a:xfrm>
             <a:off x="640080" y="5609880"/>
-            <a:ext cx="5294160" cy="927720"/>
+            <a:ext cx="5293080" cy="926640"/>
           </a:xfrm>
           <a:prstGeom prst="roundRect">
             <a:avLst>
@@ -4039,6 +4264,11 @@
             <a:noAutofit/>
           </a:bodyPr>
           <a:p>
+            <a:pPr>
+              <a:lnSpc>
+                <a:spcPct val="100000"/>
+              </a:lnSpc>
+            </a:pPr>
             <a:endParaRPr b="0" lang="en-US" sz="1800" strike="noStrike" u="none">
               <a:solidFill>
                 <a:srgbClr val="ffffff"/>
@@ -4061,7 +4291,7 @@
         <p:spPr>
           <a:xfrm>
             <a:off x="841320" y="5872680"/>
-            <a:ext cx="402120" cy="402120"/>
+            <a:ext cx="401040" cy="401040"/>
           </a:xfrm>
           <a:prstGeom prst="ellipse">
             <a:avLst/>
@@ -4084,6 +4314,11 @@
             <a:noAutofit/>
           </a:bodyPr>
           <a:p>
+            <a:pPr>
+              <a:lnSpc>
+                <a:spcPct val="100000"/>
+              </a:lnSpc>
+            </a:pPr>
             <a:endParaRPr b="0" lang="en-US" sz="1800" strike="noStrike" u="none">
               <a:solidFill>
                 <a:srgbClr val="000000"/>
@@ -4104,7 +4339,7 @@
         <p:spPr>
           <a:xfrm>
             <a:off x="841320" y="5872680"/>
-            <a:ext cx="402120" cy="402120"/>
+            <a:ext cx="401040" cy="401040"/>
           </a:xfrm>
           <a:prstGeom prst="rect">
             <a:avLst/>
@@ -4136,7 +4371,7 @@
             <a:r>
               <a:rPr b="1" lang="en-US" sz="1600" strike="noStrike" u="sng">
                 <a:solidFill>
-                  <a:srgbClr val="141a46"/>
+                  <a:srgbClr val="f2f2f2"/>
                 </a:solidFill>
                 <a:effectLst/>
                 <a:uFillTx/>
@@ -4166,7 +4401,7 @@
         <p:spPr>
           <a:xfrm>
             <a:off x="1417320" y="5701320"/>
-            <a:ext cx="4334040" cy="744840"/>
+            <a:ext cx="4332960" cy="743760"/>
           </a:xfrm>
           <a:prstGeom prst="rect">
             <a:avLst/>
@@ -4198,7 +4433,7 @@
             <a:r>
               <a:rPr b="1" lang="en-US" sz="1400" strike="noStrike" u="sng">
                 <a:solidFill>
-                  <a:srgbClr val="ffffff"/>
+                  <a:srgbClr val="f2f2f2"/>
                 </a:solidFill>
                 <a:effectLst/>
                 <a:uFillTx/>
@@ -4206,7 +4441,7 @@
                 <a:ea typeface="Calibri"/>
                 <a:hlinkClick r:id="rId34" action="ppaction://hlinksldjump"/>
               </a:rPr>
-              <a:t>Disaggregation of Overrides
+              <a:t>Consensus Forecasting
 </a:t>
             </a:r>
             <a:endParaRPr b="0" lang="en-US" sz="1400" strike="noStrike" u="none">
@@ -4230,7 +4465,7 @@
             <a:r>
               <a:rPr b="0" lang="en-US" sz="1050" strike="noStrike" u="sng">
                 <a:solidFill>
-                  <a:srgbClr val="cadcfc"/>
+                  <a:srgbClr val="f2f2f2"/>
                 </a:solidFill>
                 <a:effectLst/>
                 <a:uFillTx/>
@@ -4238,7 +4473,7 @@
                 <a:ea typeface="Calibri"/>
                 <a:hlinkClick r:id="rId35" action="ppaction://hlinksldjump"/>
               </a:rPr>
-              <a:t>Proportional, Equal &amp; Custom methods</a:t>
+              <a:t>Blending statistics with the sales hierarchy</a:t>
             </a:r>
             <a:endParaRPr b="0" lang="en-US" sz="1050" strike="noStrike" u="none">
               <a:solidFill>
@@ -4262,7 +4497,7 @@
         <p:spPr>
           <a:xfrm>
             <a:off x="6254640" y="5609880"/>
-            <a:ext cx="5294160" cy="927720"/>
+            <a:ext cx="5293080" cy="926640"/>
           </a:xfrm>
           <a:prstGeom prst="roundRect">
             <a:avLst>
@@ -4290,6 +4525,11 @@
             <a:noAutofit/>
           </a:bodyPr>
           <a:p>
+            <a:pPr>
+              <a:lnSpc>
+                <a:spcPct val="100000"/>
+              </a:lnSpc>
+            </a:pPr>
             <a:endParaRPr b="0" lang="en-US" sz="1800" strike="noStrike" u="none">
               <a:solidFill>
                 <a:srgbClr val="ffffff"/>
@@ -4312,7 +4552,7 @@
         <p:spPr>
           <a:xfrm>
             <a:off x="6455520" y="5872680"/>
-            <a:ext cx="402120" cy="402120"/>
+            <a:ext cx="401040" cy="401040"/>
           </a:xfrm>
           <a:prstGeom prst="ellipse">
             <a:avLst/>
@@ -4335,6 +4575,11 @@
             <a:noAutofit/>
           </a:bodyPr>
           <a:p>
+            <a:pPr>
+              <a:lnSpc>
+                <a:spcPct val="100000"/>
+              </a:lnSpc>
+            </a:pPr>
             <a:endParaRPr b="0" lang="en-US" sz="1800" strike="noStrike" u="none">
               <a:solidFill>
                 <a:srgbClr val="000000"/>
@@ -4355,7 +4600,7 @@
         <p:spPr>
           <a:xfrm>
             <a:off x="6455520" y="5872680"/>
-            <a:ext cx="402120" cy="402120"/>
+            <a:ext cx="401040" cy="401040"/>
           </a:xfrm>
           <a:prstGeom prst="rect">
             <a:avLst/>
@@ -4387,7 +4632,7 @@
             <a:r>
               <a:rPr b="1" lang="en-US" sz="1600" strike="noStrike" u="sng">
                 <a:solidFill>
-                  <a:srgbClr val="141a46"/>
+                  <a:srgbClr val="f2f2f2"/>
                 </a:solidFill>
                 <a:effectLst/>
                 <a:uFillTx/>
@@ -4417,7 +4662,7 @@
         <p:spPr>
           <a:xfrm>
             <a:off x="7031880" y="5701320"/>
-            <a:ext cx="4334040" cy="744840"/>
+            <a:ext cx="4332960" cy="743760"/>
           </a:xfrm>
           <a:prstGeom prst="rect">
             <a:avLst/>
@@ -4449,7 +4694,7 @@
             <a:r>
               <a:rPr b="1" lang="en-US" sz="1400" strike="noStrike" u="sng">
                 <a:solidFill>
-                  <a:srgbClr val="ffffff"/>
+                  <a:srgbClr val="f2f2f2"/>
                 </a:solidFill>
                 <a:effectLst/>
                 <a:uFillTx/>
@@ -4457,7 +4702,7 @@
                 <a:ea typeface="Calibri"/>
                 <a:hlinkClick r:id="rId39" action="ppaction://hlinksldjump"/>
               </a:rPr>
-              <a:t>Iterative Forecastability Search
+              <a:t>Disaggregation of Overrides
 </a:t>
             </a:r>
             <a:endParaRPr b="0" lang="en-US" sz="1400" strike="noStrike" u="none">
@@ -4481,7 +4726,7 @@
             <a:r>
               <a:rPr b="0" lang="en-US" sz="1050" strike="noStrike" u="sng">
                 <a:solidFill>
-                  <a:srgbClr val="cadcfc"/>
+                  <a:srgbClr val="f2f2f2"/>
                 </a:solidFill>
                 <a:effectLst/>
                 <a:uFillTx/>
@@ -4489,7 +4734,7 @@
                 <a:ea typeface="Calibri"/>
                 <a:hlinkClick r:id="rId40" action="ppaction://hlinksldjump"/>
               </a:rPr>
-              <a:t>Walking the grain hierarchy to a forecastable level</a:t>
+              <a:t>Proportional, Equal &amp; Custom methods</a:t>
             </a:r>
             <a:endParaRPr b="0" lang="en-US" sz="1050" strike="noStrike" u="none">
               <a:solidFill>
@@ -4550,7 +4795,7 @@
         <p:spPr>
           <a:xfrm>
             <a:off x="10314360" y="201240"/>
-            <a:ext cx="1599840" cy="365400"/>
+            <a:ext cx="1598760" cy="364320"/>
           </a:xfrm>
           <a:prstGeom prst="roundRect">
             <a:avLst>
@@ -4575,6 +4820,11 @@
             <a:noAutofit/>
           </a:bodyPr>
           <a:p>
+            <a:pPr>
+              <a:lnSpc>
+                <a:spcPct val="100000"/>
+              </a:lnSpc>
+            </a:pPr>
             <a:endParaRPr b="0" lang="en-US" sz="1800" strike="noStrike" u="none">
               <a:solidFill>
                 <a:srgbClr val="ffffff"/>
@@ -4595,7 +4845,7 @@
         <p:spPr>
           <a:xfrm>
             <a:off x="10314360" y="201240"/>
-            <a:ext cx="1599840" cy="365400"/>
+            <a:ext cx="1598760" cy="364320"/>
           </a:xfrm>
           <a:prstGeom prst="rect">
             <a:avLst/>
@@ -4627,7 +4877,7 @@
             <a:r>
               <a:rPr b="1" lang="en-US" sz="1100" strike="noStrike" u="sng">
                 <a:solidFill>
-                  <a:srgbClr val="ffffff"/>
+                  <a:srgbClr val="f2f2f2"/>
                 </a:solidFill>
                 <a:effectLst/>
                 <a:uFillTx/>
@@ -4657,7 +4907,7 @@
         <p:spPr>
           <a:xfrm>
             <a:off x="11365920" y="6492240"/>
-            <a:ext cx="639720" cy="273960"/>
+            <a:ext cx="638640" cy="272880"/>
           </a:xfrm>
           <a:prstGeom prst="rect">
             <a:avLst/>
@@ -4718,7 +4968,7 @@
         <p:spPr>
           <a:xfrm>
             <a:off x="548640" y="320040"/>
-            <a:ext cx="7314840" cy="273960"/>
+            <a:ext cx="7313760" cy="272880"/>
           </a:xfrm>
           <a:prstGeom prst="rect">
             <a:avLst/>
@@ -4779,7 +5029,7 @@
         <p:spPr>
           <a:xfrm>
             <a:off x="548640" y="567000"/>
-            <a:ext cx="8777880" cy="685440"/>
+            <a:ext cx="8776800" cy="684360"/>
           </a:xfrm>
           <a:prstGeom prst="rect">
             <a:avLst/>
@@ -4840,7 +5090,7 @@
         <p:spPr>
           <a:xfrm>
             <a:off x="548640" y="1417320"/>
-            <a:ext cx="5577480" cy="776880"/>
+            <a:ext cx="5576400" cy="775800"/>
           </a:xfrm>
           <a:prstGeom prst="rect">
             <a:avLst/>
@@ -4901,7 +5151,7 @@
         <p:spPr>
           <a:xfrm>
             <a:off x="548640" y="2331720"/>
-            <a:ext cx="365400" cy="365400"/>
+            <a:ext cx="364320" cy="364320"/>
           </a:xfrm>
           <a:prstGeom prst="ellipse">
             <a:avLst/>
@@ -4924,6 +5174,11 @@
             <a:noAutofit/>
           </a:bodyPr>
           <a:p>
+            <a:pPr>
+              <a:lnSpc>
+                <a:spcPct val="100000"/>
+              </a:lnSpc>
+            </a:pPr>
             <a:endParaRPr b="0" lang="en-US" sz="1800" strike="noStrike" u="none">
               <a:solidFill>
                 <a:srgbClr val="ffffff"/>
@@ -4944,7 +5199,7 @@
         <p:spPr>
           <a:xfrm>
             <a:off x="548640" y="2331720"/>
-            <a:ext cx="365400" cy="365400"/>
+            <a:ext cx="364320" cy="364320"/>
           </a:xfrm>
           <a:prstGeom prst="rect">
             <a:avLst/>
@@ -5005,7 +5260,7 @@
         <p:spPr>
           <a:xfrm>
             <a:off x="1097280" y="2286000"/>
-            <a:ext cx="5074560" cy="594000"/>
+            <a:ext cx="5073480" cy="592920"/>
           </a:xfrm>
           <a:prstGeom prst="rect">
             <a:avLst/>
@@ -5066,7 +5321,7 @@
         <p:spPr>
           <a:xfrm>
             <a:off x="548640" y="3044880"/>
-            <a:ext cx="365400" cy="365400"/>
+            <a:ext cx="364320" cy="364320"/>
           </a:xfrm>
           <a:prstGeom prst="ellipse">
             <a:avLst/>
@@ -5089,6 +5344,11 @@
             <a:noAutofit/>
           </a:bodyPr>
           <a:p>
+            <a:pPr>
+              <a:lnSpc>
+                <a:spcPct val="100000"/>
+              </a:lnSpc>
+            </a:pPr>
             <a:endParaRPr b="0" lang="en-US" sz="1800" strike="noStrike" u="none">
               <a:solidFill>
                 <a:srgbClr val="ffffff"/>
@@ -5109,7 +5369,7 @@
         <p:spPr>
           <a:xfrm>
             <a:off x="548640" y="3044880"/>
-            <a:ext cx="365400" cy="365400"/>
+            <a:ext cx="364320" cy="364320"/>
           </a:xfrm>
           <a:prstGeom prst="rect">
             <a:avLst/>
@@ -5170,7 +5430,7 @@
         <p:spPr>
           <a:xfrm>
             <a:off x="1097280" y="2999160"/>
-            <a:ext cx="5074560" cy="594000"/>
+            <a:ext cx="5073480" cy="592920"/>
           </a:xfrm>
           <a:prstGeom prst="rect">
             <a:avLst/>
@@ -5231,7 +5491,7 @@
         <p:spPr>
           <a:xfrm>
             <a:off x="548640" y="3758040"/>
-            <a:ext cx="365400" cy="365400"/>
+            <a:ext cx="364320" cy="364320"/>
           </a:xfrm>
           <a:prstGeom prst="ellipse">
             <a:avLst/>
@@ -5254,6 +5514,11 @@
             <a:noAutofit/>
           </a:bodyPr>
           <a:p>
+            <a:pPr>
+              <a:lnSpc>
+                <a:spcPct val="100000"/>
+              </a:lnSpc>
+            </a:pPr>
             <a:endParaRPr b="0" lang="en-US" sz="1800" strike="noStrike" u="none">
               <a:solidFill>
                 <a:srgbClr val="ffffff"/>
@@ -5274,7 +5539,7 @@
         <p:spPr>
           <a:xfrm>
             <a:off x="548640" y="3758040"/>
-            <a:ext cx="365400" cy="365400"/>
+            <a:ext cx="364320" cy="364320"/>
           </a:xfrm>
           <a:prstGeom prst="rect">
             <a:avLst/>
@@ -5335,7 +5600,7 @@
         <p:spPr>
           <a:xfrm>
             <a:off x="1097280" y="3712320"/>
-            <a:ext cx="5074560" cy="594000"/>
+            <a:ext cx="5073480" cy="592920"/>
           </a:xfrm>
           <a:prstGeom prst="rect">
             <a:avLst/>
@@ -5396,7 +5661,7 @@
         <p:spPr>
           <a:xfrm>
             <a:off x="6492240" y="1417320"/>
-            <a:ext cx="5120280" cy="273960"/>
+            <a:ext cx="5119200" cy="272880"/>
           </a:xfrm>
           <a:prstGeom prst="rect">
             <a:avLst/>
@@ -5457,7 +5722,7 @@
         <p:spPr>
           <a:xfrm>
             <a:off x="6492240" y="1828800"/>
-            <a:ext cx="5120280" cy="1298160"/>
+            <a:ext cx="5119200" cy="1297080"/>
           </a:xfrm>
           <a:prstGeom prst="roundRect">
             <a:avLst>
@@ -5485,6 +5750,11 @@
             <a:noAutofit/>
           </a:bodyPr>
           <a:p>
+            <a:pPr>
+              <a:lnSpc>
+                <a:spcPct val="100000"/>
+              </a:lnSpc>
+            </a:pPr>
             <a:endParaRPr b="0" lang="en-US" sz="1800" strike="noStrike" u="none">
               <a:solidFill>
                 <a:srgbClr val="ffffff"/>
@@ -5505,7 +5775,7 @@
         <p:spPr>
           <a:xfrm>
             <a:off x="6766560" y="1974960"/>
-            <a:ext cx="4571640" cy="255600"/>
+            <a:ext cx="4570560" cy="254520"/>
           </a:xfrm>
           <a:prstGeom prst="rect">
             <a:avLst/>
@@ -5566,7 +5836,7 @@
         <p:spPr>
           <a:xfrm>
             <a:off x="6766560" y="2231280"/>
-            <a:ext cx="4571640" cy="365400"/>
+            <a:ext cx="4570560" cy="364320"/>
           </a:xfrm>
           <a:prstGeom prst="rect">
             <a:avLst/>
@@ -5627,7 +5897,7 @@
         <p:spPr>
           <a:xfrm>
             <a:off x="6766560" y="2615040"/>
-            <a:ext cx="4571640" cy="411120"/>
+            <a:ext cx="4570560" cy="410040"/>
           </a:xfrm>
           <a:prstGeom prst="rect">
             <a:avLst/>
@@ -5688,7 +5958,7 @@
         <p:spPr>
           <a:xfrm>
             <a:off x="6492240" y="3310200"/>
-            <a:ext cx="5120280" cy="1298160"/>
+            <a:ext cx="5119200" cy="1297080"/>
           </a:xfrm>
           <a:prstGeom prst="roundRect">
             <a:avLst>
@@ -5716,6 +5986,11 @@
             <a:noAutofit/>
           </a:bodyPr>
           <a:p>
+            <a:pPr>
+              <a:lnSpc>
+                <a:spcPct val="100000"/>
+              </a:lnSpc>
+            </a:pPr>
             <a:endParaRPr b="0" lang="en-US" sz="1800" strike="noStrike" u="none">
               <a:solidFill>
                 <a:srgbClr val="000000"/>
@@ -5736,7 +6011,7 @@
         <p:spPr>
           <a:xfrm>
             <a:off x="6766560" y="3456360"/>
-            <a:ext cx="4571640" cy="255600"/>
+            <a:ext cx="4570560" cy="254520"/>
           </a:xfrm>
           <a:prstGeom prst="rect">
             <a:avLst/>
@@ -5797,7 +6072,7 @@
         <p:spPr>
           <a:xfrm>
             <a:off x="6766560" y="3712320"/>
-            <a:ext cx="4571640" cy="365400"/>
+            <a:ext cx="4570560" cy="364320"/>
           </a:xfrm>
           <a:prstGeom prst="rect">
             <a:avLst/>
@@ -5858,7 +6133,7 @@
         <p:spPr>
           <a:xfrm>
             <a:off x="6766560" y="4096440"/>
-            <a:ext cx="4571640" cy="411120"/>
+            <a:ext cx="4570560" cy="410040"/>
           </a:xfrm>
           <a:prstGeom prst="rect">
             <a:avLst/>
@@ -5919,7 +6194,7 @@
         <p:spPr>
           <a:xfrm>
             <a:off x="6492240" y="4791600"/>
-            <a:ext cx="5120280" cy="1298160"/>
+            <a:ext cx="5119200" cy="1297080"/>
           </a:xfrm>
           <a:prstGeom prst="roundRect">
             <a:avLst>
@@ -5947,6 +6222,11 @@
             <a:noAutofit/>
           </a:bodyPr>
           <a:p>
+            <a:pPr>
+              <a:lnSpc>
+                <a:spcPct val="100000"/>
+              </a:lnSpc>
+            </a:pPr>
             <a:endParaRPr b="0" lang="en-US" sz="1800" strike="noStrike" u="none">
               <a:solidFill>
                 <a:srgbClr val="000000"/>
@@ -5967,7 +6247,7 @@
         <p:spPr>
           <a:xfrm>
             <a:off x="6766560" y="4937760"/>
-            <a:ext cx="4571640" cy="255600"/>
+            <a:ext cx="4570560" cy="254520"/>
           </a:xfrm>
           <a:prstGeom prst="rect">
             <a:avLst/>
@@ -6028,7 +6308,7 @@
         <p:spPr>
           <a:xfrm>
             <a:off x="6766560" y="5193720"/>
-            <a:ext cx="4571640" cy="365400"/>
+            <a:ext cx="4570560" cy="364320"/>
           </a:xfrm>
           <a:prstGeom prst="rect">
             <a:avLst/>
@@ -6089,7 +6369,7 @@
         <p:spPr>
           <a:xfrm>
             <a:off x="6766560" y="5577840"/>
-            <a:ext cx="4571640" cy="411120"/>
+            <a:ext cx="4570560" cy="410040"/>
           </a:xfrm>
           <a:prstGeom prst="rect">
             <a:avLst/>
@@ -6131,6 +6411,774 @@
               <a:t>Channel-aware planning &amp; fulfillment</a:t>
             </a:r>
             <a:endParaRPr b="0" lang="en-US" sz="1150" strike="noStrike" u="none">
+              <a:solidFill>
+                <a:srgbClr val="000000"/>
+              </a:solidFill>
+              <a:effectLst/>
+              <a:uFillTx/>
+              <a:latin typeface="Arial"/>
+            </a:endParaRPr>
+          </a:p>
+        </p:txBody>
+      </p:sp>
+      <p:sp>
+        <p:nvSpPr>
+          <p:cNvPr id="71" name="TextBox 70"/>
+          <p:cNvSpPr/>
+          <p:nvPr/>
+        </p:nvSpPr>
+        <p:spPr>
+          <a:xfrm>
+            <a:off x="548640" y="4460040"/>
+            <a:ext cx="5698800" cy="203400"/>
+          </a:xfrm>
+          <a:prstGeom prst="rect">
+            <a:avLst/>
+          </a:prstGeom>
+          <a:noFill/>
+          <a:ln w="0">
+            <a:noFill/>
+          </a:ln>
+        </p:spPr>
+        <p:style>
+          <a:lnRef idx="0"/>
+          <a:fillRef idx="0"/>
+          <a:effectRef idx="0"/>
+          <a:fontRef idx="minor"/>
+        </p:style>
+        <p:txBody>
+          <a:bodyPr lIns="45000" rIns="45000" tIns="18000" bIns="18000" anchor="t">
+            <a:spAutoFit/>
+          </a:bodyPr>
+          <a:p>
+            <a:pPr>
+              <a:lnSpc>
+                <a:spcPct val="100000"/>
+              </a:lnSpc>
+            </a:pPr>
+            <a:r>
+              <a:rPr b="1" lang="en-US" sz="1100" strike="noStrike" u="none">
+                <a:solidFill>
+                  <a:srgbClr val="00b4a6"/>
+                </a:solidFill>
+                <a:effectLst/>
+                <a:uFillTx/>
+                <a:latin typeface="Calibri"/>
+              </a:rPr>
+              <a:t>DATA QUALITY &amp; ITEM LIFECYCLE</a:t>
+            </a:r>
+            <a:endParaRPr b="0" lang="en-US" sz="1100" strike="noStrike" u="none">
+              <a:solidFill>
+                <a:srgbClr val="000000"/>
+              </a:solidFill>
+              <a:effectLst/>
+              <a:uFillTx/>
+              <a:latin typeface="Arial"/>
+            </a:endParaRPr>
+          </a:p>
+        </p:txBody>
+      </p:sp>
+      <p:sp>
+        <p:nvSpPr>
+          <p:cNvPr id="72" name="Rounded Rectangle 71"/>
+          <p:cNvSpPr/>
+          <p:nvPr/>
+        </p:nvSpPr>
+        <p:spPr>
+          <a:xfrm>
+            <a:off x="548640" y="4880160"/>
+            <a:ext cx="1918800" cy="1378800"/>
+          </a:xfrm>
+          <a:prstGeom prst="roundRect">
+            <a:avLst>
+              <a:gd name="adj" fmla="val 16667"/>
+            </a:avLst>
+          </a:prstGeom>
+          <a:solidFill>
+            <a:srgbClr val="eef3fc"/>
+          </a:solidFill>
+          <a:ln w="12700">
+            <a:solidFill>
+              <a:srgbClr val="cadcfc"/>
+            </a:solidFill>
+          </a:ln>
+        </p:spPr>
+        <p:style>
+          <a:lnRef idx="1">
+            <a:schemeClr val="accent1"/>
+          </a:lnRef>
+          <a:fillRef idx="3">
+            <a:schemeClr val="accent1"/>
+          </a:fillRef>
+          <a:effectRef idx="2">
+            <a:schemeClr val="accent1"/>
+          </a:effectRef>
+          <a:fontRef idx="minor"/>
+        </p:style>
+        <p:txBody>
+          <a:bodyPr lIns="90000" rIns="90000" tIns="45000" bIns="45000" anchor="ctr">
+            <a:noAutofit/>
+          </a:bodyPr>
+          <a:p>
+            <a:pPr algn="ctr">
+              <a:lnSpc>
+                <a:spcPct val="100000"/>
+              </a:lnSpc>
+            </a:pPr>
+            <a:endParaRPr b="0" lang="en-US" sz="1800" strike="noStrike" u="none">
+              <a:solidFill>
+                <a:schemeClr val="lt1"/>
+              </a:solidFill>
+              <a:effectLst/>
+              <a:uFillTx/>
+              <a:latin typeface="Calibri"/>
+            </a:endParaRPr>
+          </a:p>
+        </p:txBody>
+      </p:sp>
+      <p:sp>
+        <p:nvSpPr>
+          <p:cNvPr id="73" name="Oval 72"/>
+          <p:cNvSpPr/>
+          <p:nvPr/>
+        </p:nvSpPr>
+        <p:spPr>
+          <a:xfrm>
+            <a:off x="648720" y="4960080"/>
+            <a:ext cx="298800" cy="298800"/>
+          </a:xfrm>
+          <a:prstGeom prst="ellipse">
+            <a:avLst/>
+          </a:prstGeom>
+          <a:solidFill>
+            <a:srgbClr val="1e2761"/>
+          </a:solidFill>
+          <a:ln>
+            <a:noFill/>
+          </a:ln>
+        </p:spPr>
+        <p:style>
+          <a:lnRef idx="1">
+            <a:schemeClr val="accent1"/>
+          </a:lnRef>
+          <a:fillRef idx="3">
+            <a:schemeClr val="accent1"/>
+          </a:fillRef>
+          <a:effectRef idx="2">
+            <a:schemeClr val="accent1"/>
+          </a:effectRef>
+          <a:fontRef idx="minor"/>
+        </p:style>
+        <p:txBody>
+          <a:bodyPr wrap="none" lIns="0" rIns="0" tIns="0" bIns="0" anchor="ctr">
+            <a:noAutofit/>
+          </a:bodyPr>
+          <a:p>
+            <a:pPr algn="ctr">
+              <a:lnSpc>
+                <a:spcPct val="100000"/>
+              </a:lnSpc>
+            </a:pPr>
+            <a:r>
+              <a:rPr b="1" lang="en-US" sz="1600" strike="noStrike" u="none">
+                <a:solidFill>
+                  <a:srgbClr val="ffffff"/>
+                </a:solidFill>
+                <a:effectLst/>
+                <a:uFillTx/>
+                <a:latin typeface="Calibri"/>
+              </a:rPr>
+              <a:t>A</a:t>
+            </a:r>
+            <a:endParaRPr b="0" lang="en-US" sz="1600" strike="noStrike" u="none">
+              <a:solidFill>
+                <a:srgbClr val="ffffff"/>
+              </a:solidFill>
+              <a:effectLst/>
+              <a:uFillTx/>
+              <a:latin typeface="Arial"/>
+            </a:endParaRPr>
+          </a:p>
+        </p:txBody>
+      </p:sp>
+      <p:sp>
+        <p:nvSpPr>
+          <p:cNvPr id="74" name="TextBox 73"/>
+          <p:cNvSpPr/>
+          <p:nvPr/>
+        </p:nvSpPr>
+        <p:spPr>
+          <a:xfrm>
+            <a:off x="1008720" y="4960080"/>
+            <a:ext cx="1359000" cy="358920"/>
+          </a:xfrm>
+          <a:prstGeom prst="rect">
+            <a:avLst/>
+          </a:prstGeom>
+          <a:noFill/>
+          <a:ln w="0">
+            <a:noFill/>
+          </a:ln>
+        </p:spPr>
+        <p:style>
+          <a:lnRef idx="0"/>
+          <a:fillRef idx="0"/>
+          <a:effectRef idx="0"/>
+          <a:fontRef idx="minor"/>
+        </p:style>
+        <p:txBody>
+          <a:bodyPr lIns="45000" rIns="45000" tIns="18000" bIns="18000" anchor="ctr">
+            <a:spAutoFit/>
+          </a:bodyPr>
+          <a:p>
+            <a:pPr>
+              <a:lnSpc>
+                <a:spcPct val="100000"/>
+              </a:lnSpc>
+            </a:pPr>
+            <a:r>
+              <a:rPr b="1" lang="en-US" sz="1400" strike="noStrike" u="none">
+                <a:solidFill>
+                  <a:srgbClr val="1e2761"/>
+                </a:solidFill>
+                <a:effectLst/>
+                <a:uFillTx/>
+                <a:latin typeface="Cambria"/>
+              </a:rPr>
+              <a:t>Outlier Management</a:t>
+            </a:r>
+            <a:endParaRPr b="0" lang="en-US" sz="1400" strike="noStrike" u="none">
+              <a:solidFill>
+                <a:srgbClr val="000000"/>
+              </a:solidFill>
+              <a:effectLst/>
+              <a:uFillTx/>
+              <a:latin typeface="Arial"/>
+            </a:endParaRPr>
+          </a:p>
+        </p:txBody>
+      </p:sp>
+      <p:sp>
+        <p:nvSpPr>
+          <p:cNvPr id="75" name="TextBox 74"/>
+          <p:cNvSpPr/>
+          <p:nvPr/>
+        </p:nvSpPr>
+        <p:spPr>
+          <a:xfrm>
+            <a:off x="678600" y="5379840"/>
+            <a:ext cx="1658880" cy="798840"/>
+          </a:xfrm>
+          <a:prstGeom prst="rect">
+            <a:avLst/>
+          </a:prstGeom>
+          <a:noFill/>
+          <a:ln w="0">
+            <a:noFill/>
+          </a:ln>
+        </p:spPr>
+        <p:style>
+          <a:lnRef idx="0"/>
+          <a:fillRef idx="0"/>
+          <a:effectRef idx="0"/>
+          <a:fontRef idx="minor"/>
+        </p:style>
+        <p:txBody>
+          <a:bodyPr lIns="45000" rIns="45000" tIns="18000" bIns="18000" anchor="t">
+            <a:spAutoFit/>
+          </a:bodyPr>
+          <a:p>
+            <a:pPr>
+              <a:lnSpc>
+                <a:spcPct val="100000"/>
+              </a:lnSpc>
+            </a:pPr>
+            <a:r>
+              <a:rPr b="0" lang="en-US" sz="1000" strike="noStrike" u="none">
+                <a:solidFill>
+                  <a:srgbClr val="1b2440"/>
+                </a:solidFill>
+                <a:effectLst/>
+                <a:uFillTx/>
+                <a:latin typeface="Calibri"/>
+              </a:rPr>
+              <a:t>Flags demand anomalies by threshold detection; planner-confirmed adjustments net them out so every model sees clean actuals.</a:t>
+            </a:r>
+            <a:endParaRPr b="0" lang="en-US" sz="1000" strike="noStrike" u="none">
+              <a:solidFill>
+                <a:srgbClr val="000000"/>
+              </a:solidFill>
+              <a:effectLst/>
+              <a:uFillTx/>
+              <a:latin typeface="Arial"/>
+            </a:endParaRPr>
+          </a:p>
+        </p:txBody>
+      </p:sp>
+      <p:sp>
+        <p:nvSpPr>
+          <p:cNvPr id="76" name="Rounded Rectangle 75"/>
+          <p:cNvSpPr/>
+          <p:nvPr/>
+        </p:nvSpPr>
+        <p:spPr>
+          <a:xfrm>
+            <a:off x="2528640" y="4880160"/>
+            <a:ext cx="1918800" cy="1378800"/>
+          </a:xfrm>
+          <a:prstGeom prst="roundRect">
+            <a:avLst>
+              <a:gd name="adj" fmla="val 16667"/>
+            </a:avLst>
+          </a:prstGeom>
+          <a:solidFill>
+            <a:srgbClr val="eef3fc"/>
+          </a:solidFill>
+          <a:ln w="12700">
+            <a:solidFill>
+              <a:srgbClr val="cadcfc"/>
+            </a:solidFill>
+          </a:ln>
+        </p:spPr>
+        <p:style>
+          <a:lnRef idx="1">
+            <a:schemeClr val="accent1"/>
+          </a:lnRef>
+          <a:fillRef idx="3">
+            <a:schemeClr val="accent1"/>
+          </a:fillRef>
+          <a:effectRef idx="2">
+            <a:schemeClr val="accent1"/>
+          </a:effectRef>
+          <a:fontRef idx="minor"/>
+        </p:style>
+        <p:txBody>
+          <a:bodyPr lIns="90000" rIns="90000" tIns="45000" bIns="45000" anchor="ctr">
+            <a:noAutofit/>
+          </a:bodyPr>
+          <a:p>
+            <a:pPr algn="ctr">
+              <a:lnSpc>
+                <a:spcPct val="100000"/>
+              </a:lnSpc>
+            </a:pPr>
+            <a:endParaRPr b="0" lang="en-US" sz="1800" strike="noStrike" u="none">
+              <a:solidFill>
+                <a:schemeClr val="lt1"/>
+              </a:solidFill>
+              <a:effectLst/>
+              <a:uFillTx/>
+              <a:latin typeface="Calibri"/>
+            </a:endParaRPr>
+          </a:p>
+        </p:txBody>
+      </p:sp>
+      <p:sp>
+        <p:nvSpPr>
+          <p:cNvPr id="77" name="Oval 76"/>
+          <p:cNvSpPr/>
+          <p:nvPr/>
+        </p:nvSpPr>
+        <p:spPr>
+          <a:xfrm>
+            <a:off x="2628720" y="4960080"/>
+            <a:ext cx="298800" cy="298800"/>
+          </a:xfrm>
+          <a:prstGeom prst="ellipse">
+            <a:avLst/>
+          </a:prstGeom>
+          <a:solidFill>
+            <a:srgbClr val="1e2761"/>
+          </a:solidFill>
+          <a:ln>
+            <a:noFill/>
+          </a:ln>
+        </p:spPr>
+        <p:style>
+          <a:lnRef idx="1">
+            <a:schemeClr val="accent1"/>
+          </a:lnRef>
+          <a:fillRef idx="3">
+            <a:schemeClr val="accent1"/>
+          </a:fillRef>
+          <a:effectRef idx="2">
+            <a:schemeClr val="accent1"/>
+          </a:effectRef>
+          <a:fontRef idx="minor"/>
+        </p:style>
+        <p:txBody>
+          <a:bodyPr wrap="none" lIns="0" rIns="0" tIns="0" bIns="0" anchor="ctr">
+            <a:noAutofit/>
+          </a:bodyPr>
+          <a:p>
+            <a:pPr algn="ctr">
+              <a:lnSpc>
+                <a:spcPct val="100000"/>
+              </a:lnSpc>
+            </a:pPr>
+            <a:r>
+              <a:rPr b="1" lang="en-US" sz="1600" strike="noStrike" u="none">
+                <a:solidFill>
+                  <a:srgbClr val="ffffff"/>
+                </a:solidFill>
+                <a:effectLst/>
+                <a:uFillTx/>
+                <a:latin typeface="Calibri"/>
+              </a:rPr>
+              <a:t>B</a:t>
+            </a:r>
+            <a:endParaRPr b="0" lang="en-US" sz="1600" strike="noStrike" u="none">
+              <a:solidFill>
+                <a:srgbClr val="ffffff"/>
+              </a:solidFill>
+              <a:effectLst/>
+              <a:uFillTx/>
+              <a:latin typeface="Arial"/>
+            </a:endParaRPr>
+          </a:p>
+        </p:txBody>
+      </p:sp>
+      <p:sp>
+        <p:nvSpPr>
+          <p:cNvPr id="78" name="TextBox 77"/>
+          <p:cNvSpPr/>
+          <p:nvPr/>
+        </p:nvSpPr>
+        <p:spPr>
+          <a:xfrm>
+            <a:off x="2988720" y="4960080"/>
+            <a:ext cx="1359000" cy="358920"/>
+          </a:xfrm>
+          <a:prstGeom prst="rect">
+            <a:avLst/>
+          </a:prstGeom>
+          <a:noFill/>
+          <a:ln w="0">
+            <a:noFill/>
+          </a:ln>
+        </p:spPr>
+        <p:style>
+          <a:lnRef idx="0"/>
+          <a:fillRef idx="0"/>
+          <a:effectRef idx="0"/>
+          <a:fontRef idx="minor"/>
+        </p:style>
+        <p:txBody>
+          <a:bodyPr lIns="45000" rIns="45000" tIns="18000" bIns="18000" anchor="ctr">
+            <a:spAutoFit/>
+          </a:bodyPr>
+          <a:p>
+            <a:pPr>
+              <a:lnSpc>
+                <a:spcPct val="100000"/>
+              </a:lnSpc>
+            </a:pPr>
+            <a:r>
+              <a:rPr b="1" lang="en-US" sz="1400" strike="noStrike" u="none">
+                <a:solidFill>
+                  <a:srgbClr val="1e2761"/>
+                </a:solidFill>
+                <a:effectLst/>
+                <a:uFillTx/>
+                <a:latin typeface="Cambria"/>
+              </a:rPr>
+              <a:t>Scheme Management</a:t>
+            </a:r>
+            <a:endParaRPr b="0" lang="en-US" sz="1400" strike="noStrike" u="none">
+              <a:solidFill>
+                <a:srgbClr val="000000"/>
+              </a:solidFill>
+              <a:effectLst/>
+              <a:uFillTx/>
+              <a:latin typeface="Arial"/>
+            </a:endParaRPr>
+          </a:p>
+        </p:txBody>
+      </p:sp>
+      <p:sp>
+        <p:nvSpPr>
+          <p:cNvPr id="79" name="TextBox 78"/>
+          <p:cNvSpPr/>
+          <p:nvPr/>
+        </p:nvSpPr>
+        <p:spPr>
+          <a:xfrm>
+            <a:off x="2658600" y="5379840"/>
+            <a:ext cx="1658880" cy="819000"/>
+          </a:xfrm>
+          <a:prstGeom prst="rect">
+            <a:avLst/>
+          </a:prstGeom>
+          <a:noFill/>
+          <a:ln w="0">
+            <a:noFill/>
+          </a:ln>
+        </p:spPr>
+        <p:style>
+          <a:lnRef idx="0"/>
+          <a:fillRef idx="0"/>
+          <a:effectRef idx="0"/>
+          <a:fontRef idx="minor"/>
+        </p:style>
+        <p:txBody>
+          <a:bodyPr lIns="45000" rIns="45000" tIns="18000" bIns="18000" anchor="t">
+            <a:spAutoFit/>
+          </a:bodyPr>
+          <a:p>
+            <a:pPr>
+              <a:lnSpc>
+                <a:spcPct val="100000"/>
+              </a:lnSpc>
+            </a:pPr>
+            <a:r>
+              <a:rPr b="0" lang="en-US" sz="1000" strike="noStrike" u="none">
+                <a:solidFill>
+                  <a:srgbClr val="1b2440"/>
+                </a:solidFill>
+                <a:effectLst/>
+                <a:uFillTx/>
+                <a:latin typeface="Calibri"/>
+              </a:rPr>
+              <a:t>Promo periods divide by (1 + uplift) and shadow shares are added back, so planned uplifts shape — not poison — the baseline.</a:t>
+            </a:r>
+            <a:endParaRPr b="0" lang="en-US" sz="1000" strike="noStrike" u="none">
+              <a:solidFill>
+                <a:srgbClr val="000000"/>
+              </a:solidFill>
+              <a:effectLst/>
+              <a:uFillTx/>
+              <a:latin typeface="Arial"/>
+            </a:endParaRPr>
+          </a:p>
+        </p:txBody>
+      </p:sp>
+      <p:sp>
+        <p:nvSpPr>
+          <p:cNvPr id="80" name="Rounded Rectangle 79"/>
+          <p:cNvSpPr/>
+          <p:nvPr/>
+        </p:nvSpPr>
+        <p:spPr>
+          <a:xfrm>
+            <a:off x="4508640" y="4880160"/>
+            <a:ext cx="1918800" cy="1378800"/>
+          </a:xfrm>
+          <a:prstGeom prst="roundRect">
+            <a:avLst>
+              <a:gd name="adj" fmla="val 16667"/>
+            </a:avLst>
+          </a:prstGeom>
+          <a:solidFill>
+            <a:srgbClr val="eef3fc"/>
+          </a:solidFill>
+          <a:ln w="12700">
+            <a:solidFill>
+              <a:srgbClr val="cadcfc"/>
+            </a:solidFill>
+          </a:ln>
+        </p:spPr>
+        <p:style>
+          <a:lnRef idx="1">
+            <a:schemeClr val="accent1"/>
+          </a:lnRef>
+          <a:fillRef idx="3">
+            <a:schemeClr val="accent1"/>
+          </a:fillRef>
+          <a:effectRef idx="2">
+            <a:schemeClr val="accent1"/>
+          </a:effectRef>
+          <a:fontRef idx="minor"/>
+        </p:style>
+        <p:txBody>
+          <a:bodyPr lIns="90000" rIns="90000" tIns="45000" bIns="45000" anchor="ctr">
+            <a:noAutofit/>
+          </a:bodyPr>
+          <a:p>
+            <a:pPr algn="ctr">
+              <a:lnSpc>
+                <a:spcPct val="100000"/>
+              </a:lnSpc>
+            </a:pPr>
+            <a:endParaRPr b="0" lang="en-US" sz="1800" strike="noStrike" u="none">
+              <a:solidFill>
+                <a:schemeClr val="lt1"/>
+              </a:solidFill>
+              <a:effectLst/>
+              <a:uFillTx/>
+              <a:latin typeface="Calibri"/>
+            </a:endParaRPr>
+          </a:p>
+        </p:txBody>
+      </p:sp>
+      <p:sp>
+        <p:nvSpPr>
+          <p:cNvPr id="81" name="Oval 80"/>
+          <p:cNvSpPr/>
+          <p:nvPr/>
+        </p:nvSpPr>
+        <p:spPr>
+          <a:xfrm>
+            <a:off x="4608720" y="4960080"/>
+            <a:ext cx="298800" cy="298800"/>
+          </a:xfrm>
+          <a:prstGeom prst="ellipse">
+            <a:avLst/>
+          </a:prstGeom>
+          <a:solidFill>
+            <a:srgbClr val="1e2761"/>
+          </a:solidFill>
+          <a:ln>
+            <a:noFill/>
+          </a:ln>
+        </p:spPr>
+        <p:style>
+          <a:lnRef idx="1">
+            <a:schemeClr val="accent1"/>
+          </a:lnRef>
+          <a:fillRef idx="3">
+            <a:schemeClr val="accent1"/>
+          </a:fillRef>
+          <a:effectRef idx="2">
+            <a:schemeClr val="accent1"/>
+          </a:effectRef>
+          <a:fontRef idx="minor"/>
+        </p:style>
+        <p:txBody>
+          <a:bodyPr wrap="none" lIns="0" rIns="0" tIns="0" bIns="0" anchor="ctr">
+            <a:noAutofit/>
+          </a:bodyPr>
+          <a:p>
+            <a:pPr algn="ctr">
+              <a:lnSpc>
+                <a:spcPct val="100000"/>
+              </a:lnSpc>
+            </a:pPr>
+            <a:r>
+              <a:rPr b="1" lang="en-US" sz="1600" strike="noStrike" u="none">
+                <a:solidFill>
+                  <a:srgbClr val="ffffff"/>
+                </a:solidFill>
+                <a:effectLst/>
+                <a:uFillTx/>
+                <a:latin typeface="Calibri"/>
+              </a:rPr>
+              <a:t>C</a:t>
+            </a:r>
+            <a:endParaRPr b="0" lang="en-US" sz="1600" strike="noStrike" u="none">
+              <a:solidFill>
+                <a:srgbClr val="ffffff"/>
+              </a:solidFill>
+              <a:effectLst/>
+              <a:uFillTx/>
+              <a:latin typeface="Arial"/>
+            </a:endParaRPr>
+          </a:p>
+        </p:txBody>
+      </p:sp>
+      <p:sp>
+        <p:nvSpPr>
+          <p:cNvPr id="82" name="TextBox 81"/>
+          <p:cNvSpPr/>
+          <p:nvPr/>
+        </p:nvSpPr>
+        <p:spPr>
+          <a:xfrm>
+            <a:off x="4968720" y="4960080"/>
+            <a:ext cx="1359000" cy="358920"/>
+          </a:xfrm>
+          <a:prstGeom prst="rect">
+            <a:avLst/>
+          </a:prstGeom>
+          <a:noFill/>
+          <a:ln w="0">
+            <a:noFill/>
+          </a:ln>
+        </p:spPr>
+        <p:style>
+          <a:lnRef idx="0"/>
+          <a:fillRef idx="0"/>
+          <a:effectRef idx="0"/>
+          <a:fontRef idx="minor"/>
+        </p:style>
+        <p:txBody>
+          <a:bodyPr lIns="45000" rIns="45000" tIns="18000" bIns="18000" anchor="ctr">
+            <a:spAutoFit/>
+          </a:bodyPr>
+          <a:p>
+            <a:pPr>
+              <a:lnSpc>
+                <a:spcPct val="100000"/>
+              </a:lnSpc>
+            </a:pPr>
+            <a:r>
+              <a:rPr b="1" lang="en-US" sz="1400" strike="noStrike" u="none">
+                <a:solidFill>
+                  <a:srgbClr val="1e2761"/>
+                </a:solidFill>
+                <a:effectLst/>
+                <a:uFillTx/>
+                <a:latin typeface="Cambria"/>
+              </a:rPr>
+              <a:t>Item Lifecycle</a:t>
+            </a:r>
+            <a:endParaRPr b="0" lang="en-US" sz="1400" strike="noStrike" u="none">
+              <a:solidFill>
+                <a:srgbClr val="000000"/>
+              </a:solidFill>
+              <a:effectLst/>
+              <a:uFillTx/>
+              <a:latin typeface="Arial"/>
+            </a:endParaRPr>
+          </a:p>
+        </p:txBody>
+      </p:sp>
+      <p:sp>
+        <p:nvSpPr>
+          <p:cNvPr id="83" name="TextBox 82"/>
+          <p:cNvSpPr/>
+          <p:nvPr/>
+        </p:nvSpPr>
+        <p:spPr>
+          <a:xfrm>
+            <a:off x="4638600" y="5379840"/>
+            <a:ext cx="1658880" cy="819000"/>
+          </a:xfrm>
+          <a:prstGeom prst="rect">
+            <a:avLst/>
+          </a:prstGeom>
+          <a:noFill/>
+          <a:ln w="0">
+            <a:noFill/>
+          </a:ln>
+        </p:spPr>
+        <p:style>
+          <a:lnRef idx="0"/>
+          <a:fillRef idx="0"/>
+          <a:effectRef idx="0"/>
+          <a:fontRef idx="minor"/>
+        </p:style>
+        <p:txBody>
+          <a:bodyPr lIns="45000" rIns="45000" tIns="18000" bIns="18000" anchor="t">
+            <a:spAutoFit/>
+          </a:bodyPr>
+          <a:p>
+            <a:pPr>
+              <a:lnSpc>
+                <a:spcPct val="100000"/>
+              </a:lnSpc>
+            </a:pPr>
+            <a:r>
+              <a:rPr b="0" lang="en-US" sz="1000" strike="noStrike" u="none">
+                <a:solidFill>
+                  <a:srgbClr val="1b2440"/>
+                </a:solidFill>
+                <a:effectLst/>
+                <a:uFillTx/>
+                <a:latin typeface="Calibri"/>
+              </a:rPr>
+              <a:t>Retired codes convert to the successor; discontinued items forecast nil; new items borrow a reference forecast until history accrues.</a:t>
+            </a:r>
+            <a:endParaRPr b="0" lang="en-US" sz="1000" strike="noStrike" u="none">
               <a:solidFill>
                 <a:srgbClr val="000000"/>
               </a:solidFill>
@@ -6180,7 +7228,7 @@
       </p:grpSpPr>
       <p:sp>
         <p:nvSpPr>
-          <p:cNvPr id="71" name="Shape 0">
+          <p:cNvPr id="84" name="Shape 0">
             <a:hlinkClick r:id="rId1" action="ppaction://hlinksldjump"/>
           </p:cNvPr>
           <p:cNvSpPr/>
@@ -6189,7 +7237,7 @@
         <p:spPr>
           <a:xfrm>
             <a:off x="10314360" y="201240"/>
-            <a:ext cx="1599840" cy="365400"/>
+            <a:ext cx="1598760" cy="364320"/>
           </a:xfrm>
           <a:prstGeom prst="roundRect">
             <a:avLst>
@@ -6214,6 +7262,11 @@
             <a:noAutofit/>
           </a:bodyPr>
           <a:p>
+            <a:pPr>
+              <a:lnSpc>
+                <a:spcPct val="100000"/>
+              </a:lnSpc>
+            </a:pPr>
             <a:endParaRPr b="0" lang="en-US" sz="1800" strike="noStrike" u="none">
               <a:solidFill>
                 <a:srgbClr val="ffffff"/>
@@ -6227,14 +7280,14 @@
       </p:sp>
       <p:sp>
         <p:nvSpPr>
-          <p:cNvPr id="72" name="Text 1"/>
+          <p:cNvPr id="85" name="Text 1"/>
           <p:cNvSpPr/>
           <p:nvPr/>
         </p:nvSpPr>
         <p:spPr>
           <a:xfrm>
             <a:off x="10314360" y="201240"/>
-            <a:ext cx="1599840" cy="365400"/>
+            <a:ext cx="1598760" cy="364320"/>
           </a:xfrm>
           <a:prstGeom prst="rect">
             <a:avLst/>
@@ -6266,7 +7319,7 @@
             <a:r>
               <a:rPr b="1" lang="en-US" sz="1100" strike="noStrike" u="sng">
                 <a:solidFill>
-                  <a:srgbClr val="ffffff"/>
+                  <a:srgbClr val="f2f2f2"/>
                 </a:solidFill>
                 <a:effectLst/>
                 <a:uFillTx/>
@@ -6289,14 +7342,14 @@
       </p:sp>
       <p:sp>
         <p:nvSpPr>
-          <p:cNvPr id="73" name="Text 2"/>
+          <p:cNvPr id="86" name="Text 2"/>
           <p:cNvSpPr/>
           <p:nvPr/>
         </p:nvSpPr>
         <p:spPr>
           <a:xfrm>
             <a:off x="11365920" y="6492240"/>
-            <a:ext cx="639720" cy="273960"/>
+            <a:ext cx="638640" cy="272880"/>
           </a:xfrm>
           <a:prstGeom prst="rect">
             <a:avLst/>
@@ -6350,14 +7403,14 @@
       </p:sp>
       <p:sp>
         <p:nvSpPr>
-          <p:cNvPr id="74" name="Text 3"/>
+          <p:cNvPr id="87" name="Text 3"/>
           <p:cNvSpPr/>
           <p:nvPr/>
         </p:nvSpPr>
         <p:spPr>
           <a:xfrm>
             <a:off x="548640" y="320040"/>
-            <a:ext cx="7314840" cy="273960"/>
+            <a:ext cx="7313760" cy="272880"/>
           </a:xfrm>
           <a:prstGeom prst="rect">
             <a:avLst/>
@@ -6411,14 +7464,14 @@
       </p:sp>
       <p:sp>
         <p:nvSpPr>
-          <p:cNvPr id="75" name="Text 4"/>
+          <p:cNvPr id="88" name="Text 4"/>
           <p:cNvSpPr/>
           <p:nvPr/>
         </p:nvSpPr>
         <p:spPr>
           <a:xfrm>
             <a:off x="548640" y="567000"/>
-            <a:ext cx="8777880" cy="685440"/>
+            <a:ext cx="8776800" cy="684360"/>
           </a:xfrm>
           <a:prstGeom prst="rect">
             <a:avLst/>
@@ -6472,14 +7525,14 @@
       </p:sp>
       <p:sp>
         <p:nvSpPr>
-          <p:cNvPr id="76" name="Text 5"/>
+          <p:cNvPr id="89" name="Text 5"/>
           <p:cNvSpPr/>
           <p:nvPr/>
         </p:nvSpPr>
         <p:spPr>
           <a:xfrm>
             <a:off x="548640" y="1417320"/>
-            <a:ext cx="11063880" cy="548280"/>
+            <a:ext cx="11062800" cy="547200"/>
           </a:xfrm>
           <a:prstGeom prst="rect">
             <a:avLst/>
@@ -6533,14 +7586,14 @@
       </p:sp>
       <p:sp>
         <p:nvSpPr>
-          <p:cNvPr id="77" name="Text 6"/>
+          <p:cNvPr id="90" name="Text 6"/>
           <p:cNvSpPr/>
           <p:nvPr/>
         </p:nvSpPr>
         <p:spPr>
           <a:xfrm>
             <a:off x="548640" y="2148840"/>
-            <a:ext cx="10972440" cy="273960"/>
+            <a:ext cx="10971360" cy="272880"/>
           </a:xfrm>
           <a:prstGeom prst="rect">
             <a:avLst/>
@@ -6594,14 +7647,14 @@
       </p:sp>
       <p:sp>
         <p:nvSpPr>
-          <p:cNvPr id="78" name="Shape 7"/>
+          <p:cNvPr id="91" name="Shape 7"/>
           <p:cNvSpPr/>
           <p:nvPr/>
         </p:nvSpPr>
         <p:spPr>
           <a:xfrm>
             <a:off x="548640" y="2560320"/>
-            <a:ext cx="3520080" cy="2331360"/>
+            <a:ext cx="3519000" cy="2330280"/>
           </a:xfrm>
           <a:prstGeom prst="roundRect">
             <a:avLst>
@@ -6629,6 +7682,11 @@
             <a:noAutofit/>
           </a:bodyPr>
           <a:p>
+            <a:pPr>
+              <a:lnSpc>
+                <a:spcPct val="100000"/>
+              </a:lnSpc>
+            </a:pPr>
             <a:endParaRPr b="0" lang="en-US" sz="1800" strike="noStrike" u="none">
               <a:solidFill>
                 <a:srgbClr val="000000"/>
@@ -6642,14 +7700,14 @@
       </p:sp>
       <p:sp>
         <p:nvSpPr>
-          <p:cNvPr id="79" name="Shape 8"/>
+          <p:cNvPr id="92" name="Shape 8"/>
           <p:cNvSpPr/>
           <p:nvPr/>
         </p:nvSpPr>
         <p:spPr>
           <a:xfrm>
             <a:off x="822960" y="2834640"/>
-            <a:ext cx="502560" cy="502560"/>
+            <a:ext cx="501480" cy="501480"/>
           </a:xfrm>
           <a:prstGeom prst="ellipse">
             <a:avLst/>
@@ -6672,6 +7730,11 @@
             <a:noAutofit/>
           </a:bodyPr>
           <a:p>
+            <a:pPr>
+              <a:lnSpc>
+                <a:spcPct val="100000"/>
+              </a:lnSpc>
+            </a:pPr>
             <a:endParaRPr b="0" lang="en-US" sz="1800" strike="noStrike" u="none">
               <a:solidFill>
                 <a:srgbClr val="ffffff"/>
@@ -6685,14 +7748,14 @@
       </p:sp>
       <p:sp>
         <p:nvSpPr>
-          <p:cNvPr id="80" name="Text 9"/>
+          <p:cNvPr id="93" name="Text 9"/>
           <p:cNvSpPr/>
           <p:nvPr/>
         </p:nvSpPr>
         <p:spPr>
           <a:xfrm>
             <a:off x="822960" y="2834640"/>
-            <a:ext cx="502560" cy="502560"/>
+            <a:ext cx="501480" cy="501480"/>
           </a:xfrm>
           <a:prstGeom prst="rect">
             <a:avLst/>
@@ -6746,14 +7809,14 @@
       </p:sp>
       <p:sp>
         <p:nvSpPr>
-          <p:cNvPr id="81" name="Text 10"/>
+          <p:cNvPr id="94" name="Text 10"/>
           <p:cNvSpPr/>
           <p:nvPr/>
         </p:nvSpPr>
         <p:spPr>
           <a:xfrm>
             <a:off x="804600" y="3474720"/>
-            <a:ext cx="3017160" cy="548280"/>
+            <a:ext cx="3016080" cy="547200"/>
           </a:xfrm>
           <a:prstGeom prst="rect">
             <a:avLst/>
@@ -6807,14 +7870,14 @@
       </p:sp>
       <p:sp>
         <p:nvSpPr>
-          <p:cNvPr id="82" name="Text 11"/>
+          <p:cNvPr id="95" name="Text 11"/>
           <p:cNvSpPr/>
           <p:nvPr/>
         </p:nvSpPr>
         <p:spPr>
           <a:xfrm>
             <a:off x="804600" y="4023360"/>
-            <a:ext cx="3017160" cy="776880"/>
+            <a:ext cx="3016080" cy="775800"/>
           </a:xfrm>
           <a:prstGeom prst="rect">
             <a:avLst/>
@@ -6868,14 +7931,14 @@
       </p:sp>
       <p:sp>
         <p:nvSpPr>
-          <p:cNvPr id="83" name="Shape 12"/>
+          <p:cNvPr id="96" name="Shape 12"/>
           <p:cNvSpPr/>
           <p:nvPr/>
         </p:nvSpPr>
         <p:spPr>
           <a:xfrm>
             <a:off x="4343400" y="2560320"/>
-            <a:ext cx="3520080" cy="2331360"/>
+            <a:ext cx="3519000" cy="2330280"/>
           </a:xfrm>
           <a:prstGeom prst="roundRect">
             <a:avLst>
@@ -6903,6 +7966,11 @@
             <a:noAutofit/>
           </a:bodyPr>
           <a:p>
+            <a:pPr>
+              <a:lnSpc>
+                <a:spcPct val="100000"/>
+              </a:lnSpc>
+            </a:pPr>
             <a:endParaRPr b="0" lang="en-US" sz="1800" strike="noStrike" u="none">
               <a:solidFill>
                 <a:srgbClr val="000000"/>
@@ -6916,14 +7984,14 @@
       </p:sp>
       <p:sp>
         <p:nvSpPr>
-          <p:cNvPr id="84" name="Shape 13"/>
+          <p:cNvPr id="97" name="Shape 13"/>
           <p:cNvSpPr/>
           <p:nvPr/>
         </p:nvSpPr>
         <p:spPr>
           <a:xfrm>
             <a:off x="4617720" y="2834640"/>
-            <a:ext cx="502560" cy="502560"/>
+            <a:ext cx="501480" cy="501480"/>
           </a:xfrm>
           <a:prstGeom prst="ellipse">
             <a:avLst/>
@@ -6946,6 +8014,11 @@
             <a:noAutofit/>
           </a:bodyPr>
           <a:p>
+            <a:pPr>
+              <a:lnSpc>
+                <a:spcPct val="100000"/>
+              </a:lnSpc>
+            </a:pPr>
             <a:endParaRPr b="0" lang="en-US" sz="1800" strike="noStrike" u="none">
               <a:solidFill>
                 <a:srgbClr val="ffffff"/>
@@ -6959,14 +8032,14 @@
       </p:sp>
       <p:sp>
         <p:nvSpPr>
-          <p:cNvPr id="85" name="Text 14"/>
+          <p:cNvPr id="98" name="Text 14"/>
           <p:cNvSpPr/>
           <p:nvPr/>
         </p:nvSpPr>
         <p:spPr>
           <a:xfrm>
             <a:off x="4617720" y="2834640"/>
-            <a:ext cx="502560" cy="502560"/>
+            <a:ext cx="501480" cy="501480"/>
           </a:xfrm>
           <a:prstGeom prst="rect">
             <a:avLst/>
@@ -7020,14 +8093,14 @@
       </p:sp>
       <p:sp>
         <p:nvSpPr>
-          <p:cNvPr id="86" name="Text 15"/>
+          <p:cNvPr id="99" name="Text 15"/>
           <p:cNvSpPr/>
           <p:nvPr/>
         </p:nvSpPr>
         <p:spPr>
           <a:xfrm>
             <a:off x="4599360" y="3474720"/>
-            <a:ext cx="3017160" cy="548280"/>
+            <a:ext cx="3016080" cy="547200"/>
           </a:xfrm>
           <a:prstGeom prst="rect">
             <a:avLst/>
@@ -7081,14 +8154,14 @@
       </p:sp>
       <p:sp>
         <p:nvSpPr>
-          <p:cNvPr id="87" name="Text 16"/>
+          <p:cNvPr id="100" name="Text 16"/>
           <p:cNvSpPr/>
           <p:nvPr/>
         </p:nvSpPr>
         <p:spPr>
           <a:xfrm>
             <a:off x="4599360" y="4023360"/>
-            <a:ext cx="3017160" cy="776880"/>
+            <a:ext cx="3016080" cy="775800"/>
           </a:xfrm>
           <a:prstGeom prst="rect">
             <a:avLst/>
@@ -7142,14 +8215,14 @@
       </p:sp>
       <p:sp>
         <p:nvSpPr>
-          <p:cNvPr id="88" name="Shape 17"/>
+          <p:cNvPr id="101" name="Shape 17"/>
           <p:cNvSpPr/>
           <p:nvPr/>
         </p:nvSpPr>
         <p:spPr>
           <a:xfrm>
             <a:off x="8138160" y="2560320"/>
-            <a:ext cx="3520080" cy="2331360"/>
+            <a:ext cx="3519000" cy="2330280"/>
           </a:xfrm>
           <a:prstGeom prst="roundRect">
             <a:avLst>
@@ -7177,6 +8250,11 @@
             <a:noAutofit/>
           </a:bodyPr>
           <a:p>
+            <a:pPr>
+              <a:lnSpc>
+                <a:spcPct val="100000"/>
+              </a:lnSpc>
+            </a:pPr>
             <a:endParaRPr b="0" lang="en-US" sz="1800" strike="noStrike" u="none">
               <a:solidFill>
                 <a:srgbClr val="000000"/>
@@ -7190,14 +8268,14 @@
       </p:sp>
       <p:sp>
         <p:nvSpPr>
-          <p:cNvPr id="89" name="Shape 18"/>
+          <p:cNvPr id="102" name="Shape 18"/>
           <p:cNvSpPr/>
           <p:nvPr/>
         </p:nvSpPr>
         <p:spPr>
           <a:xfrm>
             <a:off x="8412480" y="2834640"/>
-            <a:ext cx="502560" cy="502560"/>
+            <a:ext cx="501480" cy="501480"/>
           </a:xfrm>
           <a:prstGeom prst="ellipse">
             <a:avLst/>
@@ -7220,6 +8298,11 @@
             <a:noAutofit/>
           </a:bodyPr>
           <a:p>
+            <a:pPr>
+              <a:lnSpc>
+                <a:spcPct val="100000"/>
+              </a:lnSpc>
+            </a:pPr>
             <a:endParaRPr b="0" lang="en-US" sz="1800" strike="noStrike" u="none">
               <a:solidFill>
                 <a:srgbClr val="ffffff"/>
@@ -7233,14 +8316,14 @@
       </p:sp>
       <p:sp>
         <p:nvSpPr>
-          <p:cNvPr id="90" name="Text 19"/>
+          <p:cNvPr id="103" name="Text 19"/>
           <p:cNvSpPr/>
           <p:nvPr/>
         </p:nvSpPr>
         <p:spPr>
           <a:xfrm>
             <a:off x="8412480" y="2834640"/>
-            <a:ext cx="502560" cy="502560"/>
+            <a:ext cx="501480" cy="501480"/>
           </a:xfrm>
           <a:prstGeom prst="rect">
             <a:avLst/>
@@ -7294,14 +8377,14 @@
       </p:sp>
       <p:sp>
         <p:nvSpPr>
-          <p:cNvPr id="91" name="Text 20"/>
+          <p:cNvPr id="104" name="Text 20"/>
           <p:cNvSpPr/>
           <p:nvPr/>
         </p:nvSpPr>
         <p:spPr>
           <a:xfrm>
             <a:off x="8394120" y="3474720"/>
-            <a:ext cx="3017160" cy="548280"/>
+            <a:ext cx="3016080" cy="547200"/>
           </a:xfrm>
           <a:prstGeom prst="rect">
             <a:avLst/>
@@ -7355,14 +8438,14 @@
       </p:sp>
       <p:sp>
         <p:nvSpPr>
-          <p:cNvPr id="92" name="Text 21"/>
+          <p:cNvPr id="105" name="Text 21"/>
           <p:cNvSpPr/>
           <p:nvPr/>
         </p:nvSpPr>
         <p:spPr>
           <a:xfrm>
             <a:off x="8394120" y="4023360"/>
-            <a:ext cx="3017160" cy="776880"/>
+            <a:ext cx="3016080" cy="775800"/>
           </a:xfrm>
           <a:prstGeom prst="rect">
             <a:avLst/>
@@ -7416,14 +8499,14 @@
       </p:sp>
       <p:sp>
         <p:nvSpPr>
-          <p:cNvPr id="93" name="Shape 22"/>
+          <p:cNvPr id="106" name="Shape 22"/>
           <p:cNvSpPr/>
           <p:nvPr/>
         </p:nvSpPr>
         <p:spPr>
           <a:xfrm>
             <a:off x="548640" y="5120640"/>
-            <a:ext cx="11091240" cy="456840"/>
+            <a:ext cx="11090160" cy="455760"/>
           </a:xfrm>
           <a:prstGeom prst="rect">
             <a:avLst/>
@@ -7446,6 +8529,11 @@
             <a:noAutofit/>
           </a:bodyPr>
           <a:p>
+            <a:pPr>
+              <a:lnSpc>
+                <a:spcPct val="100000"/>
+              </a:lnSpc>
+            </a:pPr>
             <a:endParaRPr b="0" lang="en-US" sz="1800" strike="noStrike" u="none">
               <a:solidFill>
                 <a:srgbClr val="ffffff"/>
@@ -7459,14 +8547,14 @@
       </p:sp>
       <p:sp>
         <p:nvSpPr>
-          <p:cNvPr id="94" name="Text 23"/>
+          <p:cNvPr id="107" name="Text 23"/>
           <p:cNvSpPr/>
           <p:nvPr/>
         </p:nvSpPr>
         <p:spPr>
           <a:xfrm>
             <a:off x="731520" y="5120640"/>
-            <a:ext cx="10725480" cy="456840"/>
+            <a:ext cx="10724400" cy="455760"/>
           </a:xfrm>
           <a:prstGeom prst="rect">
             <a:avLst/>
@@ -7557,7 +8645,7 @@
       </p:grpSpPr>
       <p:sp>
         <p:nvSpPr>
-          <p:cNvPr id="95" name="Shape 0">
+          <p:cNvPr id="108" name="Shape 0">
             <a:hlinkClick r:id="rId1" action="ppaction://hlinksldjump"/>
           </p:cNvPr>
           <p:cNvSpPr/>
@@ -7566,7 +8654,7 @@
         <p:spPr>
           <a:xfrm>
             <a:off x="10314360" y="201240"/>
-            <a:ext cx="1599840" cy="365400"/>
+            <a:ext cx="1598760" cy="364320"/>
           </a:xfrm>
           <a:prstGeom prst="roundRect">
             <a:avLst>
@@ -7591,6 +8679,11 @@
             <a:noAutofit/>
           </a:bodyPr>
           <a:p>
+            <a:pPr>
+              <a:lnSpc>
+                <a:spcPct val="100000"/>
+              </a:lnSpc>
+            </a:pPr>
             <a:endParaRPr b="0" lang="en-US" sz="1800" strike="noStrike" u="none">
               <a:solidFill>
                 <a:srgbClr val="ffffff"/>
@@ -7604,14 +8697,14 @@
       </p:sp>
       <p:sp>
         <p:nvSpPr>
-          <p:cNvPr id="96" name="Text 1"/>
+          <p:cNvPr id="109" name="Text 1"/>
           <p:cNvSpPr/>
           <p:nvPr/>
         </p:nvSpPr>
         <p:spPr>
           <a:xfrm>
             <a:off x="10314360" y="201240"/>
-            <a:ext cx="1599840" cy="365400"/>
+            <a:ext cx="1598760" cy="364320"/>
           </a:xfrm>
           <a:prstGeom prst="rect">
             <a:avLst/>
@@ -7643,7 +8736,7 @@
             <a:r>
               <a:rPr b="1" lang="en-US" sz="1100" strike="noStrike" u="sng">
                 <a:solidFill>
-                  <a:srgbClr val="ffffff"/>
+                  <a:srgbClr val="f2f2f2"/>
                 </a:solidFill>
                 <a:effectLst/>
                 <a:uFillTx/>
@@ -7666,14 +8759,14 @@
       </p:sp>
       <p:sp>
         <p:nvSpPr>
-          <p:cNvPr id="97" name="Text 2"/>
+          <p:cNvPr id="110" name="Text 2"/>
           <p:cNvSpPr/>
           <p:nvPr/>
         </p:nvSpPr>
         <p:spPr>
           <a:xfrm>
             <a:off x="11365920" y="6492240"/>
-            <a:ext cx="639720" cy="273960"/>
+            <a:ext cx="638640" cy="272880"/>
           </a:xfrm>
           <a:prstGeom prst="rect">
             <a:avLst/>
@@ -7727,14 +8820,14 @@
       </p:sp>
       <p:sp>
         <p:nvSpPr>
-          <p:cNvPr id="98" name="Text 3"/>
+          <p:cNvPr id="111" name="Text 3"/>
           <p:cNvSpPr/>
           <p:nvPr/>
         </p:nvSpPr>
         <p:spPr>
           <a:xfrm>
             <a:off x="548640" y="320040"/>
-            <a:ext cx="7314840" cy="273960"/>
+            <a:ext cx="7313760" cy="272880"/>
           </a:xfrm>
           <a:prstGeom prst="rect">
             <a:avLst/>
@@ -7788,14 +8881,14 @@
       </p:sp>
       <p:sp>
         <p:nvSpPr>
-          <p:cNvPr id="99" name="Text 4"/>
+          <p:cNvPr id="112" name="Text 4"/>
           <p:cNvSpPr/>
           <p:nvPr/>
         </p:nvSpPr>
         <p:spPr>
           <a:xfrm>
             <a:off x="548640" y="567000"/>
-            <a:ext cx="8777880" cy="685440"/>
+            <a:ext cx="8776800" cy="684360"/>
           </a:xfrm>
           <a:prstGeom prst="rect">
             <a:avLst/>
@@ -7849,14 +8942,14 @@
       </p:sp>
       <p:sp>
         <p:nvSpPr>
-          <p:cNvPr id="100" name="Text 5"/>
+          <p:cNvPr id="113" name="Text 5"/>
           <p:cNvSpPr/>
           <p:nvPr/>
         </p:nvSpPr>
         <p:spPr>
           <a:xfrm>
             <a:off x="548640" y="1417320"/>
-            <a:ext cx="11063880" cy="502560"/>
+            <a:ext cx="11062800" cy="501480"/>
           </a:xfrm>
           <a:prstGeom prst="rect">
             <a:avLst/>
@@ -7910,14 +9003,14 @@
       </p:sp>
       <p:sp>
         <p:nvSpPr>
-          <p:cNvPr id="101" name="Text 6"/>
+          <p:cNvPr id="114" name="Text 6"/>
           <p:cNvSpPr/>
           <p:nvPr/>
         </p:nvSpPr>
         <p:spPr>
           <a:xfrm>
             <a:off x="548640" y="2103120"/>
-            <a:ext cx="7314840" cy="273960"/>
+            <a:ext cx="7313760" cy="272880"/>
           </a:xfrm>
           <a:prstGeom prst="rect">
             <a:avLst/>
@@ -7971,14 +9064,14 @@
       </p:sp>
       <p:sp>
         <p:nvSpPr>
-          <p:cNvPr id="102" name="Shape 7"/>
+          <p:cNvPr id="115" name="Shape 7"/>
           <p:cNvSpPr/>
           <p:nvPr/>
         </p:nvSpPr>
         <p:spPr>
           <a:xfrm>
             <a:off x="548640" y="2423160"/>
-            <a:ext cx="2066040" cy="959760"/>
+            <a:ext cx="2064960" cy="958680"/>
           </a:xfrm>
           <a:prstGeom prst="roundRect">
             <a:avLst>
@@ -8003,6 +9096,11 @@
             <a:noAutofit/>
           </a:bodyPr>
           <a:p>
+            <a:pPr>
+              <a:lnSpc>
+                <a:spcPct val="100000"/>
+              </a:lnSpc>
+            </a:pPr>
             <a:endParaRPr b="0" lang="en-US" sz="1800" strike="noStrike" u="none">
               <a:solidFill>
                 <a:srgbClr val="ffffff"/>
@@ -8016,14 +9114,14 @@
       </p:sp>
       <p:sp>
         <p:nvSpPr>
-          <p:cNvPr id="103" name="Text 8"/>
+          <p:cNvPr id="116" name="Text 8"/>
           <p:cNvSpPr/>
           <p:nvPr/>
         </p:nvSpPr>
         <p:spPr>
           <a:xfrm>
             <a:off x="548640" y="2423160"/>
-            <a:ext cx="2066040" cy="959760"/>
+            <a:ext cx="2064960" cy="958680"/>
           </a:xfrm>
           <a:prstGeom prst="rect">
             <a:avLst/>
@@ -8073,37 +9171,6 @@
               <a:latin typeface="Arial"/>
             </a:endParaRPr>
           </a:p>
-        </p:txBody>
-      </p:sp>
-      <p:sp>
-        <p:nvSpPr>
-          <p:cNvPr id="104" name="Text 9"/>
-          <p:cNvSpPr/>
-          <p:nvPr/>
-        </p:nvSpPr>
-        <p:spPr>
-          <a:xfrm>
-            <a:off x="2597040" y="2423160"/>
-            <a:ext cx="200880" cy="959760"/>
-          </a:xfrm>
-          <a:prstGeom prst="rect">
-            <a:avLst/>
-          </a:prstGeom>
-          <a:noFill/>
-          <a:ln w="0">
-            <a:noFill/>
-          </a:ln>
-        </p:spPr>
-        <p:style>
-          <a:lnRef idx="0"/>
-          <a:fillRef idx="0"/>
-          <a:effectRef idx="0"/>
-          <a:fontRef idx="minor"/>
-        </p:style>
-        <p:txBody>
-          <a:bodyPr lIns="0" rIns="0" tIns="0" bIns="0" anchor="ctr">
-            <a:noAutofit/>
-          </a:bodyPr>
           <a:p>
             <a:pPr algn="ctr" defTabSz="914400">
               <a:lnSpc>
@@ -8114,15 +9181,76 @@
               </a:tabLst>
             </a:pPr>
             <a:r>
-              <a:rPr b="1" lang="en-US" sz="1600" strike="noStrike" u="none">
-                <a:solidFill>
-                  <a:srgbClr val="5a6b87"/>
+              <a:rPr b="1" lang="en-US" sz="1000" strike="noStrike" u="none">
+                <a:solidFill>
+                  <a:srgbClr val="ffffff"/>
                 </a:solidFill>
                 <a:effectLst/>
                 <a:uFillTx/>
                 <a:latin typeface="Calibri"/>
                 <a:ea typeface="Calibri"/>
               </a:rPr>
+              <a:t>(77 00 00 00 - Auto/Vehicles)</a:t>
+            </a:r>
+            <a:endParaRPr b="0" lang="en-US" sz="1000" strike="noStrike" u="none">
+              <a:solidFill>
+                <a:srgbClr val="000000"/>
+              </a:solidFill>
+              <a:effectLst/>
+              <a:uFillTx/>
+              <a:latin typeface="Arial"/>
+            </a:endParaRPr>
+          </a:p>
+        </p:txBody>
+      </p:sp>
+      <p:sp>
+        <p:nvSpPr>
+          <p:cNvPr id="117" name="Text 9"/>
+          <p:cNvSpPr/>
+          <p:nvPr/>
+        </p:nvSpPr>
+        <p:spPr>
+          <a:xfrm>
+            <a:off x="2597040" y="2423160"/>
+            <a:ext cx="199800" cy="958680"/>
+          </a:xfrm>
+          <a:prstGeom prst="rect">
+            <a:avLst/>
+          </a:prstGeom>
+          <a:noFill/>
+          <a:ln w="0">
+            <a:noFill/>
+          </a:ln>
+        </p:spPr>
+        <p:style>
+          <a:lnRef idx="0"/>
+          <a:fillRef idx="0"/>
+          <a:effectRef idx="0"/>
+          <a:fontRef idx="minor"/>
+        </p:style>
+        <p:txBody>
+          <a:bodyPr lIns="0" rIns="0" tIns="0" bIns="0" anchor="ctr">
+            <a:noAutofit/>
+          </a:bodyPr>
+          <a:p>
+            <a:pPr algn="ctr" defTabSz="914400">
+              <a:lnSpc>
+                <a:spcPct val="100000"/>
+              </a:lnSpc>
+              <a:tabLst>
+                <a:tab algn="l" pos="0"/>
+              </a:tabLst>
+            </a:pPr>
+            <a:r>
+              <a:rPr b="1" lang="en-US" sz="1600" strike="noStrike" u="none">
+                <a:solidFill>
+                  <a:srgbClr val="5a6b87"/>
+                </a:solidFill>
+                <a:effectLst/>
+                <a:uFillTx/>
+                <a:latin typeface="Calibri"/>
+                <a:ea typeface="Calibri"/>
+              </a:rPr>
               <a:t>→</a:t>
             </a:r>
             <a:endParaRPr b="0" lang="en-US" sz="1600" strike="noStrike" u="none">
@@ -8138,14 +9266,14 @@
       </p:sp>
       <p:sp>
         <p:nvSpPr>
-          <p:cNvPr id="105" name="Shape 10"/>
+          <p:cNvPr id="118" name="Shape 10"/>
           <p:cNvSpPr/>
           <p:nvPr/>
         </p:nvSpPr>
         <p:spPr>
           <a:xfrm>
             <a:off x="2779920" y="2423160"/>
-            <a:ext cx="2066040" cy="959760"/>
+            <a:ext cx="2064960" cy="958680"/>
           </a:xfrm>
           <a:prstGeom prst="roundRect">
             <a:avLst>
@@ -8170,6 +9298,11 @@
             <a:noAutofit/>
           </a:bodyPr>
           <a:p>
+            <a:pPr>
+              <a:lnSpc>
+                <a:spcPct val="100000"/>
+              </a:lnSpc>
+            </a:pPr>
             <a:endParaRPr b="0" lang="en-US" sz="1800" strike="noStrike" u="none">
               <a:solidFill>
                 <a:srgbClr val="ffffff"/>
@@ -8183,14 +9316,14 @@
       </p:sp>
       <p:sp>
         <p:nvSpPr>
-          <p:cNvPr id="106" name="Text 11"/>
+          <p:cNvPr id="119" name="Text 11"/>
           <p:cNvSpPr/>
           <p:nvPr/>
         </p:nvSpPr>
         <p:spPr>
           <a:xfrm>
             <a:off x="2779920" y="2423160"/>
-            <a:ext cx="2066040" cy="959760"/>
+            <a:ext cx="2064960" cy="958680"/>
           </a:xfrm>
           <a:prstGeom prst="rect">
             <a:avLst/>
@@ -8240,37 +9373,6 @@
               <a:latin typeface="Arial"/>
             </a:endParaRPr>
           </a:p>
-        </p:txBody>
-      </p:sp>
-      <p:sp>
-        <p:nvSpPr>
-          <p:cNvPr id="107" name="Text 12"/>
-          <p:cNvSpPr/>
-          <p:nvPr/>
-        </p:nvSpPr>
-        <p:spPr>
-          <a:xfrm>
-            <a:off x="4827960" y="2423160"/>
-            <a:ext cx="200880" cy="959760"/>
-          </a:xfrm>
-          <a:prstGeom prst="rect">
-            <a:avLst/>
-          </a:prstGeom>
-          <a:noFill/>
-          <a:ln w="0">
-            <a:noFill/>
-          </a:ln>
-        </p:spPr>
-        <p:style>
-          <a:lnRef idx="0"/>
-          <a:fillRef idx="0"/>
-          <a:effectRef idx="0"/>
-          <a:fontRef idx="minor"/>
-        </p:style>
-        <p:txBody>
-          <a:bodyPr lIns="0" rIns="0" tIns="0" bIns="0" anchor="ctr">
-            <a:noAutofit/>
-          </a:bodyPr>
           <a:p>
             <a:pPr algn="ctr" defTabSz="914400">
               <a:lnSpc>
@@ -8281,15 +9383,76 @@
               </a:tabLst>
             </a:pPr>
             <a:r>
-              <a:rPr b="1" lang="en-US" sz="1600" strike="noStrike" u="none">
-                <a:solidFill>
-                  <a:srgbClr val="5a6b87"/>
+              <a:rPr b="1" lang="en-US" sz="1000" strike="noStrike" u="none">
+                <a:solidFill>
+                  <a:srgbClr val="ffffff"/>
                 </a:solidFill>
                 <a:effectLst/>
                 <a:uFillTx/>
                 <a:latin typeface="Calibri"/>
                 <a:ea typeface="Calibri"/>
               </a:rPr>
+              <a:t>(77 01 00 00 – Auto Accessories)</a:t>
+            </a:r>
+            <a:endParaRPr b="0" lang="en-US" sz="1000" strike="noStrike" u="none">
+              <a:solidFill>
+                <a:srgbClr val="000000"/>
+              </a:solidFill>
+              <a:effectLst/>
+              <a:uFillTx/>
+              <a:latin typeface="Arial"/>
+            </a:endParaRPr>
+          </a:p>
+        </p:txBody>
+      </p:sp>
+      <p:sp>
+        <p:nvSpPr>
+          <p:cNvPr id="120" name="Text 12"/>
+          <p:cNvSpPr/>
+          <p:nvPr/>
+        </p:nvSpPr>
+        <p:spPr>
+          <a:xfrm>
+            <a:off x="4827960" y="2423160"/>
+            <a:ext cx="199800" cy="958680"/>
+          </a:xfrm>
+          <a:prstGeom prst="rect">
+            <a:avLst/>
+          </a:prstGeom>
+          <a:noFill/>
+          <a:ln w="0">
+            <a:noFill/>
+          </a:ln>
+        </p:spPr>
+        <p:style>
+          <a:lnRef idx="0"/>
+          <a:fillRef idx="0"/>
+          <a:effectRef idx="0"/>
+          <a:fontRef idx="minor"/>
+        </p:style>
+        <p:txBody>
+          <a:bodyPr lIns="0" rIns="0" tIns="0" bIns="0" anchor="ctr">
+            <a:noAutofit/>
+          </a:bodyPr>
+          <a:p>
+            <a:pPr algn="ctr" defTabSz="914400">
+              <a:lnSpc>
+                <a:spcPct val="100000"/>
+              </a:lnSpc>
+              <a:tabLst>
+                <a:tab algn="l" pos="0"/>
+              </a:tabLst>
+            </a:pPr>
+            <a:r>
+              <a:rPr b="1" lang="en-US" sz="1600" strike="noStrike" u="none">
+                <a:solidFill>
+                  <a:srgbClr val="5a6b87"/>
+                </a:solidFill>
+                <a:effectLst/>
+                <a:uFillTx/>
+                <a:latin typeface="Calibri"/>
+                <a:ea typeface="Calibri"/>
+              </a:rPr>
               <a:t>→</a:t>
             </a:r>
             <a:endParaRPr b="0" lang="en-US" sz="1600" strike="noStrike" u="none">
@@ -8305,14 +9468,14 @@
       </p:sp>
       <p:sp>
         <p:nvSpPr>
-          <p:cNvPr id="108" name="Shape 13"/>
+          <p:cNvPr id="121" name="Shape 13"/>
           <p:cNvSpPr/>
           <p:nvPr/>
         </p:nvSpPr>
         <p:spPr>
           <a:xfrm>
             <a:off x="5010840" y="2423160"/>
-            <a:ext cx="2066040" cy="959760"/>
+            <a:ext cx="2064960" cy="958680"/>
           </a:xfrm>
           <a:prstGeom prst="roundRect">
             <a:avLst>
@@ -8337,6 +9500,11 @@
             <a:noAutofit/>
           </a:bodyPr>
           <a:p>
+            <a:pPr>
+              <a:lnSpc>
+                <a:spcPct val="100000"/>
+              </a:lnSpc>
+            </a:pPr>
             <a:endParaRPr b="0" lang="en-US" sz="1800" strike="noStrike" u="none">
               <a:solidFill>
                 <a:srgbClr val="ffffff"/>
@@ -8350,14 +9518,14 @@
       </p:sp>
       <p:sp>
         <p:nvSpPr>
-          <p:cNvPr id="109" name="Text 14"/>
+          <p:cNvPr id="122" name="Text 14"/>
           <p:cNvSpPr/>
           <p:nvPr/>
         </p:nvSpPr>
         <p:spPr>
           <a:xfrm>
             <a:off x="5010840" y="2423160"/>
-            <a:ext cx="2066040" cy="959760"/>
+            <a:ext cx="2064960" cy="958680"/>
           </a:xfrm>
           <a:prstGeom prst="rect">
             <a:avLst/>
@@ -8407,37 +9575,6 @@
               <a:latin typeface="Arial"/>
             </a:endParaRPr>
           </a:p>
-        </p:txBody>
-      </p:sp>
-      <p:sp>
-        <p:nvSpPr>
-          <p:cNvPr id="110" name="Text 15"/>
-          <p:cNvSpPr/>
-          <p:nvPr/>
-        </p:nvSpPr>
-        <p:spPr>
-          <a:xfrm>
-            <a:off x="7059240" y="2423160"/>
-            <a:ext cx="200880" cy="959760"/>
-          </a:xfrm>
-          <a:prstGeom prst="rect">
-            <a:avLst/>
-          </a:prstGeom>
-          <a:noFill/>
-          <a:ln w="0">
-            <a:noFill/>
-          </a:ln>
-        </p:spPr>
-        <p:style>
-          <a:lnRef idx="0"/>
-          <a:fillRef idx="0"/>
-          <a:effectRef idx="0"/>
-          <a:fontRef idx="minor"/>
-        </p:style>
-        <p:txBody>
-          <a:bodyPr lIns="0" rIns="0" tIns="0" bIns="0" anchor="ctr">
-            <a:noAutofit/>
-          </a:bodyPr>
           <a:p>
             <a:pPr algn="ctr" defTabSz="914400">
               <a:lnSpc>
@@ -8448,15 +9585,76 @@
               </a:tabLst>
             </a:pPr>
             <a:r>
-              <a:rPr b="1" lang="en-US" sz="1600" strike="noStrike" u="none">
-                <a:solidFill>
-                  <a:srgbClr val="5a6b87"/>
+              <a:rPr b="1" lang="en-US" sz="1000" strike="noStrike" u="none">
+                <a:solidFill>
+                  <a:srgbClr val="ffffff"/>
                 </a:solidFill>
                 <a:effectLst/>
                 <a:uFillTx/>
                 <a:latin typeface="Calibri"/>
                 <a:ea typeface="Calibri"/>
               </a:rPr>
+              <a:t>(77 01 53 00 – Auto Brakes)</a:t>
+            </a:r>
+            <a:endParaRPr b="0" lang="en-US" sz="1000" strike="noStrike" u="none">
+              <a:solidFill>
+                <a:srgbClr val="000000"/>
+              </a:solidFill>
+              <a:effectLst/>
+              <a:uFillTx/>
+              <a:latin typeface="Arial"/>
+            </a:endParaRPr>
+          </a:p>
+        </p:txBody>
+      </p:sp>
+      <p:sp>
+        <p:nvSpPr>
+          <p:cNvPr id="123" name="Text 15"/>
+          <p:cNvSpPr/>
+          <p:nvPr/>
+        </p:nvSpPr>
+        <p:spPr>
+          <a:xfrm>
+            <a:off x="7059240" y="2423160"/>
+            <a:ext cx="199800" cy="958680"/>
+          </a:xfrm>
+          <a:prstGeom prst="rect">
+            <a:avLst/>
+          </a:prstGeom>
+          <a:noFill/>
+          <a:ln w="0">
+            <a:noFill/>
+          </a:ln>
+        </p:spPr>
+        <p:style>
+          <a:lnRef idx="0"/>
+          <a:fillRef idx="0"/>
+          <a:effectRef idx="0"/>
+          <a:fontRef idx="minor"/>
+        </p:style>
+        <p:txBody>
+          <a:bodyPr lIns="0" rIns="0" tIns="0" bIns="0" anchor="ctr">
+            <a:noAutofit/>
+          </a:bodyPr>
+          <a:p>
+            <a:pPr algn="ctr" defTabSz="914400">
+              <a:lnSpc>
+                <a:spcPct val="100000"/>
+              </a:lnSpc>
+              <a:tabLst>
+                <a:tab algn="l" pos="0"/>
+              </a:tabLst>
+            </a:pPr>
+            <a:r>
+              <a:rPr b="1" lang="en-US" sz="1600" strike="noStrike" u="none">
+                <a:solidFill>
+                  <a:srgbClr val="5a6b87"/>
+                </a:solidFill>
+                <a:effectLst/>
+                <a:uFillTx/>
+                <a:latin typeface="Calibri"/>
+                <a:ea typeface="Calibri"/>
+              </a:rPr>
               <a:t>→</a:t>
             </a:r>
             <a:endParaRPr b="0" lang="en-US" sz="1600" strike="noStrike" u="none">
@@ -8472,14 +9670,14 @@
       </p:sp>
       <p:sp>
         <p:nvSpPr>
-          <p:cNvPr id="111" name="Shape 16"/>
+          <p:cNvPr id="124" name="Shape 16"/>
           <p:cNvSpPr/>
           <p:nvPr/>
         </p:nvSpPr>
         <p:spPr>
           <a:xfrm>
             <a:off x="7242120" y="2423160"/>
-            <a:ext cx="2066040" cy="959760"/>
+            <a:ext cx="2064960" cy="958680"/>
           </a:xfrm>
           <a:prstGeom prst="roundRect">
             <a:avLst>
@@ -8504,6 +9702,11 @@
             <a:noAutofit/>
           </a:bodyPr>
           <a:p>
+            <a:pPr>
+              <a:lnSpc>
+                <a:spcPct val="100000"/>
+              </a:lnSpc>
+            </a:pPr>
             <a:endParaRPr b="0" lang="en-US" sz="1800" strike="noStrike" u="none">
               <a:solidFill>
                 <a:srgbClr val="ffffff"/>
@@ -8517,14 +9720,14 @@
       </p:sp>
       <p:sp>
         <p:nvSpPr>
-          <p:cNvPr id="112" name="Text 17"/>
+          <p:cNvPr id="125" name="Text 17"/>
           <p:cNvSpPr/>
           <p:nvPr/>
         </p:nvSpPr>
         <p:spPr>
           <a:xfrm>
             <a:off x="7242120" y="2423160"/>
-            <a:ext cx="2066040" cy="959760"/>
+            <a:ext cx="2064960" cy="958680"/>
           </a:xfrm>
           <a:prstGeom prst="rect">
             <a:avLst/>
@@ -8574,37 +9777,6 @@
               <a:latin typeface="Arial"/>
             </a:endParaRPr>
           </a:p>
-        </p:txBody>
-      </p:sp>
-      <p:sp>
-        <p:nvSpPr>
-          <p:cNvPr id="113" name="Text 18"/>
-          <p:cNvSpPr/>
-          <p:nvPr/>
-        </p:nvSpPr>
-        <p:spPr>
-          <a:xfrm>
-            <a:off x="9290160" y="2423160"/>
-            <a:ext cx="200880" cy="959760"/>
-          </a:xfrm>
-          <a:prstGeom prst="rect">
-            <a:avLst/>
-          </a:prstGeom>
-          <a:noFill/>
-          <a:ln w="0">
-            <a:noFill/>
-          </a:ln>
-        </p:spPr>
-        <p:style>
-          <a:lnRef idx="0"/>
-          <a:fillRef idx="0"/>
-          <a:effectRef idx="0"/>
-          <a:fontRef idx="minor"/>
-        </p:style>
-        <p:txBody>
-          <a:bodyPr lIns="0" rIns="0" tIns="0" bIns="0" anchor="ctr">
-            <a:noAutofit/>
-          </a:bodyPr>
           <a:p>
             <a:pPr algn="ctr" defTabSz="914400">
               <a:lnSpc>
@@ -8615,15 +9787,76 @@
               </a:tabLst>
             </a:pPr>
             <a:r>
-              <a:rPr b="1" lang="en-US" sz="1600" strike="noStrike" u="none">
-                <a:solidFill>
-                  <a:srgbClr val="5a6b87"/>
+              <a:rPr b="1" lang="en-US" sz="1000" strike="noStrike" u="none">
+                <a:solidFill>
+                  <a:srgbClr val="ffffff"/>
                 </a:solidFill>
                 <a:effectLst/>
                 <a:uFillTx/>
                 <a:latin typeface="Calibri"/>
                 <a:ea typeface="Calibri"/>
               </a:rPr>
+              <a:t>(1000 6384 – Break pads)</a:t>
+            </a:r>
+            <a:endParaRPr b="0" lang="en-US" sz="1000" strike="noStrike" u="none">
+              <a:solidFill>
+                <a:srgbClr val="000000"/>
+              </a:solidFill>
+              <a:effectLst/>
+              <a:uFillTx/>
+              <a:latin typeface="Arial"/>
+            </a:endParaRPr>
+          </a:p>
+        </p:txBody>
+      </p:sp>
+      <p:sp>
+        <p:nvSpPr>
+          <p:cNvPr id="126" name="Text 18"/>
+          <p:cNvSpPr/>
+          <p:nvPr/>
+        </p:nvSpPr>
+        <p:spPr>
+          <a:xfrm>
+            <a:off x="9290160" y="2423160"/>
+            <a:ext cx="199800" cy="958680"/>
+          </a:xfrm>
+          <a:prstGeom prst="rect">
+            <a:avLst/>
+          </a:prstGeom>
+          <a:noFill/>
+          <a:ln w="0">
+            <a:noFill/>
+          </a:ln>
+        </p:spPr>
+        <p:style>
+          <a:lnRef idx="0"/>
+          <a:fillRef idx="0"/>
+          <a:effectRef idx="0"/>
+          <a:fontRef idx="minor"/>
+        </p:style>
+        <p:txBody>
+          <a:bodyPr lIns="0" rIns="0" tIns="0" bIns="0" anchor="ctr">
+            <a:noAutofit/>
+          </a:bodyPr>
+          <a:p>
+            <a:pPr algn="ctr" defTabSz="914400">
+              <a:lnSpc>
+                <a:spcPct val="100000"/>
+              </a:lnSpc>
+              <a:tabLst>
+                <a:tab algn="l" pos="0"/>
+              </a:tabLst>
+            </a:pPr>
+            <a:r>
+              <a:rPr b="1" lang="en-US" sz="1600" strike="noStrike" u="none">
+                <a:solidFill>
+                  <a:srgbClr val="5a6b87"/>
+                </a:solidFill>
+                <a:effectLst/>
+                <a:uFillTx/>
+                <a:latin typeface="Calibri"/>
+                <a:ea typeface="Calibri"/>
+              </a:rPr>
               <a:t>→</a:t>
             </a:r>
             <a:endParaRPr b="0" lang="en-US" sz="1600" strike="noStrike" u="none">
@@ -8639,14 +9872,14 @@
       </p:sp>
       <p:sp>
         <p:nvSpPr>
-          <p:cNvPr id="114" name="Shape 19"/>
+          <p:cNvPr id="127" name="Shape 19"/>
           <p:cNvSpPr/>
           <p:nvPr/>
         </p:nvSpPr>
         <p:spPr>
           <a:xfrm>
             <a:off x="9473040" y="2423160"/>
-            <a:ext cx="2066040" cy="959760"/>
+            <a:ext cx="2064960" cy="958680"/>
           </a:xfrm>
           <a:prstGeom prst="roundRect">
             <a:avLst>
@@ -8671,6 +9904,11 @@
             <a:noAutofit/>
           </a:bodyPr>
           <a:p>
+            <a:pPr>
+              <a:lnSpc>
+                <a:spcPct val="100000"/>
+              </a:lnSpc>
+            </a:pPr>
             <a:endParaRPr b="0" lang="en-US" sz="1800" strike="noStrike" u="none">
               <a:solidFill>
                 <a:srgbClr val="000000"/>
@@ -8684,14 +9922,14 @@
       </p:sp>
       <p:sp>
         <p:nvSpPr>
-          <p:cNvPr id="115" name="Text 20"/>
+          <p:cNvPr id="128" name="Text 20"/>
           <p:cNvSpPr/>
           <p:nvPr/>
         </p:nvSpPr>
         <p:spPr>
           <a:xfrm>
             <a:off x="9473040" y="2423160"/>
-            <a:ext cx="2066040" cy="959760"/>
+            <a:ext cx="2064960" cy="958680"/>
           </a:xfrm>
           <a:prstGeom prst="rect">
             <a:avLst/>
@@ -8745,14 +9983,14 @@
       </p:sp>
       <p:sp>
         <p:nvSpPr>
-          <p:cNvPr id="116" name="Text 21"/>
+          <p:cNvPr id="129" name="Text 21"/>
           <p:cNvSpPr/>
           <p:nvPr/>
         </p:nvSpPr>
         <p:spPr>
           <a:xfrm>
             <a:off x="548640" y="3438000"/>
-            <a:ext cx="10990800" cy="273960"/>
+            <a:ext cx="10989720" cy="272880"/>
           </a:xfrm>
           <a:prstGeom prst="rect">
             <a:avLst/>
@@ -8791,7 +10029,91 @@
                 <a:latin typeface="Calibri"/>
                 <a:ea typeface="Calibri"/>
               </a:rPr>
-              <a:t>Broadest category grouping                                                                                                        Sellable unit</a:t>
+              <a:t>Broadest category grouping                                                                                                        </a:t>
+            </a:r>
+            <a:r>
+              <a:rPr b="0" i="1" lang="en-US" sz="950" strike="noStrike" u="none">
+                <a:solidFill>
+                  <a:srgbClr val="5a6b87"/>
+                </a:solidFill>
+                <a:effectLst/>
+                <a:uFillTx/>
+                <a:latin typeface="Calibri"/>
+                <a:ea typeface="Calibri"/>
+              </a:rPr>
+              <a:t>	</a:t>
+            </a:r>
+            <a:r>
+              <a:rPr b="0" i="1" lang="en-US" sz="950" strike="noStrike" u="none">
+                <a:solidFill>
+                  <a:srgbClr val="5a6b87"/>
+                </a:solidFill>
+                <a:effectLst/>
+                <a:uFillTx/>
+                <a:latin typeface="Calibri"/>
+                <a:ea typeface="Calibri"/>
+              </a:rPr>
+              <a:t>	</a:t>
+            </a:r>
+            <a:r>
+              <a:rPr b="0" i="1" lang="en-US" sz="950" strike="noStrike" u="none">
+                <a:solidFill>
+                  <a:srgbClr val="5a6b87"/>
+                </a:solidFill>
+                <a:effectLst/>
+                <a:uFillTx/>
+                <a:latin typeface="Calibri"/>
+                <a:ea typeface="Calibri"/>
+              </a:rPr>
+              <a:t>	</a:t>
+            </a:r>
+            <a:r>
+              <a:rPr b="0" i="1" lang="en-US" sz="950" strike="noStrike" u="none">
+                <a:solidFill>
+                  <a:srgbClr val="5a6b87"/>
+                </a:solidFill>
+                <a:effectLst/>
+                <a:uFillTx/>
+                <a:latin typeface="Calibri"/>
+                <a:ea typeface="Calibri"/>
+              </a:rPr>
+              <a:t>	</a:t>
+            </a:r>
+            <a:r>
+              <a:rPr b="0" i="1" lang="en-US" sz="950" strike="noStrike" u="none">
+                <a:solidFill>
+                  <a:srgbClr val="5a6b87"/>
+                </a:solidFill>
+                <a:effectLst/>
+                <a:uFillTx/>
+                <a:latin typeface="Calibri"/>
+                <a:ea typeface="Calibri"/>
+              </a:rPr>
+              <a:t>	</a:t>
+            </a:r>
+            <a:r>
+              <a:rPr b="0" i="1" lang="en-US" sz="950" strike="noStrike" u="none">
+                <a:solidFill>
+                  <a:srgbClr val="5a6b87"/>
+                </a:solidFill>
+                <a:effectLst/>
+                <a:uFillTx/>
+                <a:latin typeface="Calibri"/>
+                <a:ea typeface="Calibri"/>
+              </a:rPr>
+              <a:t>	</a:t>
+            </a:r>
+            <a:r>
+              <a:rPr b="0" i="1" lang="en-US" sz="950" strike="noStrike" u="none">
+                <a:solidFill>
+                  <a:srgbClr val="5a6b87"/>
+                </a:solidFill>
+                <a:effectLst/>
+                <a:uFillTx/>
+                <a:latin typeface="Calibri"/>
+                <a:ea typeface="Calibri"/>
+              </a:rPr>
+              <a:t>Sellable unit</a:t>
             </a:r>
             <a:endParaRPr b="0" lang="en-US" sz="950" strike="noStrike" u="none">
               <a:solidFill>
@@ -8806,14 +10128,14 @@
       </p:sp>
       <p:sp>
         <p:nvSpPr>
-          <p:cNvPr id="117" name="Shape 22"/>
+          <p:cNvPr id="130" name="Shape 22"/>
           <p:cNvSpPr/>
           <p:nvPr/>
         </p:nvSpPr>
         <p:spPr>
           <a:xfrm>
             <a:off x="548640" y="3977640"/>
-            <a:ext cx="5486040" cy="1416960"/>
+            <a:ext cx="5484960" cy="1415880"/>
           </a:xfrm>
           <a:prstGeom prst="roundRect">
             <a:avLst>
@@ -8841,6 +10163,11 @@
             <a:noAutofit/>
           </a:bodyPr>
           <a:p>
+            <a:pPr>
+              <a:lnSpc>
+                <a:spcPct val="100000"/>
+              </a:lnSpc>
+            </a:pPr>
             <a:endParaRPr b="0" lang="en-US" sz="1800" strike="noStrike" u="none">
               <a:solidFill>
                 <a:srgbClr val="000000"/>
@@ -8854,14 +10181,14 @@
       </p:sp>
       <p:sp>
         <p:nvSpPr>
-          <p:cNvPr id="118" name="Text 23"/>
+          <p:cNvPr id="131" name="Text 23"/>
           <p:cNvSpPr/>
           <p:nvPr/>
         </p:nvSpPr>
         <p:spPr>
           <a:xfrm>
             <a:off x="777240" y="4114800"/>
-            <a:ext cx="5028840" cy="273960"/>
+            <a:ext cx="5027760" cy="272880"/>
           </a:xfrm>
           <a:prstGeom prst="rect">
             <a:avLst/>
@@ -8915,14 +10242,14 @@
       </p:sp>
       <p:sp>
         <p:nvSpPr>
-          <p:cNvPr id="119" name="Text 24"/>
+          <p:cNvPr id="132" name="Text 24"/>
           <p:cNvSpPr/>
           <p:nvPr/>
         </p:nvSpPr>
         <p:spPr>
           <a:xfrm>
             <a:off x="777240" y="4389120"/>
-            <a:ext cx="5028840" cy="914040"/>
+            <a:ext cx="5027760" cy="912960"/>
           </a:xfrm>
           <a:prstGeom prst="rect">
             <a:avLst/>
@@ -8961,7 +10288,7 @@
                 <a:latin typeface="Calibri"/>
                 <a:ea typeface="Calibri"/>
               </a:rPr>
-              <a:t>Where clients standardize on NAICS / UNSPSC-style classification instead of GPC, the same rollup logic applies — only the code set and level names change.</a:t>
+              <a:t>Where clients standardize on UNSPSC / Licensed PCdb-style classification instead of GPC, the same rollup logic applies — only the code set and level names change.</a:t>
             </a:r>
             <a:endParaRPr b="0" lang="en-US" sz="1150" strike="noStrike" u="none">
               <a:solidFill>
@@ -8976,14 +10303,14 @@
       </p:sp>
       <p:sp>
         <p:nvSpPr>
-          <p:cNvPr id="120" name="Shape 25"/>
+          <p:cNvPr id="133" name="Shape 25"/>
           <p:cNvSpPr/>
           <p:nvPr/>
         </p:nvSpPr>
         <p:spPr>
           <a:xfrm>
             <a:off x="6263640" y="3977640"/>
-            <a:ext cx="5394600" cy="1416960"/>
+            <a:ext cx="5393520" cy="1415880"/>
           </a:xfrm>
           <a:prstGeom prst="roundRect">
             <a:avLst>
@@ -9008,6 +10335,11 @@
             <a:noAutofit/>
           </a:bodyPr>
           <a:p>
+            <a:pPr>
+              <a:lnSpc>
+                <a:spcPct val="100000"/>
+              </a:lnSpc>
+            </a:pPr>
             <a:endParaRPr b="0" lang="en-US" sz="1800" strike="noStrike" u="none">
               <a:solidFill>
                 <a:srgbClr val="ffffff"/>
@@ -9021,14 +10353,14 @@
       </p:sp>
       <p:sp>
         <p:nvSpPr>
-          <p:cNvPr id="121" name="Text 26"/>
+          <p:cNvPr id="134" name="Text 26"/>
           <p:cNvSpPr/>
           <p:nvPr/>
         </p:nvSpPr>
         <p:spPr>
           <a:xfrm>
             <a:off x="6492240" y="4114800"/>
-            <a:ext cx="4937400" cy="273960"/>
+            <a:ext cx="4936320" cy="272880"/>
           </a:xfrm>
           <a:prstGeom prst="rect">
             <a:avLst/>
@@ -9082,14 +10414,14 @@
       </p:sp>
       <p:sp>
         <p:nvSpPr>
-          <p:cNvPr id="122" name="Text 27"/>
+          <p:cNvPr id="135" name="Text 27"/>
           <p:cNvSpPr/>
           <p:nvPr/>
         </p:nvSpPr>
         <p:spPr>
           <a:xfrm>
             <a:off x="6492240" y="4389120"/>
-            <a:ext cx="4937400" cy="914040"/>
+            <a:ext cx="4936320" cy="912960"/>
           </a:xfrm>
           <a:prstGeom prst="rect">
             <a:avLst/>
@@ -9180,7 +10512,7 @@
       </p:grpSpPr>
       <p:sp>
         <p:nvSpPr>
-          <p:cNvPr id="123" name="Shape 0">
+          <p:cNvPr id="136" name="Shape 0">
             <a:hlinkClick r:id="rId1" action="ppaction://hlinksldjump"/>
           </p:cNvPr>
           <p:cNvSpPr/>
@@ -9189,7 +10521,7 @@
         <p:spPr>
           <a:xfrm>
             <a:off x="10314360" y="201240"/>
-            <a:ext cx="1599840" cy="365400"/>
+            <a:ext cx="1598760" cy="364320"/>
           </a:xfrm>
           <a:prstGeom prst="roundRect">
             <a:avLst>
@@ -9214,6 +10546,11 @@
             <a:noAutofit/>
           </a:bodyPr>
           <a:p>
+            <a:pPr>
+              <a:lnSpc>
+                <a:spcPct val="100000"/>
+              </a:lnSpc>
+            </a:pPr>
             <a:endParaRPr b="0" lang="en-US" sz="1800" strike="noStrike" u="none">
               <a:solidFill>
                 <a:srgbClr val="ffffff"/>
@@ -9227,14 +10564,14 @@
       </p:sp>
       <p:sp>
         <p:nvSpPr>
-          <p:cNvPr id="124" name="Text 1"/>
+          <p:cNvPr id="137" name="Text 1"/>
           <p:cNvSpPr/>
           <p:nvPr/>
         </p:nvSpPr>
         <p:spPr>
           <a:xfrm>
             <a:off x="10314360" y="201240"/>
-            <a:ext cx="1599840" cy="365400"/>
+            <a:ext cx="1598760" cy="364320"/>
           </a:xfrm>
           <a:prstGeom prst="rect">
             <a:avLst/>
@@ -9266,7 +10603,7 @@
             <a:r>
               <a:rPr b="1" lang="en-US" sz="1100" strike="noStrike" u="sng">
                 <a:solidFill>
-                  <a:srgbClr val="ffffff"/>
+                  <a:srgbClr val="f2f2f2"/>
                 </a:solidFill>
                 <a:effectLst/>
                 <a:uFillTx/>
@@ -9289,14 +10626,14 @@
       </p:sp>
       <p:sp>
         <p:nvSpPr>
-          <p:cNvPr id="125" name="Text 2"/>
+          <p:cNvPr id="138" name="Text 2"/>
           <p:cNvSpPr/>
           <p:nvPr/>
         </p:nvSpPr>
         <p:spPr>
           <a:xfrm>
             <a:off x="11365920" y="6492240"/>
-            <a:ext cx="639720" cy="273960"/>
+            <a:ext cx="638640" cy="272880"/>
           </a:xfrm>
           <a:prstGeom prst="rect">
             <a:avLst/>
@@ -9350,14 +10687,14 @@
       </p:sp>
       <p:sp>
         <p:nvSpPr>
-          <p:cNvPr id="126" name="Text 3"/>
+          <p:cNvPr id="139" name="Text 3"/>
           <p:cNvSpPr/>
           <p:nvPr/>
         </p:nvSpPr>
         <p:spPr>
           <a:xfrm>
             <a:off x="548640" y="320040"/>
-            <a:ext cx="7314840" cy="273960"/>
+            <a:ext cx="7313760" cy="272880"/>
           </a:xfrm>
           <a:prstGeom prst="rect">
             <a:avLst/>
@@ -9411,14 +10748,14 @@
       </p:sp>
       <p:sp>
         <p:nvSpPr>
-          <p:cNvPr id="127" name="Text 4"/>
+          <p:cNvPr id="140" name="Text 4"/>
           <p:cNvSpPr/>
           <p:nvPr/>
         </p:nvSpPr>
         <p:spPr>
           <a:xfrm>
             <a:off x="548640" y="567000"/>
-            <a:ext cx="8777880" cy="685440"/>
+            <a:ext cx="8776800" cy="684360"/>
           </a:xfrm>
           <a:prstGeom prst="rect">
             <a:avLst/>
@@ -9472,14 +10809,14 @@
       </p:sp>
       <p:sp>
         <p:nvSpPr>
-          <p:cNvPr id="128" name="Text 5"/>
+          <p:cNvPr id="141" name="Text 5"/>
           <p:cNvSpPr/>
           <p:nvPr/>
         </p:nvSpPr>
         <p:spPr>
           <a:xfrm>
             <a:off x="548640" y="1417320"/>
-            <a:ext cx="11063880" cy="502560"/>
+            <a:ext cx="11062800" cy="501480"/>
           </a:xfrm>
           <a:prstGeom prst="rect">
             <a:avLst/>
@@ -9533,14 +10870,14 @@
       </p:sp>
       <p:sp>
         <p:nvSpPr>
-          <p:cNvPr id="129" name="Shape 6"/>
+          <p:cNvPr id="142" name="Shape 6"/>
           <p:cNvSpPr/>
           <p:nvPr/>
         </p:nvSpPr>
         <p:spPr>
           <a:xfrm>
             <a:off x="548640" y="2148840"/>
-            <a:ext cx="2605680" cy="959760"/>
+            <a:ext cx="2604600" cy="958680"/>
           </a:xfrm>
           <a:prstGeom prst="roundRect">
             <a:avLst>
@@ -9565,6 +10902,11 @@
             <a:noAutofit/>
           </a:bodyPr>
           <a:p>
+            <a:pPr>
+              <a:lnSpc>
+                <a:spcPct val="100000"/>
+              </a:lnSpc>
+            </a:pPr>
             <a:endParaRPr b="0" lang="en-US" sz="1800" strike="noStrike" u="none">
               <a:solidFill>
                 <a:srgbClr val="ffffff"/>
@@ -9578,14 +10920,14 @@
       </p:sp>
       <p:sp>
         <p:nvSpPr>
-          <p:cNvPr id="130" name="Text 7"/>
+          <p:cNvPr id="143" name="Text 7"/>
           <p:cNvSpPr/>
           <p:nvPr/>
         </p:nvSpPr>
         <p:spPr>
           <a:xfrm>
             <a:off x="548640" y="2148840"/>
-            <a:ext cx="2605680" cy="959760"/>
+            <a:ext cx="2604600" cy="958680"/>
           </a:xfrm>
           <a:prstGeom prst="rect">
             <a:avLst/>
@@ -9639,14 +10981,14 @@
       </p:sp>
       <p:sp>
         <p:nvSpPr>
-          <p:cNvPr id="131" name="Text 8"/>
+          <p:cNvPr id="144" name="Text 8"/>
           <p:cNvSpPr/>
           <p:nvPr/>
         </p:nvSpPr>
         <p:spPr>
           <a:xfrm>
             <a:off x="3136320" y="2148840"/>
-            <a:ext cx="200880" cy="959760"/>
+            <a:ext cx="199800" cy="958680"/>
           </a:xfrm>
           <a:prstGeom prst="rect">
             <a:avLst/>
@@ -9700,14 +11042,14 @@
       </p:sp>
       <p:sp>
         <p:nvSpPr>
-          <p:cNvPr id="132" name="Shape 9"/>
+          <p:cNvPr id="145" name="Shape 9"/>
           <p:cNvSpPr/>
           <p:nvPr/>
         </p:nvSpPr>
         <p:spPr>
           <a:xfrm>
             <a:off x="3319200" y="2148840"/>
-            <a:ext cx="2605680" cy="959760"/>
+            <a:ext cx="2604600" cy="958680"/>
           </a:xfrm>
           <a:prstGeom prst="roundRect">
             <a:avLst>
@@ -9732,6 +11074,11 @@
             <a:noAutofit/>
           </a:bodyPr>
           <a:p>
+            <a:pPr>
+              <a:lnSpc>
+                <a:spcPct val="100000"/>
+              </a:lnSpc>
+            </a:pPr>
             <a:endParaRPr b="0" lang="en-US" sz="1800" strike="noStrike" u="none">
               <a:solidFill>
                 <a:srgbClr val="ffffff"/>
@@ -9745,14 +11092,14 @@
       </p:sp>
       <p:sp>
         <p:nvSpPr>
-          <p:cNvPr id="133" name="Text 10"/>
+          <p:cNvPr id="146" name="Text 10"/>
           <p:cNvSpPr/>
           <p:nvPr/>
         </p:nvSpPr>
         <p:spPr>
           <a:xfrm>
             <a:off x="3319200" y="2148840"/>
-            <a:ext cx="2605680" cy="959760"/>
+            <a:ext cx="2604600" cy="958680"/>
           </a:xfrm>
           <a:prstGeom prst="rect">
             <a:avLst/>
@@ -9806,14 +11153,14 @@
       </p:sp>
       <p:sp>
         <p:nvSpPr>
-          <p:cNvPr id="134" name="Text 11"/>
+          <p:cNvPr id="147" name="Text 11"/>
           <p:cNvSpPr/>
           <p:nvPr/>
         </p:nvSpPr>
         <p:spPr>
           <a:xfrm>
             <a:off x="5906880" y="2148840"/>
-            <a:ext cx="200880" cy="959760"/>
+            <a:ext cx="199800" cy="958680"/>
           </a:xfrm>
           <a:prstGeom prst="rect">
             <a:avLst/>
@@ -9867,14 +11214,14 @@
       </p:sp>
       <p:sp>
         <p:nvSpPr>
-          <p:cNvPr id="135" name="Shape 12"/>
+          <p:cNvPr id="148" name="Shape 12"/>
           <p:cNvSpPr/>
           <p:nvPr/>
         </p:nvSpPr>
         <p:spPr>
           <a:xfrm>
             <a:off x="6089760" y="2148840"/>
-            <a:ext cx="2605680" cy="959760"/>
+            <a:ext cx="2604600" cy="958680"/>
           </a:xfrm>
           <a:prstGeom prst="roundRect">
             <a:avLst>
@@ -9899,6 +11246,11 @@
             <a:noAutofit/>
           </a:bodyPr>
           <a:p>
+            <a:pPr>
+              <a:lnSpc>
+                <a:spcPct val="100000"/>
+              </a:lnSpc>
+            </a:pPr>
             <a:endParaRPr b="0" lang="en-US" sz="1800" strike="noStrike" u="none">
               <a:solidFill>
                 <a:srgbClr val="ffffff"/>
@@ -9912,14 +11264,14 @@
       </p:sp>
       <p:sp>
         <p:nvSpPr>
-          <p:cNvPr id="136" name="Text 13"/>
+          <p:cNvPr id="149" name="Text 13"/>
           <p:cNvSpPr/>
           <p:nvPr/>
         </p:nvSpPr>
         <p:spPr>
           <a:xfrm>
             <a:off x="6089760" y="2148840"/>
-            <a:ext cx="2605680" cy="959760"/>
+            <a:ext cx="2604600" cy="958680"/>
           </a:xfrm>
           <a:prstGeom prst="rect">
             <a:avLst/>
@@ -9973,14 +11325,14 @@
       </p:sp>
       <p:sp>
         <p:nvSpPr>
-          <p:cNvPr id="137" name="Text 14"/>
+          <p:cNvPr id="150" name="Text 14"/>
           <p:cNvSpPr/>
           <p:nvPr/>
         </p:nvSpPr>
         <p:spPr>
           <a:xfrm>
             <a:off x="8677800" y="2148840"/>
-            <a:ext cx="200880" cy="959760"/>
+            <a:ext cx="199800" cy="958680"/>
           </a:xfrm>
           <a:prstGeom prst="rect">
             <a:avLst/>
@@ -10034,14 +11386,14 @@
       </p:sp>
       <p:sp>
         <p:nvSpPr>
-          <p:cNvPr id="138" name="Shape 15"/>
+          <p:cNvPr id="151" name="Shape 15"/>
           <p:cNvSpPr/>
           <p:nvPr/>
         </p:nvSpPr>
         <p:spPr>
           <a:xfrm>
             <a:off x="8860680" y="2148840"/>
-            <a:ext cx="2605680" cy="959760"/>
+            <a:ext cx="2604600" cy="958680"/>
           </a:xfrm>
           <a:prstGeom prst="roundRect">
             <a:avLst>
@@ -10066,6 +11418,11 @@
             <a:noAutofit/>
           </a:bodyPr>
           <a:p>
+            <a:pPr>
+              <a:lnSpc>
+                <a:spcPct val="100000"/>
+              </a:lnSpc>
+            </a:pPr>
             <a:endParaRPr b="0" lang="en-US" sz="1800" strike="noStrike" u="none">
               <a:solidFill>
                 <a:srgbClr val="000000"/>
@@ -10079,14 +11436,14 @@
       </p:sp>
       <p:sp>
         <p:nvSpPr>
-          <p:cNvPr id="139" name="Text 16"/>
+          <p:cNvPr id="152" name="Text 16"/>
           <p:cNvSpPr/>
           <p:nvPr/>
         </p:nvSpPr>
         <p:spPr>
           <a:xfrm>
             <a:off x="8860680" y="2148840"/>
-            <a:ext cx="2605680" cy="959760"/>
+            <a:ext cx="2604600" cy="958680"/>
           </a:xfrm>
           <a:prstGeom prst="rect">
             <a:avLst/>
@@ -10140,14 +11497,14 @@
       </p:sp>
       <p:sp>
         <p:nvSpPr>
-          <p:cNvPr id="140" name="Text 17"/>
+          <p:cNvPr id="153" name="Text 17"/>
           <p:cNvSpPr/>
           <p:nvPr/>
         </p:nvSpPr>
         <p:spPr>
           <a:xfrm>
             <a:off x="548640" y="3163680"/>
-            <a:ext cx="10917720" cy="273960"/>
+            <a:ext cx="10916640" cy="272880"/>
           </a:xfrm>
           <a:prstGeom prst="rect">
             <a:avLst/>
@@ -10201,14 +11558,14 @@
       </p:sp>
       <p:sp>
         <p:nvSpPr>
-          <p:cNvPr id="141" name="Shape 18"/>
+          <p:cNvPr id="154" name="Shape 18"/>
           <p:cNvSpPr/>
           <p:nvPr/>
         </p:nvSpPr>
         <p:spPr>
           <a:xfrm>
             <a:off x="548640" y="3977640"/>
-            <a:ext cx="3520080" cy="2331360"/>
+            <a:ext cx="3519000" cy="2330280"/>
           </a:xfrm>
           <a:prstGeom prst="roundRect">
             <a:avLst>
@@ -10236,6 +11593,11 @@
             <a:noAutofit/>
           </a:bodyPr>
           <a:p>
+            <a:pPr>
+              <a:lnSpc>
+                <a:spcPct val="100000"/>
+              </a:lnSpc>
+            </a:pPr>
             <a:endParaRPr b="0" lang="en-US" sz="1800" strike="noStrike" u="none">
               <a:solidFill>
                 <a:srgbClr val="000000"/>
@@ -10249,14 +11611,14 @@
       </p:sp>
       <p:sp>
         <p:nvSpPr>
-          <p:cNvPr id="142" name="Text 19"/>
+          <p:cNvPr id="155" name="Text 19"/>
           <p:cNvSpPr/>
           <p:nvPr/>
         </p:nvSpPr>
         <p:spPr>
           <a:xfrm>
             <a:off x="777240" y="4178880"/>
-            <a:ext cx="3062880" cy="456840"/>
+            <a:ext cx="3061800" cy="455760"/>
           </a:xfrm>
           <a:prstGeom prst="rect">
             <a:avLst/>
@@ -10310,14 +11672,14 @@
       </p:sp>
       <p:sp>
         <p:nvSpPr>
-          <p:cNvPr id="143" name="Text 20"/>
+          <p:cNvPr id="156" name="Text 20"/>
           <p:cNvSpPr/>
           <p:nvPr/>
         </p:nvSpPr>
         <p:spPr>
           <a:xfrm>
             <a:off x="777240" y="4690800"/>
-            <a:ext cx="3062880" cy="1462680"/>
+            <a:ext cx="3061800" cy="1461600"/>
           </a:xfrm>
           <a:prstGeom prst="rect">
             <a:avLst/>
@@ -10371,14 +11733,14 @@
       </p:sp>
       <p:sp>
         <p:nvSpPr>
-          <p:cNvPr id="144" name="Shape 21"/>
+          <p:cNvPr id="157" name="Shape 21"/>
           <p:cNvSpPr/>
           <p:nvPr/>
         </p:nvSpPr>
         <p:spPr>
           <a:xfrm>
             <a:off x="4343400" y="3977640"/>
-            <a:ext cx="3520080" cy="2331360"/>
+            <a:ext cx="3519000" cy="2330280"/>
           </a:xfrm>
           <a:prstGeom prst="roundRect">
             <a:avLst>
@@ -10406,6 +11768,11 @@
             <a:noAutofit/>
           </a:bodyPr>
           <a:p>
+            <a:pPr>
+              <a:lnSpc>
+                <a:spcPct val="100000"/>
+              </a:lnSpc>
+            </a:pPr>
             <a:endParaRPr b="0" lang="en-US" sz="1800" strike="noStrike" u="none">
               <a:solidFill>
                 <a:srgbClr val="000000"/>
@@ -10419,14 +11786,14 @@
       </p:sp>
       <p:sp>
         <p:nvSpPr>
-          <p:cNvPr id="145" name="Text 22"/>
+          <p:cNvPr id="158" name="Text 22"/>
           <p:cNvSpPr/>
           <p:nvPr/>
         </p:nvSpPr>
         <p:spPr>
           <a:xfrm>
             <a:off x="4572000" y="4178880"/>
-            <a:ext cx="3062880" cy="456840"/>
+            <a:ext cx="3061800" cy="455760"/>
           </a:xfrm>
           <a:prstGeom prst="rect">
             <a:avLst/>
@@ -10480,14 +11847,14 @@
       </p:sp>
       <p:sp>
         <p:nvSpPr>
-          <p:cNvPr id="146" name="Text 23"/>
+          <p:cNvPr id="159" name="Text 23"/>
           <p:cNvSpPr/>
           <p:nvPr/>
         </p:nvSpPr>
         <p:spPr>
           <a:xfrm>
             <a:off x="4572000" y="4690800"/>
-            <a:ext cx="3062880" cy="1462680"/>
+            <a:ext cx="3061800" cy="1461600"/>
           </a:xfrm>
           <a:prstGeom prst="rect">
             <a:avLst/>
@@ -10541,14 +11908,14 @@
       </p:sp>
       <p:sp>
         <p:nvSpPr>
-          <p:cNvPr id="147" name="Shape 24"/>
+          <p:cNvPr id="160" name="Shape 24"/>
           <p:cNvSpPr/>
           <p:nvPr/>
         </p:nvSpPr>
         <p:spPr>
           <a:xfrm>
             <a:off x="8138160" y="3977640"/>
-            <a:ext cx="3520080" cy="2331360"/>
+            <a:ext cx="3519000" cy="2330280"/>
           </a:xfrm>
           <a:prstGeom prst="roundRect">
             <a:avLst>
@@ -10576,6 +11943,11 @@
             <a:noAutofit/>
           </a:bodyPr>
           <a:p>
+            <a:pPr>
+              <a:lnSpc>
+                <a:spcPct val="100000"/>
+              </a:lnSpc>
+            </a:pPr>
             <a:endParaRPr b="0" lang="en-US" sz="1800" strike="noStrike" u="none">
               <a:solidFill>
                 <a:srgbClr val="000000"/>
@@ -10589,14 +11961,14 @@
       </p:sp>
       <p:sp>
         <p:nvSpPr>
-          <p:cNvPr id="148" name="Text 25"/>
+          <p:cNvPr id="161" name="Text 25"/>
           <p:cNvSpPr/>
           <p:nvPr/>
         </p:nvSpPr>
         <p:spPr>
           <a:xfrm>
             <a:off x="8366760" y="4178880"/>
-            <a:ext cx="3062880" cy="456840"/>
+            <a:ext cx="3061800" cy="455760"/>
           </a:xfrm>
           <a:prstGeom prst="rect">
             <a:avLst/>
@@ -10650,14 +12022,14 @@
       </p:sp>
       <p:sp>
         <p:nvSpPr>
-          <p:cNvPr id="149" name="Text 26"/>
+          <p:cNvPr id="162" name="Text 26"/>
           <p:cNvSpPr/>
           <p:nvPr/>
         </p:nvSpPr>
         <p:spPr>
           <a:xfrm>
             <a:off x="8366760" y="4690800"/>
-            <a:ext cx="3062880" cy="1462680"/>
+            <a:ext cx="3061800" cy="1461600"/>
           </a:xfrm>
           <a:prstGeom prst="rect">
             <a:avLst/>
@@ -10748,7 +12120,7 @@
       </p:grpSpPr>
       <p:sp>
         <p:nvSpPr>
-          <p:cNvPr id="150" name="Shape 0">
+          <p:cNvPr id="163" name="Shape 0">
             <a:hlinkClick r:id="rId1" action="ppaction://hlinksldjump"/>
           </p:cNvPr>
           <p:cNvSpPr/>
@@ -10757,7 +12129,7 @@
         <p:spPr>
           <a:xfrm>
             <a:off x="10314360" y="201240"/>
-            <a:ext cx="1599840" cy="365400"/>
+            <a:ext cx="1598760" cy="364320"/>
           </a:xfrm>
           <a:prstGeom prst="roundRect">
             <a:avLst>
@@ -10782,6 +12154,11 @@
             <a:noAutofit/>
           </a:bodyPr>
           <a:p>
+            <a:pPr>
+              <a:lnSpc>
+                <a:spcPct val="100000"/>
+              </a:lnSpc>
+            </a:pPr>
             <a:endParaRPr b="0" lang="en-US" sz="1800" strike="noStrike" u="none">
               <a:solidFill>
                 <a:srgbClr val="ffffff"/>
@@ -10795,14 +12172,14 @@
       </p:sp>
       <p:sp>
         <p:nvSpPr>
-          <p:cNvPr id="151" name="Text 1"/>
+          <p:cNvPr id="164" name="Text 1"/>
           <p:cNvSpPr/>
           <p:nvPr/>
         </p:nvSpPr>
         <p:spPr>
           <a:xfrm>
             <a:off x="10314360" y="201240"/>
-            <a:ext cx="1599840" cy="365400"/>
+            <a:ext cx="1598760" cy="364320"/>
           </a:xfrm>
           <a:prstGeom prst="rect">
             <a:avLst/>
@@ -10834,7 +12211,7 @@
             <a:r>
               <a:rPr b="1" lang="en-US" sz="1100" strike="noStrike" u="sng">
                 <a:solidFill>
-                  <a:srgbClr val="ffffff"/>
+                  <a:srgbClr val="f2f2f2"/>
                 </a:solidFill>
                 <a:effectLst/>
                 <a:uFillTx/>
@@ -10857,14 +12234,14 @@
       </p:sp>
       <p:sp>
         <p:nvSpPr>
-          <p:cNvPr id="152" name="Text 2"/>
+          <p:cNvPr id="165" name="Text 2"/>
           <p:cNvSpPr/>
           <p:nvPr/>
         </p:nvSpPr>
         <p:spPr>
           <a:xfrm>
             <a:off x="11365920" y="6492240"/>
-            <a:ext cx="639720" cy="273960"/>
+            <a:ext cx="638640" cy="272880"/>
           </a:xfrm>
           <a:prstGeom prst="rect">
             <a:avLst/>
@@ -10918,14 +12295,14 @@
       </p:sp>
       <p:sp>
         <p:nvSpPr>
-          <p:cNvPr id="153" name="Text 3"/>
+          <p:cNvPr id="166" name="Text 3"/>
           <p:cNvSpPr/>
           <p:nvPr/>
         </p:nvSpPr>
         <p:spPr>
           <a:xfrm>
             <a:off x="548640" y="320040"/>
-            <a:ext cx="7314840" cy="273960"/>
+            <a:ext cx="7313760" cy="272880"/>
           </a:xfrm>
           <a:prstGeom prst="rect">
             <a:avLst/>
@@ -10979,14 +12356,14 @@
       </p:sp>
       <p:sp>
         <p:nvSpPr>
-          <p:cNvPr id="154" name="Text 4"/>
+          <p:cNvPr id="167" name="Text 4"/>
           <p:cNvSpPr/>
           <p:nvPr/>
         </p:nvSpPr>
         <p:spPr>
           <a:xfrm>
             <a:off x="548640" y="567000"/>
-            <a:ext cx="8777880" cy="685440"/>
+            <a:ext cx="8776800" cy="684360"/>
           </a:xfrm>
           <a:prstGeom prst="rect">
             <a:avLst/>
@@ -11040,14 +12417,14 @@
       </p:sp>
       <p:sp>
         <p:nvSpPr>
-          <p:cNvPr id="155" name="Text 5"/>
+          <p:cNvPr id="168" name="Text 5"/>
           <p:cNvSpPr/>
           <p:nvPr/>
         </p:nvSpPr>
         <p:spPr>
           <a:xfrm>
             <a:off x="548640" y="1371600"/>
-            <a:ext cx="11063880" cy="456840"/>
+            <a:ext cx="11062800" cy="455760"/>
           </a:xfrm>
           <a:prstGeom prst="rect">
             <a:avLst/>
@@ -11101,14 +12478,14 @@
       </p:sp>
       <p:sp>
         <p:nvSpPr>
-          <p:cNvPr id="156" name="Shape 6"/>
+          <p:cNvPr id="169" name="Shape 6"/>
           <p:cNvSpPr/>
           <p:nvPr/>
         </p:nvSpPr>
         <p:spPr>
           <a:xfrm>
             <a:off x="2286000" y="1965960"/>
-            <a:ext cx="2422800" cy="1874160"/>
+            <a:ext cx="2421720" cy="1873080"/>
           </a:xfrm>
           <a:prstGeom prst="rect">
             <a:avLst/>
@@ -11134,6 +12511,11 @@
             <a:noAutofit/>
           </a:bodyPr>
           <a:p>
+            <a:pPr>
+              <a:lnSpc>
+                <a:spcPct val="100000"/>
+              </a:lnSpc>
+            </a:pPr>
             <a:endParaRPr b="0" lang="en-US" sz="1800" strike="noStrike" u="none">
               <a:solidFill>
                 <a:srgbClr val="ffffff"/>
@@ -11147,14 +12529,14 @@
       </p:sp>
       <p:sp>
         <p:nvSpPr>
-          <p:cNvPr id="157" name="Text 7"/>
+          <p:cNvPr id="170" name="Text 7"/>
           <p:cNvSpPr/>
           <p:nvPr/>
         </p:nvSpPr>
         <p:spPr>
           <a:xfrm>
             <a:off x="2423160" y="2103120"/>
-            <a:ext cx="2148480" cy="319680"/>
+            <a:ext cx="2147400" cy="318600"/>
           </a:xfrm>
           <a:prstGeom prst="rect">
             <a:avLst/>
@@ -11208,14 +12590,14 @@
       </p:sp>
       <p:sp>
         <p:nvSpPr>
-          <p:cNvPr id="158" name="Text 8"/>
+          <p:cNvPr id="171" name="Text 8"/>
           <p:cNvSpPr/>
           <p:nvPr/>
         </p:nvSpPr>
         <p:spPr>
           <a:xfrm>
             <a:off x="2423160" y="2468880"/>
-            <a:ext cx="2148480" cy="1234080"/>
+            <a:ext cx="2147400" cy="1233000"/>
           </a:xfrm>
           <a:prstGeom prst="rect">
             <a:avLst/>
@@ -11269,14 +12651,14 @@
       </p:sp>
       <p:sp>
         <p:nvSpPr>
-          <p:cNvPr id="159" name="Shape 9"/>
+          <p:cNvPr id="172" name="Shape 9"/>
           <p:cNvSpPr/>
           <p:nvPr/>
         </p:nvSpPr>
         <p:spPr>
           <a:xfrm>
             <a:off x="4709160" y="1965960"/>
-            <a:ext cx="2422800" cy="1874160"/>
+            <a:ext cx="2421720" cy="1873080"/>
           </a:xfrm>
           <a:prstGeom prst="rect">
             <a:avLst/>
@@ -11302,6 +12684,11 @@
             <a:noAutofit/>
           </a:bodyPr>
           <a:p>
+            <a:pPr>
+              <a:lnSpc>
+                <a:spcPct val="100000"/>
+              </a:lnSpc>
+            </a:pPr>
             <a:endParaRPr b="0" lang="en-US" sz="1800" strike="noStrike" u="none">
               <a:solidFill>
                 <a:srgbClr val="ffffff"/>
@@ -11315,14 +12702,14 @@
       </p:sp>
       <p:sp>
         <p:nvSpPr>
-          <p:cNvPr id="160" name="Text 10"/>
+          <p:cNvPr id="173" name="Text 10"/>
           <p:cNvSpPr/>
           <p:nvPr/>
         </p:nvSpPr>
         <p:spPr>
           <a:xfrm>
             <a:off x="4846320" y="2103120"/>
-            <a:ext cx="2148480" cy="319680"/>
+            <a:ext cx="2147400" cy="318600"/>
           </a:xfrm>
           <a:prstGeom prst="rect">
             <a:avLst/>
@@ -11376,14 +12763,14 @@
       </p:sp>
       <p:sp>
         <p:nvSpPr>
-          <p:cNvPr id="161" name="Text 11"/>
+          <p:cNvPr id="174" name="Text 11"/>
           <p:cNvSpPr/>
           <p:nvPr/>
         </p:nvSpPr>
         <p:spPr>
           <a:xfrm>
             <a:off x="4846320" y="2468880"/>
-            <a:ext cx="2148480" cy="1234080"/>
+            <a:ext cx="2147400" cy="1233000"/>
           </a:xfrm>
           <a:prstGeom prst="rect">
             <a:avLst/>
@@ -11437,14 +12824,14 @@
       </p:sp>
       <p:sp>
         <p:nvSpPr>
-          <p:cNvPr id="162" name="Shape 12"/>
+          <p:cNvPr id="175" name="Shape 12"/>
           <p:cNvSpPr/>
           <p:nvPr/>
         </p:nvSpPr>
         <p:spPr>
           <a:xfrm>
             <a:off x="2286000" y="3840480"/>
-            <a:ext cx="2422800" cy="1874160"/>
+            <a:ext cx="2421720" cy="1873080"/>
           </a:xfrm>
           <a:prstGeom prst="rect">
             <a:avLst/>
@@ -11470,6 +12857,11 @@
             <a:noAutofit/>
           </a:bodyPr>
           <a:p>
+            <a:pPr>
+              <a:lnSpc>
+                <a:spcPct val="100000"/>
+              </a:lnSpc>
+            </a:pPr>
             <a:endParaRPr b="0" lang="en-US" sz="1800" strike="noStrike" u="none">
               <a:solidFill>
                 <a:srgbClr val="000000"/>
@@ -11483,14 +12875,14 @@
       </p:sp>
       <p:sp>
         <p:nvSpPr>
-          <p:cNvPr id="163" name="Text 13"/>
+          <p:cNvPr id="176" name="Text 13"/>
           <p:cNvSpPr/>
           <p:nvPr/>
         </p:nvSpPr>
         <p:spPr>
           <a:xfrm>
             <a:off x="2423160" y="3977640"/>
-            <a:ext cx="2148480" cy="319680"/>
+            <a:ext cx="2147400" cy="318600"/>
           </a:xfrm>
           <a:prstGeom prst="rect">
             <a:avLst/>
@@ -11544,14 +12936,14 @@
       </p:sp>
       <p:sp>
         <p:nvSpPr>
-          <p:cNvPr id="164" name="Text 14"/>
+          <p:cNvPr id="177" name="Text 14"/>
           <p:cNvSpPr/>
           <p:nvPr/>
         </p:nvSpPr>
         <p:spPr>
           <a:xfrm>
             <a:off x="2423160" y="4343400"/>
-            <a:ext cx="2148480" cy="1234080"/>
+            <a:ext cx="2147400" cy="1233000"/>
           </a:xfrm>
           <a:prstGeom prst="rect">
             <a:avLst/>
@@ -11605,14 +12997,14 @@
       </p:sp>
       <p:sp>
         <p:nvSpPr>
-          <p:cNvPr id="165" name="Shape 15"/>
+          <p:cNvPr id="178" name="Shape 15"/>
           <p:cNvSpPr/>
           <p:nvPr/>
         </p:nvSpPr>
         <p:spPr>
           <a:xfrm>
             <a:off x="4709160" y="3840480"/>
-            <a:ext cx="2422800" cy="1874160"/>
+            <a:ext cx="2421720" cy="1873080"/>
           </a:xfrm>
           <a:prstGeom prst="rect">
             <a:avLst/>
@@ -11638,6 +13030,11 @@
             <a:noAutofit/>
           </a:bodyPr>
           <a:p>
+            <a:pPr>
+              <a:lnSpc>
+                <a:spcPct val="100000"/>
+              </a:lnSpc>
+            </a:pPr>
             <a:endParaRPr b="0" lang="en-US" sz="1800" strike="noStrike" u="none">
               <a:solidFill>
                 <a:srgbClr val="ffffff"/>
@@ -11651,14 +13048,14 @@
       </p:sp>
       <p:sp>
         <p:nvSpPr>
-          <p:cNvPr id="166" name="Text 16"/>
+          <p:cNvPr id="179" name="Text 16"/>
           <p:cNvSpPr/>
           <p:nvPr/>
         </p:nvSpPr>
         <p:spPr>
           <a:xfrm>
             <a:off x="4846320" y="3977640"/>
-            <a:ext cx="2148480" cy="319680"/>
+            <a:ext cx="2147400" cy="318600"/>
           </a:xfrm>
           <a:prstGeom prst="rect">
             <a:avLst/>
@@ -11712,14 +13109,14 @@
       </p:sp>
       <p:sp>
         <p:nvSpPr>
-          <p:cNvPr id="167" name="Text 17"/>
+          <p:cNvPr id="180" name="Text 17"/>
           <p:cNvSpPr/>
           <p:nvPr/>
         </p:nvSpPr>
         <p:spPr>
           <a:xfrm>
             <a:off x="4846320" y="4343400"/>
-            <a:ext cx="2148480" cy="1234080"/>
+            <a:ext cx="2147400" cy="1233000"/>
           </a:xfrm>
           <a:prstGeom prst="rect">
             <a:avLst/>
@@ -11773,14 +13170,14 @@
       </p:sp>
       <p:sp>
         <p:nvSpPr>
-          <p:cNvPr id="168" name="Text 18"/>
+          <p:cNvPr id="181" name="Text 18"/>
           <p:cNvSpPr/>
           <p:nvPr/>
         </p:nvSpPr>
         <p:spPr>
           <a:xfrm>
             <a:off x="2103120" y="5742360"/>
-            <a:ext cx="365400" cy="200880"/>
+            <a:ext cx="364320" cy="199800"/>
           </a:xfrm>
           <a:prstGeom prst="rect">
             <a:avLst/>
@@ -11834,14 +13231,14 @@
       </p:sp>
       <p:sp>
         <p:nvSpPr>
-          <p:cNvPr id="169" name="Text 19"/>
+          <p:cNvPr id="182" name="Text 19"/>
           <p:cNvSpPr/>
           <p:nvPr/>
         </p:nvSpPr>
         <p:spPr>
           <a:xfrm>
             <a:off x="4251960" y="5742360"/>
-            <a:ext cx="914040" cy="200880"/>
+            <a:ext cx="912960" cy="199800"/>
           </a:xfrm>
           <a:prstGeom prst="rect">
             <a:avLst/>
@@ -11895,14 +13292,14 @@
       </p:sp>
       <p:sp>
         <p:nvSpPr>
-          <p:cNvPr id="170" name="Text 20"/>
+          <p:cNvPr id="183" name="Text 20"/>
           <p:cNvSpPr/>
           <p:nvPr/>
         </p:nvSpPr>
         <p:spPr>
           <a:xfrm>
             <a:off x="2286000" y="5989320"/>
-            <a:ext cx="4845960" cy="255600"/>
+            <a:ext cx="4844880" cy="254520"/>
           </a:xfrm>
           <a:prstGeom prst="rect">
             <a:avLst/>
@@ -11956,14 +13353,14 @@
       </p:sp>
       <p:sp>
         <p:nvSpPr>
-          <p:cNvPr id="171" name="Text 21"/>
+          <p:cNvPr id="184" name="Text 21"/>
           <p:cNvSpPr/>
           <p:nvPr/>
         </p:nvSpPr>
         <p:spPr>
           <a:xfrm>
             <a:off x="1600200" y="5577840"/>
-            <a:ext cx="502560" cy="200880"/>
+            <a:ext cx="501480" cy="199800"/>
           </a:xfrm>
           <a:prstGeom prst="rect">
             <a:avLst/>
@@ -12017,14 +13414,14 @@
       </p:sp>
       <p:sp>
         <p:nvSpPr>
-          <p:cNvPr id="172" name="Text 22"/>
+          <p:cNvPr id="185" name="Text 22"/>
           <p:cNvSpPr/>
           <p:nvPr/>
         </p:nvSpPr>
         <p:spPr>
           <a:xfrm>
             <a:off x="1600200" y="3721680"/>
-            <a:ext cx="502560" cy="200880"/>
+            <a:ext cx="501480" cy="199800"/>
           </a:xfrm>
           <a:prstGeom prst="rect">
             <a:avLst/>
@@ -12078,14 +13475,14 @@
       </p:sp>
       <p:sp>
         <p:nvSpPr>
-          <p:cNvPr id="173" name="Text 23"/>
+          <p:cNvPr id="186" name="Text 23"/>
           <p:cNvSpPr/>
           <p:nvPr/>
         </p:nvSpPr>
         <p:spPr>
           <a:xfrm>
             <a:off x="502920" y="1965960"/>
-            <a:ext cx="914040" cy="3748680"/>
+            <a:ext cx="912960" cy="3747600"/>
           </a:xfrm>
           <a:prstGeom prst="rect">
             <a:avLst/>
@@ -12229,14 +13626,14 @@
       </p:sp>
       <p:sp>
         <p:nvSpPr>
-          <p:cNvPr id="174" name="Text 24"/>
+          <p:cNvPr id="187" name="Text 24"/>
           <p:cNvSpPr/>
           <p:nvPr/>
         </p:nvSpPr>
         <p:spPr>
           <a:xfrm>
             <a:off x="7543800" y="1828800"/>
-            <a:ext cx="4096080" cy="273960"/>
+            <a:ext cx="4095000" cy="272880"/>
           </a:xfrm>
           <a:prstGeom prst="rect">
             <a:avLst/>
@@ -12290,14 +13687,14 @@
       </p:sp>
       <p:sp>
         <p:nvSpPr>
-          <p:cNvPr id="175" name="Shape 25"/>
+          <p:cNvPr id="188" name="Shape 25"/>
           <p:cNvSpPr/>
           <p:nvPr/>
         </p:nvSpPr>
         <p:spPr>
           <a:xfrm>
             <a:off x="7543800" y="2148840"/>
-            <a:ext cx="4096080" cy="959760"/>
+            <a:ext cx="4095000" cy="958680"/>
           </a:xfrm>
           <a:prstGeom prst="roundRect">
             <a:avLst>
@@ -12325,6 +13722,11 @@
             <a:noAutofit/>
           </a:bodyPr>
           <a:p>
+            <a:pPr>
+              <a:lnSpc>
+                <a:spcPct val="100000"/>
+              </a:lnSpc>
+            </a:pPr>
             <a:endParaRPr b="0" lang="en-US" sz="1800" strike="noStrike" u="none">
               <a:solidFill>
                 <a:srgbClr val="000000"/>
@@ -12338,14 +13740,14 @@
       </p:sp>
       <p:sp>
         <p:nvSpPr>
-          <p:cNvPr id="176" name="Text 26"/>
+          <p:cNvPr id="189" name="Text 26"/>
           <p:cNvSpPr/>
           <p:nvPr/>
         </p:nvSpPr>
         <p:spPr>
           <a:xfrm>
             <a:off x="7726680" y="2258640"/>
-            <a:ext cx="3730320" cy="273960"/>
+            <a:ext cx="3729240" cy="272880"/>
           </a:xfrm>
           <a:prstGeom prst="rect">
             <a:avLst/>
@@ -12399,14 +13801,14 @@
       </p:sp>
       <p:sp>
         <p:nvSpPr>
-          <p:cNvPr id="177" name="Text 27"/>
+          <p:cNvPr id="190" name="Text 27"/>
           <p:cNvSpPr/>
           <p:nvPr/>
         </p:nvSpPr>
         <p:spPr>
           <a:xfrm>
             <a:off x="7726680" y="2569320"/>
-            <a:ext cx="3730320" cy="456840"/>
+            <a:ext cx="3729240" cy="455760"/>
           </a:xfrm>
           <a:prstGeom prst="rect">
             <a:avLst/>
@@ -12460,14 +13862,14 @@
       </p:sp>
       <p:sp>
         <p:nvSpPr>
-          <p:cNvPr id="178" name="Shape 28"/>
+          <p:cNvPr id="191" name="Shape 28"/>
           <p:cNvSpPr/>
           <p:nvPr/>
         </p:nvSpPr>
         <p:spPr>
           <a:xfrm>
             <a:off x="7543800" y="3246120"/>
-            <a:ext cx="4096080" cy="959760"/>
+            <a:ext cx="4095000" cy="958680"/>
           </a:xfrm>
           <a:prstGeom prst="roundRect">
             <a:avLst>
@@ -12495,6 +13897,11 @@
             <a:noAutofit/>
           </a:bodyPr>
           <a:p>
+            <a:pPr>
+              <a:lnSpc>
+                <a:spcPct val="100000"/>
+              </a:lnSpc>
+            </a:pPr>
             <a:endParaRPr b="0" lang="en-US" sz="1800" strike="noStrike" u="none">
               <a:solidFill>
                 <a:srgbClr val="000000"/>
@@ -12508,14 +13915,14 @@
       </p:sp>
       <p:sp>
         <p:nvSpPr>
-          <p:cNvPr id="179" name="Text 29"/>
+          <p:cNvPr id="192" name="Text 29"/>
           <p:cNvSpPr/>
           <p:nvPr/>
         </p:nvSpPr>
         <p:spPr>
           <a:xfrm>
             <a:off x="7726680" y="3355920"/>
-            <a:ext cx="3730320" cy="273960"/>
+            <a:ext cx="3729240" cy="272880"/>
           </a:xfrm>
           <a:prstGeom prst="rect">
             <a:avLst/>
@@ -12569,14 +13976,14 @@
       </p:sp>
       <p:sp>
         <p:nvSpPr>
-          <p:cNvPr id="180" name="Text 30"/>
+          <p:cNvPr id="193" name="Text 30"/>
           <p:cNvSpPr/>
           <p:nvPr/>
         </p:nvSpPr>
         <p:spPr>
           <a:xfrm>
             <a:off x="7726680" y="3666600"/>
-            <a:ext cx="3730320" cy="456840"/>
+            <a:ext cx="3729240" cy="455760"/>
           </a:xfrm>
           <a:prstGeom prst="rect">
             <a:avLst/>
@@ -12630,14 +14037,14 @@
       </p:sp>
       <p:sp>
         <p:nvSpPr>
-          <p:cNvPr id="181" name="Shape 31"/>
+          <p:cNvPr id="194" name="Shape 31"/>
           <p:cNvSpPr/>
           <p:nvPr/>
         </p:nvSpPr>
         <p:spPr>
           <a:xfrm>
             <a:off x="7543800" y="4389120"/>
-            <a:ext cx="4096080" cy="1508400"/>
+            <a:ext cx="4095000" cy="1507320"/>
           </a:xfrm>
           <a:prstGeom prst="roundRect">
             <a:avLst>
@@ -12662,6 +14069,11 @@
             <a:noAutofit/>
           </a:bodyPr>
           <a:p>
+            <a:pPr>
+              <a:lnSpc>
+                <a:spcPct val="100000"/>
+              </a:lnSpc>
+            </a:pPr>
             <a:endParaRPr b="0" lang="en-US" sz="1800" strike="noStrike" u="none">
               <a:solidFill>
                 <a:srgbClr val="ffffff"/>
@@ -12675,14 +14087,14 @@
       </p:sp>
       <p:sp>
         <p:nvSpPr>
-          <p:cNvPr id="182" name="Text 32"/>
+          <p:cNvPr id="195" name="Text 32"/>
           <p:cNvSpPr/>
           <p:nvPr/>
         </p:nvSpPr>
         <p:spPr>
           <a:xfrm>
             <a:off x="7745040" y="4526280"/>
-            <a:ext cx="3693960" cy="1234080"/>
+            <a:ext cx="3692880" cy="1233000"/>
           </a:xfrm>
           <a:prstGeom prst="rect">
             <a:avLst/>
@@ -12773,7 +14185,7 @@
       </p:grpSpPr>
       <p:sp>
         <p:nvSpPr>
-          <p:cNvPr id="183" name="Shape 0">
+          <p:cNvPr id="196" name="Shape 0">
             <a:hlinkClick r:id="rId1" action="ppaction://hlinksldjump"/>
           </p:cNvPr>
           <p:cNvSpPr/>
@@ -12782,7 +14194,7 @@
         <p:spPr>
           <a:xfrm>
             <a:off x="10314360" y="201240"/>
-            <a:ext cx="1599840" cy="365400"/>
+            <a:ext cx="1598760" cy="364320"/>
           </a:xfrm>
           <a:prstGeom prst="roundRect">
             <a:avLst>
@@ -12807,6 +14219,11 @@
             <a:noAutofit/>
           </a:bodyPr>
           <a:p>
+            <a:pPr>
+              <a:lnSpc>
+                <a:spcPct val="100000"/>
+              </a:lnSpc>
+            </a:pPr>
             <a:endParaRPr b="0" lang="en-US" sz="1800" strike="noStrike" u="none">
               <a:solidFill>
                 <a:srgbClr val="ffffff"/>
@@ -12820,14 +14237,14 @@
       </p:sp>
       <p:sp>
         <p:nvSpPr>
-          <p:cNvPr id="184" name="Text 1"/>
+          <p:cNvPr id="197" name="Text 1"/>
           <p:cNvSpPr/>
           <p:nvPr/>
         </p:nvSpPr>
         <p:spPr>
           <a:xfrm>
             <a:off x="10314360" y="201240"/>
-            <a:ext cx="1599840" cy="365400"/>
+            <a:ext cx="1598760" cy="364320"/>
           </a:xfrm>
           <a:prstGeom prst="rect">
             <a:avLst/>
@@ -12859,7 +14276,7 @@
             <a:r>
               <a:rPr b="1" lang="en-US" sz="1100" strike="noStrike" u="sng">
                 <a:solidFill>
-                  <a:srgbClr val="ffffff"/>
+                  <a:srgbClr val="f2f2f2"/>
                 </a:solidFill>
                 <a:effectLst/>
                 <a:uFillTx/>
@@ -12882,14 +14299,14 @@
       </p:sp>
       <p:sp>
         <p:nvSpPr>
-          <p:cNvPr id="185" name="Text 2"/>
+          <p:cNvPr id="198" name="Text 2"/>
           <p:cNvSpPr/>
           <p:nvPr/>
         </p:nvSpPr>
         <p:spPr>
           <a:xfrm>
             <a:off x="11365920" y="6492240"/>
-            <a:ext cx="639720" cy="273960"/>
+            <a:ext cx="638640" cy="272880"/>
           </a:xfrm>
           <a:prstGeom prst="rect">
             <a:avLst/>
@@ -12943,14 +14360,14 @@
       </p:sp>
       <p:sp>
         <p:nvSpPr>
-          <p:cNvPr id="186" name="Text 3"/>
+          <p:cNvPr id="199" name="Text 3"/>
           <p:cNvSpPr/>
           <p:nvPr/>
         </p:nvSpPr>
         <p:spPr>
           <a:xfrm>
             <a:off x="548640" y="320040"/>
-            <a:ext cx="7314840" cy="273960"/>
+            <a:ext cx="7313760" cy="272880"/>
           </a:xfrm>
           <a:prstGeom prst="rect">
             <a:avLst/>
@@ -13004,14 +14421,14 @@
       </p:sp>
       <p:sp>
         <p:nvSpPr>
-          <p:cNvPr id="187" name="Text 4"/>
+          <p:cNvPr id="200" name="Text 4"/>
           <p:cNvSpPr/>
           <p:nvPr/>
         </p:nvSpPr>
         <p:spPr>
           <a:xfrm>
             <a:off x="548640" y="567000"/>
-            <a:ext cx="8777880" cy="685440"/>
+            <a:ext cx="8776800" cy="684360"/>
           </a:xfrm>
           <a:prstGeom prst="rect">
             <a:avLst/>
@@ -13065,14 +14482,14 @@
       </p:sp>
       <p:sp>
         <p:nvSpPr>
-          <p:cNvPr id="188" name="Text 5"/>
+          <p:cNvPr id="201" name="Text 5"/>
           <p:cNvSpPr/>
           <p:nvPr/>
         </p:nvSpPr>
         <p:spPr>
           <a:xfrm>
             <a:off x="548640" y="1417320"/>
-            <a:ext cx="11063880" cy="502560"/>
+            <a:ext cx="11062800" cy="501480"/>
           </a:xfrm>
           <a:prstGeom prst="rect">
             <a:avLst/>
@@ -13126,14 +14543,14 @@
       </p:sp>
       <p:sp>
         <p:nvSpPr>
-          <p:cNvPr id="189" name="Shape 6"/>
+          <p:cNvPr id="202" name="Shape 6"/>
           <p:cNvSpPr/>
           <p:nvPr/>
         </p:nvSpPr>
         <p:spPr>
           <a:xfrm>
             <a:off x="548640" y="2194560"/>
-            <a:ext cx="2084400" cy="1371240"/>
+            <a:ext cx="2083320" cy="1370160"/>
           </a:xfrm>
           <a:prstGeom prst="roundRect">
             <a:avLst>
@@ -13158,6 +14575,11 @@
             <a:noAutofit/>
           </a:bodyPr>
           <a:p>
+            <a:pPr>
+              <a:lnSpc>
+                <a:spcPct val="100000"/>
+              </a:lnSpc>
+            </a:pPr>
             <a:endParaRPr b="0" lang="en-US" sz="1800" strike="noStrike" u="none">
               <a:solidFill>
                 <a:srgbClr val="ffffff"/>
@@ -13171,14 +14593,14 @@
       </p:sp>
       <p:sp>
         <p:nvSpPr>
-          <p:cNvPr id="190" name="Shape 7"/>
+          <p:cNvPr id="203" name="Shape 7"/>
           <p:cNvSpPr/>
           <p:nvPr/>
         </p:nvSpPr>
         <p:spPr>
           <a:xfrm>
             <a:off x="1417320" y="2011680"/>
-            <a:ext cx="347040" cy="347040"/>
+            <a:ext cx="345960" cy="345960"/>
           </a:xfrm>
           <a:prstGeom prst="ellipse">
             <a:avLst/>
@@ -13201,6 +14623,11 @@
             <a:noAutofit/>
           </a:bodyPr>
           <a:p>
+            <a:pPr>
+              <a:lnSpc>
+                <a:spcPct val="100000"/>
+              </a:lnSpc>
+            </a:pPr>
             <a:endParaRPr b="0" lang="en-US" sz="1800" strike="noStrike" u="none">
               <a:solidFill>
                 <a:srgbClr val="ffffff"/>
@@ -13214,14 +14641,14 @@
       </p:sp>
       <p:sp>
         <p:nvSpPr>
-          <p:cNvPr id="191" name="Text 8"/>
+          <p:cNvPr id="204" name="Text 8"/>
           <p:cNvSpPr/>
           <p:nvPr/>
         </p:nvSpPr>
         <p:spPr>
           <a:xfrm>
             <a:off x="1417320" y="2011680"/>
-            <a:ext cx="347040" cy="347040"/>
+            <a:ext cx="345960" cy="345960"/>
           </a:xfrm>
           <a:prstGeom prst="rect">
             <a:avLst/>
@@ -13275,14 +14702,14 @@
       </p:sp>
       <p:sp>
         <p:nvSpPr>
-          <p:cNvPr id="192" name="Text 9"/>
+          <p:cNvPr id="205" name="Text 9"/>
           <p:cNvSpPr/>
           <p:nvPr/>
         </p:nvSpPr>
         <p:spPr>
           <a:xfrm>
             <a:off x="685800" y="2423160"/>
-            <a:ext cx="1810080" cy="502560"/>
+            <a:ext cx="1809000" cy="501480"/>
           </a:xfrm>
           <a:prstGeom prst="rect">
             <a:avLst/>
@@ -13336,14 +14763,14 @@
       </p:sp>
       <p:sp>
         <p:nvSpPr>
-          <p:cNvPr id="193" name="Text 10"/>
+          <p:cNvPr id="206" name="Text 10"/>
           <p:cNvSpPr/>
           <p:nvPr/>
         </p:nvSpPr>
         <p:spPr>
           <a:xfrm>
             <a:off x="685800" y="2971800"/>
-            <a:ext cx="1810080" cy="502560"/>
+            <a:ext cx="1809000" cy="501480"/>
           </a:xfrm>
           <a:prstGeom prst="rect">
             <a:avLst/>
@@ -13397,14 +14824,14 @@
       </p:sp>
       <p:sp>
         <p:nvSpPr>
-          <p:cNvPr id="194" name="Text 11"/>
+          <p:cNvPr id="207" name="Text 11"/>
           <p:cNvSpPr/>
           <p:nvPr/>
         </p:nvSpPr>
         <p:spPr>
           <a:xfrm>
             <a:off x="2615040" y="2194560"/>
-            <a:ext cx="191520" cy="1371240"/>
+            <a:ext cx="190440" cy="1370160"/>
           </a:xfrm>
           <a:prstGeom prst="rect">
             <a:avLst/>
@@ -13458,14 +14885,14 @@
       </p:sp>
       <p:sp>
         <p:nvSpPr>
-          <p:cNvPr id="195" name="Shape 12"/>
+          <p:cNvPr id="208" name="Shape 12"/>
           <p:cNvSpPr/>
           <p:nvPr/>
         </p:nvSpPr>
         <p:spPr>
           <a:xfrm>
             <a:off x="2788920" y="2194560"/>
-            <a:ext cx="2084400" cy="1371240"/>
+            <a:ext cx="2083320" cy="1370160"/>
           </a:xfrm>
           <a:prstGeom prst="roundRect">
             <a:avLst>
@@ -13490,6 +14917,11 @@
             <a:noAutofit/>
           </a:bodyPr>
           <a:p>
+            <a:pPr>
+              <a:lnSpc>
+                <a:spcPct val="100000"/>
+              </a:lnSpc>
+            </a:pPr>
             <a:endParaRPr b="0" lang="en-US" sz="1800" strike="noStrike" u="none">
               <a:solidFill>
                 <a:srgbClr val="ffffff"/>
@@ -13503,14 +14935,14 @@
       </p:sp>
       <p:sp>
         <p:nvSpPr>
-          <p:cNvPr id="196" name="Shape 13"/>
+          <p:cNvPr id="209" name="Shape 13"/>
           <p:cNvSpPr/>
           <p:nvPr/>
         </p:nvSpPr>
         <p:spPr>
           <a:xfrm>
             <a:off x="3657600" y="2011680"/>
-            <a:ext cx="347040" cy="347040"/>
+            <a:ext cx="345960" cy="345960"/>
           </a:xfrm>
           <a:prstGeom prst="ellipse">
             <a:avLst/>
@@ -13533,6 +14965,11 @@
             <a:noAutofit/>
           </a:bodyPr>
           <a:p>
+            <a:pPr>
+              <a:lnSpc>
+                <a:spcPct val="100000"/>
+              </a:lnSpc>
+            </a:pPr>
             <a:endParaRPr b="0" lang="en-US" sz="1800" strike="noStrike" u="none">
               <a:solidFill>
                 <a:srgbClr val="ffffff"/>
@@ -13546,14 +14983,14 @@
       </p:sp>
       <p:sp>
         <p:nvSpPr>
-          <p:cNvPr id="197" name="Text 14"/>
+          <p:cNvPr id="210" name="Text 14"/>
           <p:cNvSpPr/>
           <p:nvPr/>
         </p:nvSpPr>
         <p:spPr>
           <a:xfrm>
             <a:off x="3657600" y="2011680"/>
-            <a:ext cx="347040" cy="347040"/>
+            <a:ext cx="345960" cy="345960"/>
           </a:xfrm>
           <a:prstGeom prst="rect">
             <a:avLst/>
@@ -13607,14 +15044,14 @@
       </p:sp>
       <p:sp>
         <p:nvSpPr>
-          <p:cNvPr id="198" name="Text 15"/>
+          <p:cNvPr id="211" name="Text 15"/>
           <p:cNvSpPr/>
           <p:nvPr/>
         </p:nvSpPr>
         <p:spPr>
           <a:xfrm>
             <a:off x="2926080" y="2423160"/>
-            <a:ext cx="1810080" cy="502560"/>
+            <a:ext cx="1809000" cy="501480"/>
           </a:xfrm>
           <a:prstGeom prst="rect">
             <a:avLst/>
@@ -13668,14 +15105,14 @@
       </p:sp>
       <p:sp>
         <p:nvSpPr>
-          <p:cNvPr id="199" name="Text 16"/>
+          <p:cNvPr id="212" name="Text 16"/>
           <p:cNvSpPr/>
           <p:nvPr/>
         </p:nvSpPr>
         <p:spPr>
           <a:xfrm>
             <a:off x="2926080" y="2971800"/>
-            <a:ext cx="1810080" cy="502560"/>
+            <a:ext cx="1809000" cy="501480"/>
           </a:xfrm>
           <a:prstGeom prst="rect">
             <a:avLst/>
@@ -13729,14 +15166,14 @@
       </p:sp>
       <p:sp>
         <p:nvSpPr>
-          <p:cNvPr id="200" name="Text 17"/>
+          <p:cNvPr id="213" name="Text 17"/>
           <p:cNvSpPr/>
           <p:nvPr/>
         </p:nvSpPr>
         <p:spPr>
           <a:xfrm>
             <a:off x="4855320" y="2194560"/>
-            <a:ext cx="191520" cy="1371240"/>
+            <a:ext cx="190440" cy="1370160"/>
           </a:xfrm>
           <a:prstGeom prst="rect">
             <a:avLst/>
@@ -13790,14 +15227,14 @@
       </p:sp>
       <p:sp>
         <p:nvSpPr>
-          <p:cNvPr id="201" name="Shape 18"/>
+          <p:cNvPr id="214" name="Shape 18"/>
           <p:cNvSpPr/>
           <p:nvPr/>
         </p:nvSpPr>
         <p:spPr>
           <a:xfrm>
             <a:off x="5029200" y="2194560"/>
-            <a:ext cx="2084400" cy="1371240"/>
+            <a:ext cx="2083320" cy="1370160"/>
           </a:xfrm>
           <a:prstGeom prst="roundRect">
             <a:avLst>
@@ -13822,6 +15259,11 @@
             <a:noAutofit/>
           </a:bodyPr>
           <a:p>
+            <a:pPr>
+              <a:lnSpc>
+                <a:spcPct val="100000"/>
+              </a:lnSpc>
+            </a:pPr>
             <a:endParaRPr b="0" lang="en-US" sz="1800" strike="noStrike" u="none">
               <a:solidFill>
                 <a:srgbClr val="ffffff"/>
@@ -13835,14 +15277,14 @@
       </p:sp>
       <p:sp>
         <p:nvSpPr>
-          <p:cNvPr id="202" name="Shape 19"/>
+          <p:cNvPr id="215" name="Shape 19"/>
           <p:cNvSpPr/>
           <p:nvPr/>
         </p:nvSpPr>
         <p:spPr>
           <a:xfrm>
             <a:off x="5897880" y="2011680"/>
-            <a:ext cx="347040" cy="347040"/>
+            <a:ext cx="345960" cy="345960"/>
           </a:xfrm>
           <a:prstGeom prst="ellipse">
             <a:avLst/>
@@ -13865,6 +15307,11 @@
             <a:noAutofit/>
           </a:bodyPr>
           <a:p>
+            <a:pPr>
+              <a:lnSpc>
+                <a:spcPct val="100000"/>
+              </a:lnSpc>
+            </a:pPr>
             <a:endParaRPr b="0" lang="en-US" sz="1800" strike="noStrike" u="none">
               <a:solidFill>
                 <a:srgbClr val="ffffff"/>
@@ -13878,14 +15325,14 @@
       </p:sp>
       <p:sp>
         <p:nvSpPr>
-          <p:cNvPr id="203" name="Text 20"/>
+          <p:cNvPr id="216" name="Text 20"/>
           <p:cNvSpPr/>
           <p:nvPr/>
         </p:nvSpPr>
         <p:spPr>
           <a:xfrm>
             <a:off x="5897880" y="2011680"/>
-            <a:ext cx="347040" cy="347040"/>
+            <a:ext cx="345960" cy="345960"/>
           </a:xfrm>
           <a:prstGeom prst="rect">
             <a:avLst/>
@@ -13939,14 +15386,14 @@
       </p:sp>
       <p:sp>
         <p:nvSpPr>
-          <p:cNvPr id="204" name="Text 21"/>
+          <p:cNvPr id="217" name="Text 21"/>
           <p:cNvSpPr/>
           <p:nvPr/>
         </p:nvSpPr>
         <p:spPr>
           <a:xfrm>
             <a:off x="5166360" y="2423160"/>
-            <a:ext cx="1810080" cy="502560"/>
+            <a:ext cx="1809000" cy="501480"/>
           </a:xfrm>
           <a:prstGeom prst="rect">
             <a:avLst/>
@@ -14000,14 +15447,14 @@
       </p:sp>
       <p:sp>
         <p:nvSpPr>
-          <p:cNvPr id="205" name="Text 22"/>
+          <p:cNvPr id="218" name="Text 22"/>
           <p:cNvSpPr/>
           <p:nvPr/>
         </p:nvSpPr>
         <p:spPr>
           <a:xfrm>
             <a:off x="5166360" y="2971800"/>
-            <a:ext cx="1810080" cy="502560"/>
+            <a:ext cx="1809000" cy="501480"/>
           </a:xfrm>
           <a:prstGeom prst="rect">
             <a:avLst/>
@@ -14061,14 +15508,14 @@
       </p:sp>
       <p:sp>
         <p:nvSpPr>
-          <p:cNvPr id="206" name="Text 23"/>
+          <p:cNvPr id="219" name="Text 23"/>
           <p:cNvSpPr/>
           <p:nvPr/>
         </p:nvSpPr>
         <p:spPr>
           <a:xfrm>
             <a:off x="7095600" y="2194560"/>
-            <a:ext cx="191520" cy="1371240"/>
+            <a:ext cx="190440" cy="1370160"/>
           </a:xfrm>
           <a:prstGeom prst="rect">
             <a:avLst/>
@@ -14122,14 +15569,14 @@
       </p:sp>
       <p:sp>
         <p:nvSpPr>
-          <p:cNvPr id="207" name="Shape 24"/>
+          <p:cNvPr id="220" name="Shape 24"/>
           <p:cNvSpPr/>
           <p:nvPr/>
         </p:nvSpPr>
         <p:spPr>
           <a:xfrm>
             <a:off x="7269480" y="2194560"/>
-            <a:ext cx="2084400" cy="1371240"/>
+            <a:ext cx="2083320" cy="1370160"/>
           </a:xfrm>
           <a:prstGeom prst="roundRect">
             <a:avLst>
@@ -14154,6 +15601,11 @@
             <a:noAutofit/>
           </a:bodyPr>
           <a:p>
+            <a:pPr>
+              <a:lnSpc>
+                <a:spcPct val="100000"/>
+              </a:lnSpc>
+            </a:pPr>
             <a:endParaRPr b="0" lang="en-US" sz="1800" strike="noStrike" u="none">
               <a:solidFill>
                 <a:srgbClr val="ffffff"/>
@@ -14167,14 +15619,14 @@
       </p:sp>
       <p:sp>
         <p:nvSpPr>
-          <p:cNvPr id="208" name="Shape 25"/>
+          <p:cNvPr id="221" name="Shape 25"/>
           <p:cNvSpPr/>
           <p:nvPr/>
         </p:nvSpPr>
         <p:spPr>
           <a:xfrm>
             <a:off x="8138160" y="2011680"/>
-            <a:ext cx="347040" cy="347040"/>
+            <a:ext cx="345960" cy="345960"/>
           </a:xfrm>
           <a:prstGeom prst="ellipse">
             <a:avLst/>
@@ -14197,6 +15649,11 @@
             <a:noAutofit/>
           </a:bodyPr>
           <a:p>
+            <a:pPr>
+              <a:lnSpc>
+                <a:spcPct val="100000"/>
+              </a:lnSpc>
+            </a:pPr>
             <a:endParaRPr b="0" lang="en-US" sz="1800" strike="noStrike" u="none">
               <a:solidFill>
                 <a:srgbClr val="ffffff"/>
@@ -14210,14 +15667,14 @@
       </p:sp>
       <p:sp>
         <p:nvSpPr>
-          <p:cNvPr id="209" name="Text 26"/>
+          <p:cNvPr id="222" name="Text 26"/>
           <p:cNvSpPr/>
           <p:nvPr/>
         </p:nvSpPr>
         <p:spPr>
           <a:xfrm>
             <a:off x="8138160" y="2011680"/>
-            <a:ext cx="347040" cy="347040"/>
+            <a:ext cx="345960" cy="345960"/>
           </a:xfrm>
           <a:prstGeom prst="rect">
             <a:avLst/>
@@ -14271,14 +15728,14 @@
       </p:sp>
       <p:sp>
         <p:nvSpPr>
-          <p:cNvPr id="210" name="Text 27"/>
+          <p:cNvPr id="223" name="Text 27"/>
           <p:cNvSpPr/>
           <p:nvPr/>
         </p:nvSpPr>
         <p:spPr>
           <a:xfrm>
             <a:off x="7406640" y="2423160"/>
-            <a:ext cx="1810080" cy="502560"/>
+            <a:ext cx="1809000" cy="501480"/>
           </a:xfrm>
           <a:prstGeom prst="rect">
             <a:avLst/>
@@ -14332,14 +15789,14 @@
       </p:sp>
       <p:sp>
         <p:nvSpPr>
-          <p:cNvPr id="211" name="Text 28"/>
+          <p:cNvPr id="224" name="Text 28"/>
           <p:cNvSpPr/>
           <p:nvPr/>
         </p:nvSpPr>
         <p:spPr>
           <a:xfrm>
             <a:off x="7406640" y="2971800"/>
-            <a:ext cx="1810080" cy="502560"/>
+            <a:ext cx="1809000" cy="501480"/>
           </a:xfrm>
           <a:prstGeom prst="rect">
             <a:avLst/>
@@ -14393,14 +15850,14 @@
       </p:sp>
       <p:sp>
         <p:nvSpPr>
-          <p:cNvPr id="212" name="Text 29"/>
+          <p:cNvPr id="225" name="Text 29"/>
           <p:cNvSpPr/>
           <p:nvPr/>
         </p:nvSpPr>
         <p:spPr>
           <a:xfrm>
             <a:off x="9335880" y="2194560"/>
-            <a:ext cx="191520" cy="1371240"/>
+            <a:ext cx="190440" cy="1370160"/>
           </a:xfrm>
           <a:prstGeom prst="rect">
             <a:avLst/>
@@ -14454,14 +15911,14 @@
       </p:sp>
       <p:sp>
         <p:nvSpPr>
-          <p:cNvPr id="213" name="Shape 30"/>
+          <p:cNvPr id="226" name="Shape 30"/>
           <p:cNvSpPr/>
           <p:nvPr/>
         </p:nvSpPr>
         <p:spPr>
           <a:xfrm>
             <a:off x="9509760" y="2194560"/>
-            <a:ext cx="2084400" cy="1371240"/>
+            <a:ext cx="2083320" cy="1370160"/>
           </a:xfrm>
           <a:prstGeom prst="roundRect">
             <a:avLst>
@@ -14486,6 +15943,11 @@
             <a:noAutofit/>
           </a:bodyPr>
           <a:p>
+            <a:pPr>
+              <a:lnSpc>
+                <a:spcPct val="100000"/>
+              </a:lnSpc>
+            </a:pPr>
             <a:endParaRPr b="0" lang="en-US" sz="1800" strike="noStrike" u="none">
               <a:solidFill>
                 <a:srgbClr val="000000"/>
@@ -14499,14 +15961,14 @@
       </p:sp>
       <p:sp>
         <p:nvSpPr>
-          <p:cNvPr id="214" name="Shape 31"/>
+          <p:cNvPr id="227" name="Shape 31"/>
           <p:cNvSpPr/>
           <p:nvPr/>
         </p:nvSpPr>
         <p:spPr>
           <a:xfrm>
             <a:off x="10378440" y="2011680"/>
-            <a:ext cx="347040" cy="347040"/>
+            <a:ext cx="345960" cy="345960"/>
           </a:xfrm>
           <a:prstGeom prst="ellipse">
             <a:avLst/>
@@ -14529,6 +15991,11 @@
             <a:noAutofit/>
           </a:bodyPr>
           <a:p>
+            <a:pPr>
+              <a:lnSpc>
+                <a:spcPct val="100000"/>
+              </a:lnSpc>
+            </a:pPr>
             <a:endParaRPr b="0" lang="en-US" sz="1800" strike="noStrike" u="none">
               <a:solidFill>
                 <a:srgbClr val="ffffff"/>
@@ -14542,14 +16009,14 @@
       </p:sp>
       <p:sp>
         <p:nvSpPr>
-          <p:cNvPr id="215" name="Text 32"/>
+          <p:cNvPr id="228" name="Text 32"/>
           <p:cNvSpPr/>
           <p:nvPr/>
         </p:nvSpPr>
         <p:spPr>
           <a:xfrm>
             <a:off x="10378440" y="2011680"/>
-            <a:ext cx="347040" cy="347040"/>
+            <a:ext cx="345960" cy="345960"/>
           </a:xfrm>
           <a:prstGeom prst="rect">
             <a:avLst/>
@@ -14603,14 +16070,14 @@
       </p:sp>
       <p:sp>
         <p:nvSpPr>
-          <p:cNvPr id="216" name="Text 33"/>
+          <p:cNvPr id="229" name="Text 33"/>
           <p:cNvSpPr/>
           <p:nvPr/>
         </p:nvSpPr>
         <p:spPr>
           <a:xfrm>
             <a:off x="9646920" y="2423160"/>
-            <a:ext cx="1810080" cy="502560"/>
+            <a:ext cx="1809000" cy="501480"/>
           </a:xfrm>
           <a:prstGeom prst="rect">
             <a:avLst/>
@@ -14664,14 +16131,14 @@
       </p:sp>
       <p:sp>
         <p:nvSpPr>
-          <p:cNvPr id="217" name="Text 34"/>
+          <p:cNvPr id="230" name="Text 34"/>
           <p:cNvSpPr/>
           <p:nvPr/>
         </p:nvSpPr>
         <p:spPr>
           <a:xfrm>
             <a:off x="9646920" y="2971800"/>
-            <a:ext cx="1810080" cy="502560"/>
+            <a:ext cx="1809000" cy="501480"/>
           </a:xfrm>
           <a:prstGeom prst="rect">
             <a:avLst/>
@@ -14725,14 +16192,14 @@
       </p:sp>
       <p:sp>
         <p:nvSpPr>
-          <p:cNvPr id="218" name="Shape 35"/>
+          <p:cNvPr id="231" name="Shape 35"/>
           <p:cNvSpPr/>
           <p:nvPr/>
         </p:nvSpPr>
         <p:spPr>
           <a:xfrm>
             <a:off x="548640" y="3977640"/>
-            <a:ext cx="11091240" cy="914040"/>
+            <a:ext cx="11090160" cy="912960"/>
           </a:xfrm>
           <a:prstGeom prst="roundRect">
             <a:avLst>
@@ -14760,6 +16227,11 @@
             <a:noAutofit/>
           </a:bodyPr>
           <a:p>
+            <a:pPr>
+              <a:lnSpc>
+                <a:spcPct val="100000"/>
+              </a:lnSpc>
+            </a:pPr>
             <a:endParaRPr b="0" lang="en-US" sz="1800" strike="noStrike" u="none">
               <a:solidFill>
                 <a:srgbClr val="000000"/>
@@ -14773,14 +16245,14 @@
       </p:sp>
       <p:sp>
         <p:nvSpPr>
-          <p:cNvPr id="219" name="Text 36"/>
+          <p:cNvPr id="232" name="Text 36"/>
           <p:cNvSpPr/>
           <p:nvPr/>
         </p:nvSpPr>
         <p:spPr>
           <a:xfrm>
             <a:off x="777240" y="3977640"/>
-            <a:ext cx="2377080" cy="914040"/>
+            <a:ext cx="2376000" cy="912960"/>
           </a:xfrm>
           <a:prstGeom prst="rect">
             <a:avLst/>
@@ -14834,14 +16306,14 @@
       </p:sp>
       <p:sp>
         <p:nvSpPr>
-          <p:cNvPr id="220" name="Text 37"/>
+          <p:cNvPr id="233" name="Text 37"/>
           <p:cNvSpPr/>
           <p:nvPr/>
         </p:nvSpPr>
         <p:spPr>
           <a:xfrm>
             <a:off x="3063240" y="3977640"/>
-            <a:ext cx="8366400" cy="914040"/>
+            <a:ext cx="8365320" cy="912960"/>
           </a:xfrm>
           <a:prstGeom prst="rect">
             <a:avLst/>
@@ -14895,14 +16367,14 @@
       </p:sp>
       <p:sp>
         <p:nvSpPr>
-          <p:cNvPr id="221" name="Shape 38"/>
+          <p:cNvPr id="234" name="Shape 38"/>
           <p:cNvSpPr/>
           <p:nvPr/>
         </p:nvSpPr>
         <p:spPr>
           <a:xfrm>
             <a:off x="548640" y="5029200"/>
-            <a:ext cx="11091240" cy="914040"/>
+            <a:ext cx="11090160" cy="912960"/>
           </a:xfrm>
           <a:prstGeom prst="roundRect">
             <a:avLst>
@@ -14930,6 +16402,11 @@
             <a:noAutofit/>
           </a:bodyPr>
           <a:p>
+            <a:pPr>
+              <a:lnSpc>
+                <a:spcPct val="100000"/>
+              </a:lnSpc>
+            </a:pPr>
             <a:endParaRPr b="0" lang="en-US" sz="1800" strike="noStrike" u="none">
               <a:solidFill>
                 <a:srgbClr val="000000"/>
@@ -14943,14 +16420,14 @@
       </p:sp>
       <p:sp>
         <p:nvSpPr>
-          <p:cNvPr id="222" name="Text 39"/>
+          <p:cNvPr id="235" name="Text 39"/>
           <p:cNvSpPr/>
           <p:nvPr/>
         </p:nvSpPr>
         <p:spPr>
           <a:xfrm>
             <a:off x="777240" y="5029200"/>
-            <a:ext cx="2377080" cy="914040"/>
+            <a:ext cx="2376000" cy="912960"/>
           </a:xfrm>
           <a:prstGeom prst="rect">
             <a:avLst/>
@@ -15004,14 +16481,14 @@
       </p:sp>
       <p:sp>
         <p:nvSpPr>
-          <p:cNvPr id="223" name="Text 40"/>
+          <p:cNvPr id="236" name="Text 40"/>
           <p:cNvSpPr/>
           <p:nvPr/>
         </p:nvSpPr>
         <p:spPr>
           <a:xfrm>
             <a:off x="3063240" y="5029200"/>
-            <a:ext cx="8366400" cy="914040"/>
+            <a:ext cx="8365320" cy="912960"/>
           </a:xfrm>
           <a:prstGeom prst="rect">
             <a:avLst/>
@@ -15102,7 +16579,7 @@
       </p:grpSpPr>
       <p:sp>
         <p:nvSpPr>
-          <p:cNvPr id="224" name="Shape 0">
+          <p:cNvPr id="237" name="Shape 0">
             <a:hlinkClick r:id="rId1" action="ppaction://hlinksldjump"/>
           </p:cNvPr>
           <p:cNvSpPr/>
@@ -15111,7 +16588,7 @@
         <p:spPr>
           <a:xfrm>
             <a:off x="10314360" y="201240"/>
-            <a:ext cx="1599840" cy="365400"/>
+            <a:ext cx="1598760" cy="364320"/>
           </a:xfrm>
           <a:prstGeom prst="roundRect">
             <a:avLst>
@@ -15136,6 +16613,11 @@
             <a:noAutofit/>
           </a:bodyPr>
           <a:p>
+            <a:pPr>
+              <a:lnSpc>
+                <a:spcPct val="100000"/>
+              </a:lnSpc>
+            </a:pPr>
             <a:endParaRPr b="0" lang="en-US" sz="1800" strike="noStrike" u="none">
               <a:solidFill>
                 <a:srgbClr val="ffffff"/>
@@ -15149,14 +16631,14 @@
       </p:sp>
       <p:sp>
         <p:nvSpPr>
-          <p:cNvPr id="225" name="Text 1"/>
+          <p:cNvPr id="238" name="Text 1"/>
           <p:cNvSpPr/>
           <p:nvPr/>
         </p:nvSpPr>
         <p:spPr>
           <a:xfrm>
             <a:off x="10314360" y="201240"/>
-            <a:ext cx="1599840" cy="365400"/>
+            <a:ext cx="1598760" cy="364320"/>
           </a:xfrm>
           <a:prstGeom prst="rect">
             <a:avLst/>
@@ -15188,7 +16670,7 @@
             <a:r>
               <a:rPr b="1" lang="en-US" sz="1100" strike="noStrike" u="sng">
                 <a:solidFill>
-                  <a:srgbClr val="ffffff"/>
+                  <a:srgbClr val="f2f2f2"/>
                 </a:solidFill>
                 <a:effectLst/>
                 <a:uFillTx/>
@@ -15211,14 +16693,14 @@
       </p:sp>
       <p:sp>
         <p:nvSpPr>
-          <p:cNvPr id="226" name="Text 2"/>
+          <p:cNvPr id="239" name="Text 2"/>
           <p:cNvSpPr/>
           <p:nvPr/>
         </p:nvSpPr>
         <p:spPr>
           <a:xfrm>
             <a:off x="11365920" y="6492240"/>
-            <a:ext cx="639720" cy="273960"/>
+            <a:ext cx="638640" cy="272880"/>
           </a:xfrm>
           <a:prstGeom prst="rect">
             <a:avLst/>
@@ -15272,14 +16754,14 @@
       </p:sp>
       <p:sp>
         <p:nvSpPr>
-          <p:cNvPr id="227" name="Text 3"/>
+          <p:cNvPr id="240" name="Text 3"/>
           <p:cNvSpPr/>
           <p:nvPr/>
         </p:nvSpPr>
         <p:spPr>
           <a:xfrm>
             <a:off x="548640" y="320040"/>
-            <a:ext cx="7314840" cy="273960"/>
+            <a:ext cx="7313760" cy="272880"/>
           </a:xfrm>
           <a:prstGeom prst="rect">
             <a:avLst/>
@@ -15333,14 +16815,14 @@
       </p:sp>
       <p:sp>
         <p:nvSpPr>
-          <p:cNvPr id="228" name="Text 4"/>
+          <p:cNvPr id="241" name="Text 4"/>
           <p:cNvSpPr/>
           <p:nvPr/>
         </p:nvSpPr>
         <p:spPr>
           <a:xfrm>
             <a:off x="548640" y="567000"/>
-            <a:ext cx="8777880" cy="685440"/>
+            <a:ext cx="8776800" cy="684360"/>
           </a:xfrm>
           <a:prstGeom prst="rect">
             <a:avLst/>
@@ -15394,14 +16876,14 @@
       </p:sp>
       <p:sp>
         <p:nvSpPr>
-          <p:cNvPr id="229" name="Text 5"/>
+          <p:cNvPr id="242" name="Text 5"/>
           <p:cNvSpPr/>
           <p:nvPr/>
         </p:nvSpPr>
         <p:spPr>
           <a:xfrm>
             <a:off x="548640" y="1417320"/>
-            <a:ext cx="11063880" cy="548280"/>
+            <a:ext cx="11062800" cy="547200"/>
           </a:xfrm>
           <a:prstGeom prst="rect">
             <a:avLst/>
@@ -15455,14 +16937,14 @@
       </p:sp>
       <p:sp>
         <p:nvSpPr>
-          <p:cNvPr id="230" name="Shape 6"/>
+          <p:cNvPr id="243" name="Shape 6"/>
           <p:cNvSpPr/>
           <p:nvPr/>
         </p:nvSpPr>
         <p:spPr>
           <a:xfrm>
             <a:off x="548640" y="2331720"/>
-            <a:ext cx="2011680" cy="1371240"/>
+            <a:ext cx="2010600" cy="1370160"/>
           </a:xfrm>
           <a:prstGeom prst="roundRect">
             <a:avLst>
@@ -15487,6 +16969,11 @@
             <a:noAutofit/>
           </a:bodyPr>
           <a:p>
+            <a:pPr>
+              <a:lnSpc>
+                <a:spcPct val="100000"/>
+              </a:lnSpc>
+            </a:pPr>
             <a:endParaRPr b="0" lang="en-US" sz="1800" strike="noStrike" u="none">
               <a:solidFill>
                 <a:srgbClr val="ffffff"/>
@@ -15500,14 +16987,14 @@
       </p:sp>
       <p:sp>
         <p:nvSpPr>
-          <p:cNvPr id="231" name="Text 7"/>
+          <p:cNvPr id="244" name="Text 7"/>
           <p:cNvSpPr/>
           <p:nvPr/>
         </p:nvSpPr>
         <p:spPr>
           <a:xfrm>
             <a:off x="685800" y="2331720"/>
-            <a:ext cx="1828440" cy="1371240"/>
+            <a:ext cx="1827360" cy="1370160"/>
           </a:xfrm>
           <a:prstGeom prst="rect">
             <a:avLst/>
@@ -15591,14 +17078,14 @@
       </p:sp>
       <p:sp>
         <p:nvSpPr>
-          <p:cNvPr id="232" name="Text 8"/>
+          <p:cNvPr id="245" name="Text 8"/>
           <p:cNvSpPr/>
           <p:nvPr/>
         </p:nvSpPr>
         <p:spPr>
           <a:xfrm>
             <a:off x="2481480" y="2331720"/>
-            <a:ext cx="456840" cy="1371240"/>
+            <a:ext cx="455760" cy="1370160"/>
           </a:xfrm>
           <a:prstGeom prst="rect">
             <a:avLst/>
@@ -15652,14 +17139,14 @@
       </p:sp>
       <p:sp>
         <p:nvSpPr>
-          <p:cNvPr id="233" name="Shape 9"/>
+          <p:cNvPr id="246" name="Shape 9"/>
           <p:cNvSpPr/>
           <p:nvPr/>
         </p:nvSpPr>
         <p:spPr>
           <a:xfrm>
             <a:off x="2859840" y="2355120"/>
-            <a:ext cx="2103120" cy="1371600"/>
+            <a:ext cx="2102040" cy="1370520"/>
           </a:xfrm>
           <a:prstGeom prst="roundRect">
             <a:avLst>
@@ -15687,6 +17174,11 @@
             <a:noAutofit/>
           </a:bodyPr>
           <a:p>
+            <a:pPr>
+              <a:lnSpc>
+                <a:spcPct val="100000"/>
+              </a:lnSpc>
+            </a:pPr>
             <a:endParaRPr b="0" lang="en-US" sz="1800" strike="noStrike" u="none">
               <a:solidFill>
                 <a:srgbClr val="000000"/>
@@ -15700,14 +17192,14 @@
       </p:sp>
       <p:sp>
         <p:nvSpPr>
-          <p:cNvPr id="234" name="Text 10"/>
+          <p:cNvPr id="247" name="Text 10"/>
           <p:cNvSpPr/>
           <p:nvPr/>
         </p:nvSpPr>
         <p:spPr>
           <a:xfrm>
             <a:off x="3024360" y="2431080"/>
-            <a:ext cx="2002320" cy="319680"/>
+            <a:ext cx="2001240" cy="318600"/>
           </a:xfrm>
           <a:prstGeom prst="rect">
             <a:avLst/>
@@ -15761,14 +17253,14 @@
       </p:sp>
       <p:sp>
         <p:nvSpPr>
-          <p:cNvPr id="235" name="Text 11"/>
+          <p:cNvPr id="248" name="Text 11"/>
           <p:cNvSpPr/>
           <p:nvPr/>
         </p:nvSpPr>
         <p:spPr>
           <a:xfrm>
             <a:off x="3024360" y="2796840"/>
-            <a:ext cx="2002320" cy="959760"/>
+            <a:ext cx="2001240" cy="958680"/>
           </a:xfrm>
           <a:prstGeom prst="rect">
             <a:avLst/>
@@ -15822,14 +17314,14 @@
       </p:sp>
       <p:sp>
         <p:nvSpPr>
-          <p:cNvPr id="236" name="Shape 12"/>
+          <p:cNvPr id="249" name="Shape 12"/>
           <p:cNvSpPr/>
           <p:nvPr/>
         </p:nvSpPr>
         <p:spPr>
           <a:xfrm>
             <a:off x="5140080" y="2338560"/>
-            <a:ext cx="2103120" cy="1371600"/>
+            <a:ext cx="2102040" cy="1370520"/>
           </a:xfrm>
           <a:prstGeom prst="roundRect">
             <a:avLst>
@@ -15857,6 +17349,11 @@
             <a:noAutofit/>
           </a:bodyPr>
           <a:p>
+            <a:pPr>
+              <a:lnSpc>
+                <a:spcPct val="100000"/>
+              </a:lnSpc>
+            </a:pPr>
             <a:endParaRPr b="0" lang="en-US" sz="1800" strike="noStrike" u="none">
               <a:solidFill>
                 <a:srgbClr val="000000"/>
@@ -15870,14 +17367,14 @@
       </p:sp>
       <p:sp>
         <p:nvSpPr>
-          <p:cNvPr id="237" name="Text 13"/>
+          <p:cNvPr id="250" name="Text 13"/>
           <p:cNvSpPr/>
           <p:nvPr/>
         </p:nvSpPr>
         <p:spPr>
           <a:xfrm>
             <a:off x="5304600" y="2503080"/>
-            <a:ext cx="2002320" cy="319680"/>
+            <a:ext cx="2001240" cy="318600"/>
           </a:xfrm>
           <a:prstGeom prst="rect">
             <a:avLst/>
@@ -15931,14 +17428,14 @@
       </p:sp>
       <p:sp>
         <p:nvSpPr>
-          <p:cNvPr id="238" name="Text 14"/>
+          <p:cNvPr id="251" name="Text 14"/>
           <p:cNvSpPr/>
           <p:nvPr/>
         </p:nvSpPr>
         <p:spPr>
           <a:xfrm>
             <a:off x="5304600" y="2868840"/>
-            <a:ext cx="2002320" cy="959760"/>
+            <a:ext cx="2001240" cy="958680"/>
           </a:xfrm>
           <a:prstGeom prst="rect">
             <a:avLst/>
@@ -15992,14 +17489,14 @@
       </p:sp>
       <p:sp>
         <p:nvSpPr>
-          <p:cNvPr id="239" name="Shape 15"/>
+          <p:cNvPr id="252" name="Shape 15"/>
           <p:cNvSpPr/>
           <p:nvPr/>
         </p:nvSpPr>
         <p:spPr>
           <a:xfrm>
             <a:off x="7384320" y="2338560"/>
-            <a:ext cx="2103120" cy="1371600"/>
+            <a:ext cx="2102040" cy="1370520"/>
           </a:xfrm>
           <a:prstGeom prst="roundRect">
             <a:avLst>
@@ -16027,6 +17524,11 @@
             <a:noAutofit/>
           </a:bodyPr>
           <a:p>
+            <a:pPr>
+              <a:lnSpc>
+                <a:spcPct val="100000"/>
+              </a:lnSpc>
+            </a:pPr>
             <a:endParaRPr b="0" lang="en-US" sz="1800" strike="noStrike" u="none">
               <a:solidFill>
                 <a:srgbClr val="000000"/>
@@ -16040,14 +17542,14 @@
       </p:sp>
       <p:sp>
         <p:nvSpPr>
-          <p:cNvPr id="240" name="Text 16"/>
+          <p:cNvPr id="253" name="Text 16"/>
           <p:cNvSpPr/>
           <p:nvPr/>
         </p:nvSpPr>
         <p:spPr>
           <a:xfrm>
             <a:off x="7549200" y="2503080"/>
-            <a:ext cx="2002320" cy="319680"/>
+            <a:ext cx="2001240" cy="318600"/>
           </a:xfrm>
           <a:prstGeom prst="rect">
             <a:avLst/>
@@ -16101,14 +17603,14 @@
       </p:sp>
       <p:sp>
         <p:nvSpPr>
-          <p:cNvPr id="241" name="Text 17"/>
+          <p:cNvPr id="254" name="Text 17"/>
           <p:cNvSpPr/>
           <p:nvPr/>
         </p:nvSpPr>
         <p:spPr>
           <a:xfrm>
             <a:off x="7549200" y="2868840"/>
-            <a:ext cx="2002320" cy="959760"/>
+            <a:ext cx="2001240" cy="958680"/>
           </a:xfrm>
           <a:prstGeom prst="rect">
             <a:avLst/>
@@ -16162,14 +17664,14 @@
       </p:sp>
       <p:sp>
         <p:nvSpPr>
-          <p:cNvPr id="242" name="Text 18"/>
+          <p:cNvPr id="255" name="Text 18"/>
           <p:cNvSpPr/>
           <p:nvPr/>
         </p:nvSpPr>
         <p:spPr>
           <a:xfrm>
             <a:off x="10049760" y="2194560"/>
-            <a:ext cx="456840" cy="1645560"/>
+            <a:ext cx="455760" cy="1644480"/>
           </a:xfrm>
           <a:prstGeom prst="rect">
             <a:avLst/>
@@ -16223,14 +17725,14 @@
       </p:sp>
       <p:sp>
         <p:nvSpPr>
-          <p:cNvPr id="243" name="Shape 19"/>
+          <p:cNvPr id="256" name="Shape 19"/>
           <p:cNvSpPr/>
           <p:nvPr/>
         </p:nvSpPr>
         <p:spPr>
           <a:xfrm>
             <a:off x="9583560" y="2331720"/>
-            <a:ext cx="2011680" cy="1371240"/>
+            <a:ext cx="2010600" cy="1370160"/>
           </a:xfrm>
           <a:prstGeom prst="roundRect">
             <a:avLst>
@@ -16255,6 +17757,11 @@
             <a:noAutofit/>
           </a:bodyPr>
           <a:p>
+            <a:pPr>
+              <a:lnSpc>
+                <a:spcPct val="100000"/>
+              </a:lnSpc>
+            </a:pPr>
             <a:endParaRPr b="0" lang="en-US" sz="1800" strike="noStrike" u="none">
               <a:solidFill>
                 <a:srgbClr val="000000"/>
@@ -16268,14 +17775,14 @@
       </p:sp>
       <p:sp>
         <p:nvSpPr>
-          <p:cNvPr id="244" name="Text 20"/>
+          <p:cNvPr id="257" name="Text 20"/>
           <p:cNvSpPr/>
           <p:nvPr/>
         </p:nvSpPr>
         <p:spPr>
           <a:xfrm>
             <a:off x="9583560" y="2331720"/>
-            <a:ext cx="1462680" cy="1371240"/>
+            <a:ext cx="1461600" cy="1370160"/>
           </a:xfrm>
           <a:prstGeom prst="rect">
             <a:avLst/>
@@ -16359,14 +17866,14 @@
       </p:sp>
       <p:sp>
         <p:nvSpPr>
-          <p:cNvPr id="245" name="Shape 21"/>
+          <p:cNvPr id="258" name="Shape 21"/>
           <p:cNvSpPr/>
           <p:nvPr/>
         </p:nvSpPr>
         <p:spPr>
           <a:xfrm>
             <a:off x="548640" y="4251960"/>
-            <a:ext cx="11091240" cy="2011320"/>
+            <a:ext cx="11090160" cy="2010240"/>
           </a:xfrm>
           <a:prstGeom prst="roundRect">
             <a:avLst>
@@ -16391,6 +17898,11 @@
             <a:noAutofit/>
           </a:bodyPr>
           <a:p>
+            <a:pPr>
+              <a:lnSpc>
+                <a:spcPct val="100000"/>
+              </a:lnSpc>
+            </a:pPr>
             <a:endParaRPr b="0" lang="en-US" sz="1800" strike="noStrike" u="none">
               <a:solidFill>
                 <a:srgbClr val="ffffff"/>
@@ -16404,14 +17916,14 @@
       </p:sp>
       <p:sp>
         <p:nvSpPr>
-          <p:cNvPr id="246" name="Text 22"/>
+          <p:cNvPr id="259" name="Text 22"/>
           <p:cNvSpPr/>
           <p:nvPr/>
         </p:nvSpPr>
         <p:spPr>
           <a:xfrm>
             <a:off x="822960" y="4434840"/>
-            <a:ext cx="10515240" cy="319680"/>
+            <a:ext cx="10514160" cy="318600"/>
           </a:xfrm>
           <a:prstGeom prst="rect">
             <a:avLst/>
@@ -16465,14 +17977,14 @@
       </p:sp>
       <p:sp>
         <p:nvSpPr>
-          <p:cNvPr id="247" name="Text 23"/>
+          <p:cNvPr id="260" name="Text 23"/>
           <p:cNvSpPr/>
           <p:nvPr/>
         </p:nvSpPr>
         <p:spPr>
           <a:xfrm>
             <a:off x="822960" y="4800600"/>
-            <a:ext cx="10515240" cy="1371240"/>
+            <a:ext cx="10514160" cy="1370160"/>
           </a:xfrm>
           <a:prstGeom prst="rect">
             <a:avLst/>
@@ -16563,7 +18075,7 @@
       </p:grpSpPr>
       <p:sp>
         <p:nvSpPr>
-          <p:cNvPr id="248" name="Shape 0">
+          <p:cNvPr id="261" name="Shape 0">
             <a:hlinkClick r:id="rId1" action="ppaction://hlinksldjump"/>
           </p:cNvPr>
           <p:cNvSpPr/>
@@ -16572,7 +18084,7 @@
         <p:spPr>
           <a:xfrm>
             <a:off x="10314360" y="201240"/>
-            <a:ext cx="1599840" cy="365400"/>
+            <a:ext cx="1598760" cy="364320"/>
           </a:xfrm>
           <a:prstGeom prst="roundRect">
             <a:avLst>
@@ -16597,6 +18109,11 @@
             <a:noAutofit/>
           </a:bodyPr>
           <a:p>
+            <a:pPr>
+              <a:lnSpc>
+                <a:spcPct val="100000"/>
+              </a:lnSpc>
+            </a:pPr>
             <a:endParaRPr b="0" lang="en-US" sz="1800" strike="noStrike" u="none">
               <a:solidFill>
                 <a:srgbClr val="ffffff"/>
@@ -16610,14 +18127,14 @@
       </p:sp>
       <p:sp>
         <p:nvSpPr>
-          <p:cNvPr id="249" name="Text 1"/>
+          <p:cNvPr id="262" name="Text 1"/>
           <p:cNvSpPr/>
           <p:nvPr/>
         </p:nvSpPr>
         <p:spPr>
           <a:xfrm>
             <a:off x="10314360" y="201240"/>
-            <a:ext cx="1599840" cy="365400"/>
+            <a:ext cx="1598760" cy="364320"/>
           </a:xfrm>
           <a:prstGeom prst="rect">
             <a:avLst/>
@@ -16649,7 +18166,7 @@
             <a:r>
               <a:rPr b="1" lang="en-US" sz="1100" strike="noStrike" u="sng">
                 <a:solidFill>
-                  <a:srgbClr val="ffffff"/>
+                  <a:srgbClr val="f2f2f2"/>
                 </a:solidFill>
                 <a:effectLst/>
                 <a:uFillTx/>
@@ -16672,14 +18189,14 @@
       </p:sp>
       <p:sp>
         <p:nvSpPr>
-          <p:cNvPr id="250" name="Text 2"/>
+          <p:cNvPr id="263" name="Text 2"/>
           <p:cNvSpPr/>
           <p:nvPr/>
         </p:nvSpPr>
         <p:spPr>
           <a:xfrm>
             <a:off x="11365920" y="6492240"/>
-            <a:ext cx="639720" cy="273960"/>
+            <a:ext cx="638640" cy="272880"/>
           </a:xfrm>
           <a:prstGeom prst="rect">
             <a:avLst/>
@@ -16733,14 +18250,14 @@
       </p:sp>
       <p:sp>
         <p:nvSpPr>
-          <p:cNvPr id="251" name="Text 3"/>
+          <p:cNvPr id="264" name="Text 3"/>
           <p:cNvSpPr/>
           <p:nvPr/>
         </p:nvSpPr>
         <p:spPr>
           <a:xfrm>
             <a:off x="548640" y="320040"/>
-            <a:ext cx="7314840" cy="273960"/>
+            <a:ext cx="7313760" cy="272880"/>
           </a:xfrm>
           <a:prstGeom prst="rect">
             <a:avLst/>
@@ -16794,14 +18311,14 @@
       </p:sp>
       <p:sp>
         <p:nvSpPr>
-          <p:cNvPr id="252" name="Text 4"/>
+          <p:cNvPr id="265" name="Text 4"/>
           <p:cNvSpPr/>
           <p:nvPr/>
         </p:nvSpPr>
         <p:spPr>
           <a:xfrm>
             <a:off x="548640" y="567000"/>
-            <a:ext cx="8777880" cy="685440"/>
+            <a:ext cx="8776800" cy="684360"/>
           </a:xfrm>
           <a:prstGeom prst="rect">
             <a:avLst/>
@@ -16855,14 +18372,14 @@
       </p:sp>
       <p:sp>
         <p:nvSpPr>
-          <p:cNvPr id="253" name="Text 5"/>
+          <p:cNvPr id="266" name="Text 5"/>
           <p:cNvSpPr/>
           <p:nvPr/>
         </p:nvSpPr>
         <p:spPr>
           <a:xfrm>
             <a:off x="548640" y="1371600"/>
-            <a:ext cx="11063880" cy="548280"/>
+            <a:ext cx="11062800" cy="547200"/>
           </a:xfrm>
           <a:prstGeom prst="rect">
             <a:avLst/>
@@ -16916,14 +18433,14 @@
       </p:sp>
       <p:sp>
         <p:nvSpPr>
-          <p:cNvPr id="254" name="Shape 6"/>
+          <p:cNvPr id="267" name="Shape 6"/>
           <p:cNvSpPr/>
           <p:nvPr/>
         </p:nvSpPr>
         <p:spPr>
           <a:xfrm>
             <a:off x="548640" y="2057400"/>
-            <a:ext cx="11091240" cy="338040"/>
+            <a:ext cx="11090160" cy="336960"/>
           </a:xfrm>
           <a:prstGeom prst="roundRect">
             <a:avLst>
@@ -16951,6 +18468,11 @@
             <a:noAutofit/>
           </a:bodyPr>
           <a:p>
+            <a:pPr>
+              <a:lnSpc>
+                <a:spcPct val="100000"/>
+              </a:lnSpc>
+            </a:pPr>
             <a:endParaRPr b="0" lang="en-US" sz="1800" strike="noStrike" u="none">
               <a:solidFill>
                 <a:srgbClr val="000000"/>
@@ -16964,14 +18486,14 @@
       </p:sp>
       <p:sp>
         <p:nvSpPr>
-          <p:cNvPr id="255" name="Text 7"/>
+          <p:cNvPr id="268" name="Text 7"/>
           <p:cNvSpPr/>
           <p:nvPr/>
         </p:nvSpPr>
         <p:spPr>
           <a:xfrm>
             <a:off x="621720" y="2057400"/>
-            <a:ext cx="292320" cy="338040"/>
+            <a:ext cx="291240" cy="336960"/>
           </a:xfrm>
           <a:prstGeom prst="rect">
             <a:avLst/>
@@ -17025,14 +18547,14 @@
       </p:sp>
       <p:sp>
         <p:nvSpPr>
-          <p:cNvPr id="256" name="Text 8"/>
+          <p:cNvPr id="269" name="Text 8"/>
           <p:cNvSpPr/>
           <p:nvPr/>
         </p:nvSpPr>
         <p:spPr>
           <a:xfrm>
             <a:off x="1005840" y="2057400"/>
-            <a:ext cx="8137800" cy="338040"/>
+            <a:ext cx="8136720" cy="336960"/>
           </a:xfrm>
           <a:prstGeom prst="rect">
             <a:avLst/>
@@ -17098,14 +18620,14 @@
       </p:sp>
       <p:sp>
         <p:nvSpPr>
-          <p:cNvPr id="257" name="Text 9"/>
+          <p:cNvPr id="270" name="Text 9"/>
           <p:cNvSpPr/>
           <p:nvPr/>
         </p:nvSpPr>
         <p:spPr>
           <a:xfrm>
             <a:off x="9537120" y="2057400"/>
-            <a:ext cx="1416960" cy="338040"/>
+            <a:ext cx="1415880" cy="336960"/>
           </a:xfrm>
           <a:prstGeom prst="rect">
             <a:avLst/>
@@ -17159,14 +18681,14 @@
       </p:sp>
       <p:sp>
         <p:nvSpPr>
-          <p:cNvPr id="258" name="Shape 10"/>
+          <p:cNvPr id="271" name="Shape 10"/>
           <p:cNvSpPr/>
           <p:nvPr/>
         </p:nvSpPr>
         <p:spPr>
           <a:xfrm>
             <a:off x="548640" y="2459880"/>
-            <a:ext cx="11091240" cy="338040"/>
+            <a:ext cx="11090160" cy="336960"/>
           </a:xfrm>
           <a:prstGeom prst="roundRect">
             <a:avLst>
@@ -17194,6 +18716,11 @@
             <a:noAutofit/>
           </a:bodyPr>
           <a:p>
+            <a:pPr>
+              <a:lnSpc>
+                <a:spcPct val="100000"/>
+              </a:lnSpc>
+            </a:pPr>
             <a:endParaRPr b="0" lang="en-US" sz="1800" strike="noStrike" u="none">
               <a:solidFill>
                 <a:srgbClr val="000000"/>
@@ -17207,14 +18734,14 @@
       </p:sp>
       <p:sp>
         <p:nvSpPr>
-          <p:cNvPr id="259" name="Text 11"/>
+          <p:cNvPr id="272" name="Text 11"/>
           <p:cNvSpPr/>
           <p:nvPr/>
         </p:nvSpPr>
         <p:spPr>
           <a:xfrm>
             <a:off x="621720" y="2459880"/>
-            <a:ext cx="292320" cy="338040"/>
+            <a:ext cx="291240" cy="336960"/>
           </a:xfrm>
           <a:prstGeom prst="rect">
             <a:avLst/>
@@ -17268,14 +18795,14 @@
       </p:sp>
       <p:sp>
         <p:nvSpPr>
-          <p:cNvPr id="260" name="Text 12"/>
+          <p:cNvPr id="273" name="Text 12"/>
           <p:cNvSpPr/>
           <p:nvPr/>
         </p:nvSpPr>
         <p:spPr>
           <a:xfrm>
             <a:off x="1005840" y="2459880"/>
-            <a:ext cx="8137800" cy="338040"/>
+            <a:ext cx="8136720" cy="336960"/>
           </a:xfrm>
           <a:prstGeom prst="rect">
             <a:avLst/>
@@ -17341,14 +18868,14 @@
       </p:sp>
       <p:sp>
         <p:nvSpPr>
-          <p:cNvPr id="261" name="Text 13"/>
+          <p:cNvPr id="274" name="Text 13"/>
           <p:cNvSpPr/>
           <p:nvPr/>
         </p:nvSpPr>
         <p:spPr>
           <a:xfrm>
             <a:off x="9537120" y="2459880"/>
-            <a:ext cx="1416960" cy="338040"/>
+            <a:ext cx="1415880" cy="336960"/>
           </a:xfrm>
           <a:prstGeom prst="rect">
             <a:avLst/>
@@ -17402,14 +18929,14 @@
       </p:sp>
       <p:sp>
         <p:nvSpPr>
-          <p:cNvPr id="262" name="Shape 14"/>
+          <p:cNvPr id="275" name="Shape 14"/>
           <p:cNvSpPr/>
           <p:nvPr/>
         </p:nvSpPr>
         <p:spPr>
           <a:xfrm>
             <a:off x="548640" y="2862000"/>
-            <a:ext cx="11091240" cy="338040"/>
+            <a:ext cx="11090160" cy="336960"/>
           </a:xfrm>
           <a:prstGeom prst="roundRect">
             <a:avLst>
@@ -17437,6 +18964,11 @@
             <a:noAutofit/>
           </a:bodyPr>
           <a:p>
+            <a:pPr>
+              <a:lnSpc>
+                <a:spcPct val="100000"/>
+              </a:lnSpc>
+            </a:pPr>
             <a:endParaRPr b="0" lang="en-US" sz="1800" strike="noStrike" u="none">
               <a:solidFill>
                 <a:srgbClr val="000000"/>
@@ -17450,14 +18982,14 @@
       </p:sp>
       <p:sp>
         <p:nvSpPr>
-          <p:cNvPr id="263" name="Text 15"/>
+          <p:cNvPr id="276" name="Text 15"/>
           <p:cNvSpPr/>
           <p:nvPr/>
         </p:nvSpPr>
         <p:spPr>
           <a:xfrm>
             <a:off x="621720" y="2862000"/>
-            <a:ext cx="292320" cy="338040"/>
+            <a:ext cx="291240" cy="336960"/>
           </a:xfrm>
           <a:prstGeom prst="rect">
             <a:avLst/>
@@ -17511,14 +19043,14 @@
       </p:sp>
       <p:sp>
         <p:nvSpPr>
-          <p:cNvPr id="264" name="Text 16"/>
+          <p:cNvPr id="277" name="Text 16"/>
           <p:cNvSpPr/>
           <p:nvPr/>
         </p:nvSpPr>
         <p:spPr>
           <a:xfrm>
             <a:off x="1005840" y="2862000"/>
-            <a:ext cx="8137800" cy="338040"/>
+            <a:ext cx="8136720" cy="336960"/>
           </a:xfrm>
           <a:prstGeom prst="rect">
             <a:avLst/>
@@ -17584,14 +19116,14 @@
       </p:sp>
       <p:sp>
         <p:nvSpPr>
-          <p:cNvPr id="265" name="Text 17"/>
+          <p:cNvPr id="278" name="Text 17"/>
           <p:cNvSpPr/>
           <p:nvPr/>
         </p:nvSpPr>
         <p:spPr>
           <a:xfrm>
             <a:off x="9537120" y="2862000"/>
-            <a:ext cx="1416960" cy="338040"/>
+            <a:ext cx="1415880" cy="336960"/>
           </a:xfrm>
           <a:prstGeom prst="rect">
             <a:avLst/>
@@ -17645,14 +19177,14 @@
       </p:sp>
       <p:sp>
         <p:nvSpPr>
-          <p:cNvPr id="266" name="Shape 18"/>
+          <p:cNvPr id="279" name="Shape 18"/>
           <p:cNvSpPr/>
           <p:nvPr/>
         </p:nvSpPr>
         <p:spPr>
           <a:xfrm>
             <a:off x="548640" y="3264480"/>
-            <a:ext cx="11091240" cy="338040"/>
+            <a:ext cx="11090160" cy="336960"/>
           </a:xfrm>
           <a:prstGeom prst="roundRect">
             <a:avLst>
@@ -17680,6 +19212,11 @@
             <a:noAutofit/>
           </a:bodyPr>
           <a:p>
+            <a:pPr>
+              <a:lnSpc>
+                <a:spcPct val="100000"/>
+              </a:lnSpc>
+            </a:pPr>
             <a:endParaRPr b="0" lang="en-US" sz="1800" strike="noStrike" u="none">
               <a:solidFill>
                 <a:srgbClr val="000000"/>
@@ -17693,14 +19230,14 @@
       </p:sp>
       <p:sp>
         <p:nvSpPr>
-          <p:cNvPr id="267" name="Text 19"/>
+          <p:cNvPr id="280" name="Text 19"/>
           <p:cNvSpPr/>
           <p:nvPr/>
         </p:nvSpPr>
         <p:spPr>
           <a:xfrm>
             <a:off x="621720" y="3264480"/>
-            <a:ext cx="292320" cy="338040"/>
+            <a:ext cx="291240" cy="336960"/>
           </a:xfrm>
           <a:prstGeom prst="rect">
             <a:avLst/>
@@ -17754,14 +19291,14 @@
       </p:sp>
       <p:sp>
         <p:nvSpPr>
-          <p:cNvPr id="268" name="Text 20"/>
+          <p:cNvPr id="281" name="Text 20"/>
           <p:cNvSpPr/>
           <p:nvPr/>
         </p:nvSpPr>
         <p:spPr>
           <a:xfrm>
             <a:off x="1005840" y="3264480"/>
-            <a:ext cx="8137800" cy="338040"/>
+            <a:ext cx="8136720" cy="336960"/>
           </a:xfrm>
           <a:prstGeom prst="rect">
             <a:avLst/>
@@ -17827,14 +19364,14 @@
       </p:sp>
       <p:sp>
         <p:nvSpPr>
-          <p:cNvPr id="269" name="Shape 21"/>
+          <p:cNvPr id="282" name="Shape 21"/>
           <p:cNvSpPr/>
           <p:nvPr/>
         </p:nvSpPr>
         <p:spPr>
           <a:xfrm>
             <a:off x="548640" y="3666600"/>
-            <a:ext cx="11091240" cy="338040"/>
+            <a:ext cx="11090160" cy="336960"/>
           </a:xfrm>
           <a:prstGeom prst="roundRect">
             <a:avLst>
@@ -17862,6 +19399,11 @@
             <a:noAutofit/>
           </a:bodyPr>
           <a:p>
+            <a:pPr>
+              <a:lnSpc>
+                <a:spcPct val="100000"/>
+              </a:lnSpc>
+            </a:pPr>
             <a:endParaRPr b="0" lang="en-US" sz="1800" strike="noStrike" u="none">
               <a:solidFill>
                 <a:srgbClr val="000000"/>
@@ -17875,14 +19417,14 @@
       </p:sp>
       <p:sp>
         <p:nvSpPr>
-          <p:cNvPr id="270" name="Text 22"/>
+          <p:cNvPr id="283" name="Text 22"/>
           <p:cNvSpPr/>
           <p:nvPr/>
         </p:nvSpPr>
         <p:spPr>
           <a:xfrm>
             <a:off x="621720" y="3666600"/>
-            <a:ext cx="292320" cy="338040"/>
+            <a:ext cx="291240" cy="336960"/>
           </a:xfrm>
           <a:prstGeom prst="rect">
             <a:avLst/>
@@ -17936,14 +19478,14 @@
       </p:sp>
       <p:sp>
         <p:nvSpPr>
-          <p:cNvPr id="271" name="Text 23"/>
+          <p:cNvPr id="284" name="Text 23"/>
           <p:cNvSpPr/>
           <p:nvPr/>
         </p:nvSpPr>
         <p:spPr>
           <a:xfrm>
             <a:off x="1005840" y="3666600"/>
-            <a:ext cx="8137800" cy="338040"/>
+            <a:ext cx="8136720" cy="336960"/>
           </a:xfrm>
           <a:prstGeom prst="rect">
             <a:avLst/>
@@ -18009,14 +19551,14 @@
       </p:sp>
       <p:sp>
         <p:nvSpPr>
-          <p:cNvPr id="272" name="Shape 24"/>
+          <p:cNvPr id="285" name="Shape 24"/>
           <p:cNvSpPr/>
           <p:nvPr/>
         </p:nvSpPr>
         <p:spPr>
           <a:xfrm>
             <a:off x="548640" y="4069080"/>
-            <a:ext cx="11091240" cy="338040"/>
+            <a:ext cx="11090160" cy="336960"/>
           </a:xfrm>
           <a:prstGeom prst="roundRect">
             <a:avLst>
@@ -18044,6 +19586,11 @@
             <a:noAutofit/>
           </a:bodyPr>
           <a:p>
+            <a:pPr>
+              <a:lnSpc>
+                <a:spcPct val="100000"/>
+              </a:lnSpc>
+            </a:pPr>
             <a:endParaRPr b="0" lang="en-US" sz="1800" strike="noStrike" u="none">
               <a:solidFill>
                 <a:srgbClr val="000000"/>
@@ -18057,14 +19604,14 @@
       </p:sp>
       <p:sp>
         <p:nvSpPr>
-          <p:cNvPr id="273" name="Text 25"/>
+          <p:cNvPr id="286" name="Text 25"/>
           <p:cNvSpPr/>
           <p:nvPr/>
         </p:nvSpPr>
         <p:spPr>
           <a:xfrm>
             <a:off x="621720" y="4069080"/>
-            <a:ext cx="292320" cy="338040"/>
+            <a:ext cx="291240" cy="336960"/>
           </a:xfrm>
           <a:prstGeom prst="rect">
             <a:avLst/>
@@ -18118,14 +19665,14 @@
       </p:sp>
       <p:sp>
         <p:nvSpPr>
-          <p:cNvPr id="274" name="Text 26"/>
+          <p:cNvPr id="287" name="Text 26"/>
           <p:cNvSpPr/>
           <p:nvPr/>
         </p:nvSpPr>
         <p:spPr>
           <a:xfrm>
             <a:off x="1005840" y="4069080"/>
-            <a:ext cx="8137800" cy="338040"/>
+            <a:ext cx="8136720" cy="336960"/>
           </a:xfrm>
           <a:prstGeom prst="rect">
             <a:avLst/>
@@ -18191,14 +19738,14 @@
       </p:sp>
       <p:sp>
         <p:nvSpPr>
-          <p:cNvPr id="275" name="Shape 27"/>
+          <p:cNvPr id="288" name="Shape 27"/>
           <p:cNvSpPr/>
           <p:nvPr/>
         </p:nvSpPr>
         <p:spPr>
           <a:xfrm>
             <a:off x="548640" y="4471560"/>
-            <a:ext cx="11091240" cy="338040"/>
+            <a:ext cx="11090160" cy="336960"/>
           </a:xfrm>
           <a:prstGeom prst="roundRect">
             <a:avLst>
@@ -18226,6 +19773,11 @@
             <a:noAutofit/>
           </a:bodyPr>
           <a:p>
+            <a:pPr>
+              <a:lnSpc>
+                <a:spcPct val="100000"/>
+              </a:lnSpc>
+            </a:pPr>
             <a:endParaRPr b="0" lang="en-US" sz="1800" strike="noStrike" u="none">
               <a:solidFill>
                 <a:srgbClr val="000000"/>
@@ -18239,14 +19791,14 @@
       </p:sp>
       <p:sp>
         <p:nvSpPr>
-          <p:cNvPr id="276" name="Text 28"/>
+          <p:cNvPr id="289" name="Text 28"/>
           <p:cNvSpPr/>
           <p:nvPr/>
         </p:nvSpPr>
         <p:spPr>
           <a:xfrm>
             <a:off x="621720" y="4471560"/>
-            <a:ext cx="292320" cy="338040"/>
+            <a:ext cx="291240" cy="336960"/>
           </a:xfrm>
           <a:prstGeom prst="rect">
             <a:avLst/>
@@ -18300,14 +19852,14 @@
       </p:sp>
       <p:sp>
         <p:nvSpPr>
-          <p:cNvPr id="277" name="Text 29"/>
+          <p:cNvPr id="290" name="Text 29"/>
           <p:cNvSpPr/>
           <p:nvPr/>
         </p:nvSpPr>
         <p:spPr>
           <a:xfrm>
             <a:off x="1005840" y="4471560"/>
-            <a:ext cx="8137800" cy="338040"/>
+            <a:ext cx="8136720" cy="336960"/>
           </a:xfrm>
           <a:prstGeom prst="rect">
             <a:avLst/>
@@ -18373,14 +19925,14 @@
       </p:sp>
       <p:sp>
         <p:nvSpPr>
-          <p:cNvPr id="278" name="Shape 30"/>
+          <p:cNvPr id="291" name="Shape 30"/>
           <p:cNvSpPr/>
           <p:nvPr/>
         </p:nvSpPr>
         <p:spPr>
           <a:xfrm>
             <a:off x="548640" y="4873680"/>
-            <a:ext cx="11091240" cy="338040"/>
+            <a:ext cx="11090160" cy="336960"/>
           </a:xfrm>
           <a:prstGeom prst="roundRect">
             <a:avLst>
@@ -18408,6 +19960,11 @@
             <a:noAutofit/>
           </a:bodyPr>
           <a:p>
+            <a:pPr>
+              <a:lnSpc>
+                <a:spcPct val="100000"/>
+              </a:lnSpc>
+            </a:pPr>
             <a:endParaRPr b="0" lang="en-US" sz="1800" strike="noStrike" u="none">
               <a:solidFill>
                 <a:srgbClr val="000000"/>
@@ -18421,14 +19978,14 @@
       </p:sp>
       <p:sp>
         <p:nvSpPr>
-          <p:cNvPr id="279" name="Text 31"/>
+          <p:cNvPr id="292" name="Text 31"/>
           <p:cNvSpPr/>
           <p:nvPr/>
         </p:nvSpPr>
         <p:spPr>
           <a:xfrm>
             <a:off x="621720" y="4873680"/>
-            <a:ext cx="292320" cy="338040"/>
+            <a:ext cx="291240" cy="336960"/>
           </a:xfrm>
           <a:prstGeom prst="rect">
             <a:avLst/>
@@ -18482,14 +20039,14 @@
       </p:sp>
       <p:sp>
         <p:nvSpPr>
-          <p:cNvPr id="280" name="Text 32"/>
+          <p:cNvPr id="293" name="Text 32"/>
           <p:cNvSpPr/>
           <p:nvPr/>
         </p:nvSpPr>
         <p:spPr>
           <a:xfrm>
             <a:off x="1005840" y="4873680"/>
-            <a:ext cx="8137800" cy="338040"/>
+            <a:ext cx="8136720" cy="336960"/>
           </a:xfrm>
           <a:prstGeom prst="rect">
             <a:avLst/>
@@ -18555,14 +20112,14 @@
       </p:sp>
       <p:sp>
         <p:nvSpPr>
-          <p:cNvPr id="281" name="Shape 33"/>
+          <p:cNvPr id="294" name="Shape 33"/>
           <p:cNvSpPr/>
           <p:nvPr/>
         </p:nvSpPr>
         <p:spPr>
           <a:xfrm>
             <a:off x="548640" y="5276160"/>
-            <a:ext cx="11091240" cy="338040"/>
+            <a:ext cx="11090160" cy="336960"/>
           </a:xfrm>
           <a:prstGeom prst="roundRect">
             <a:avLst>
@@ -18590,6 +20147,11 @@
             <a:noAutofit/>
           </a:bodyPr>
           <a:p>
+            <a:pPr>
+              <a:lnSpc>
+                <a:spcPct val="100000"/>
+              </a:lnSpc>
+            </a:pPr>
             <a:endParaRPr b="0" lang="en-US" sz="1800" strike="noStrike" u="none">
               <a:solidFill>
                 <a:srgbClr val="000000"/>
@@ -18603,14 +20165,14 @@
       </p:sp>
       <p:sp>
         <p:nvSpPr>
-          <p:cNvPr id="282" name="Text 34"/>
+          <p:cNvPr id="295" name="Text 34"/>
           <p:cNvSpPr/>
           <p:nvPr/>
         </p:nvSpPr>
         <p:spPr>
           <a:xfrm>
             <a:off x="621720" y="5276160"/>
-            <a:ext cx="292320" cy="338040"/>
+            <a:ext cx="291240" cy="336960"/>
           </a:xfrm>
           <a:prstGeom prst="rect">
             <a:avLst/>
@@ -18664,14 +20226,14 @@
       </p:sp>
       <p:sp>
         <p:nvSpPr>
-          <p:cNvPr id="283" name="Text 35"/>
+          <p:cNvPr id="296" name="Text 35"/>
           <p:cNvSpPr/>
           <p:nvPr/>
         </p:nvSpPr>
         <p:spPr>
           <a:xfrm>
             <a:off x="1005840" y="5276160"/>
-            <a:ext cx="8137800" cy="338040"/>
+            <a:ext cx="8136720" cy="336960"/>
           </a:xfrm>
           <a:prstGeom prst="rect">
             <a:avLst/>
@@ -18737,14 +20299,14 @@
       </p:sp>
       <p:sp>
         <p:nvSpPr>
-          <p:cNvPr id="284" name="Text 36"/>
+          <p:cNvPr id="297" name="Text 36"/>
           <p:cNvSpPr/>
           <p:nvPr/>
         </p:nvSpPr>
         <p:spPr>
           <a:xfrm>
             <a:off x="9537120" y="5276160"/>
-            <a:ext cx="1416960" cy="338040"/>
+            <a:ext cx="1415880" cy="336960"/>
           </a:xfrm>
           <a:prstGeom prst="rect">
             <a:avLst/>
@@ -18798,14 +20360,14 @@
       </p:sp>
       <p:sp>
         <p:nvSpPr>
-          <p:cNvPr id="285" name="Shape 37"/>
+          <p:cNvPr id="298" name="Shape 37"/>
           <p:cNvSpPr/>
           <p:nvPr/>
         </p:nvSpPr>
         <p:spPr>
           <a:xfrm>
             <a:off x="548640" y="5934600"/>
-            <a:ext cx="11091240" cy="914040"/>
+            <a:ext cx="11090160" cy="912960"/>
           </a:xfrm>
           <a:prstGeom prst="roundRect">
             <a:avLst>
@@ -18830,6 +20392,11 @@
             <a:noAutofit/>
           </a:bodyPr>
           <a:p>
+            <a:pPr>
+              <a:lnSpc>
+                <a:spcPct val="100000"/>
+              </a:lnSpc>
+            </a:pPr>
             <a:endParaRPr b="0" lang="en-US" sz="1800" strike="noStrike" u="none">
               <a:solidFill>
                 <a:srgbClr val="ffffff"/>
@@ -18843,14 +20410,14 @@
       </p:sp>
       <p:sp>
         <p:nvSpPr>
-          <p:cNvPr id="286" name="Text 38"/>
+          <p:cNvPr id="299" name="Text 38"/>
           <p:cNvSpPr/>
           <p:nvPr/>
         </p:nvSpPr>
         <p:spPr>
           <a:xfrm>
             <a:off x="822960" y="5934600"/>
-            <a:ext cx="10515240" cy="914040"/>
+            <a:ext cx="10514160" cy="912960"/>
           </a:xfrm>
           <a:prstGeom prst="rect">
             <a:avLst/>
@@ -18950,10 +20517,10 @@
         <a:srgbClr val="70ad47"/>
       </a:accent6>
       <a:hlink>
-        <a:srgbClr val="0563c1"/>
+        <a:srgbClr val="f2f2f2"/>
       </a:hlink>
       <a:folHlink>
-        <a:srgbClr val="954f72"/>
+        <a:srgbClr val="f2f2f2"/>
       </a:folHlink>
     </a:clrScheme>
     <a:fontScheme name="Office">
